--- a/Ch08_England_Burgundy.pptx
+++ b/Ch08_England_Burgundy.pptx
@@ -2186,7 +2186,7 @@
               <a:buNone/>
             </a:pPr>
             <a:r>
-              <a:rPr lang="en-US" sz="1100" spc="300" kern="0" dirty="0">
+              <a:rPr lang="en-US" sz="1400" spc="300" kern="0" dirty="0">
                 <a:solidFill>
                   <a:srgbClr val="E8D8A8"/>
                 </a:solidFill>
@@ -2196,7 +2196,7 @@
               </a:rPr>
               <a:t>A HISTORY OF WESTERN MUSIC · TENTH EDITION</a:t>
             </a:r>
-            <a:endParaRPr lang="en-US" sz="1100" dirty="0"/>
+            <a:endParaRPr lang="en-US" sz="1400" dirty="0"/>
           </a:p>
         </p:txBody>
       </p:sp>
@@ -2340,7 +2340,7 @@
               <a:buNone/>
             </a:pPr>
             <a:r>
-              <a:rPr lang="en-US" sz="1300" i="1" dirty="0">
+              <a:rPr lang="en-US" sz="1400" i="1" dirty="0">
                 <a:solidFill>
                   <a:srgbClr val="E8D8A8"/>
                 </a:solidFill>
@@ -2350,7 +2350,7 @@
               </a:rPr>
               <a:t>Contenance angloise · Dunstable · Binchois · Du Fay · The Polyphonic Mass</a:t>
             </a:r>
-            <a:endParaRPr lang="en-US" sz="1300" dirty="0"/>
+            <a:endParaRPr lang="en-US" sz="1400" dirty="0"/>
           </a:p>
         </p:txBody>
       </p:sp>
@@ -2372,14 +2372,14 @@
           <a:ln/>
         </p:spPr>
         <p:txBody>
-          <a:bodyPr wrap="square" rtlCol="0" anchor="ctr"/>
+          <a:bodyPr wrap="square" rtlCol="0" anchor="t"/>
           <a:lstStyle/>
           <a:p>
             <a:pPr algn="ctr" indent="0" marL="0">
               <a:buNone/>
             </a:pPr>
             <a:r>
-              <a:rPr lang="en-US" sz="1100" dirty="0">
+              <a:rPr lang="en-US" sz="1400" dirty="0">
                 <a:solidFill>
                   <a:srgbClr val="C8A020"/>
                 </a:solidFill>
@@ -2389,7 +2389,7 @@
               </a:rPr>
               <a:t>Textbook pp. 159–179</a:t>
             </a:r>
-            <a:endParaRPr lang="en-US" sz="1100" dirty="0"/>
+            <a:endParaRPr lang="en-US" sz="1400" dirty="0"/>
           </a:p>
         </p:txBody>
       </p:sp>
@@ -2529,7 +2529,7 @@
               <a:buNone/>
             </a:pPr>
             <a:r>
-              <a:rPr lang="en-US" sz="1300" dirty="0">
+              <a:rPr lang="en-US" sz="1400" dirty="0">
                 <a:solidFill>
                   <a:srgbClr val="3A4C38"/>
                 </a:solidFill>
@@ -2539,7 +2539,7 @@
               </a:rPr>
               <a:t>Continental Adaptation of English Faburden</a:t>
             </a:r>
-            <a:endParaRPr lang="en-US" sz="1300" dirty="0"/>
+            <a:endParaRPr lang="en-US" sz="1400" dirty="0"/>
           </a:p>
         </p:txBody>
       </p:sp>
@@ -2592,23 +2592,23 @@
         <p:spPr>
           <a:xfrm>
             <a:off x="411480" y="1261872"/>
-            <a:ext cx="8321040" cy="292608"/>
-          </a:xfrm>
-          <a:prstGeom prst="rect">
-            <a:avLst/>
-          </a:prstGeom>
-          <a:noFill/>
-          <a:ln/>
-        </p:spPr>
-        <p:txBody>
-          <a:bodyPr wrap="square" rtlCol="0" anchor="ctr"/>
-          <a:lstStyle/>
-          <a:p>
-            <a:pPr indent="0" marL="0">
-              <a:buNone/>
-            </a:pPr>
-            <a:r>
-              <a:rPr lang="en-US" sz="1200" b="1" dirty="0">
+            <a:ext cx="8321040" cy="365760"/>
+          </a:xfrm>
+          <a:prstGeom prst="rect">
+            <a:avLst/>
+          </a:prstGeom>
+          <a:noFill/>
+          <a:ln/>
+        </p:spPr>
+        <p:txBody>
+          <a:bodyPr wrap="square" lIns="0" tIns="0" rIns="0" bIns="0" rtlCol="0" anchor="ctr"/>
+          <a:lstStyle/>
+          <a:p>
+            <a:pPr indent="0" marL="0">
+              <a:buNone/>
+            </a:pPr>
+            <a:r>
+              <a:rPr lang="en-US" sz="1400" b="1" dirty="0">
                 <a:solidFill>
                   <a:srgbClr val="2E5A3A"/>
                 </a:solidFill>
@@ -2616,9 +2616,9 @@
                 <a:ea typeface="Georgia" pitchFamily="34" charset="-122"/>
                 <a:cs typeface="Georgia" pitchFamily="34" charset="-120"/>
               </a:rPr>
-              <a:t>🎼 技法說明 The Technique</a:t>
-            </a:r>
-            <a:endParaRPr lang="en-US" sz="1200" dirty="0"/>
+              <a:t>■ 技法說明 The Technique</a:t>
+            </a:r>
+            <a:endParaRPr lang="en-US" sz="1400" dirty="0"/>
           </a:p>
         </p:txBody>
       </p:sp>
@@ -2630,27 +2630,27 @@
         </p:nvSpPr>
         <p:spPr>
           <a:xfrm>
-            <a:off x="457200" y="1572768"/>
-            <a:ext cx="8229600" cy="1143000"/>
-          </a:xfrm>
-          <a:prstGeom prst="rect">
-            <a:avLst/>
-          </a:prstGeom>
-          <a:noFill/>
-          <a:ln/>
-        </p:spPr>
-        <p:txBody>
-          <a:bodyPr wrap="square" rtlCol="0" anchor="ctr"/>
+            <a:off x="457200" y="1719072"/>
+            <a:ext cx="8229600" cy="996696"/>
+          </a:xfrm>
+          <a:prstGeom prst="rect">
+            <a:avLst/>
+          </a:prstGeom>
+          <a:noFill/>
+          <a:ln/>
+        </p:spPr>
+        <p:txBody>
+          <a:bodyPr wrap="square" rtlCol="0" anchor="t"/>
           <a:lstStyle/>
           <a:p>
             <a:pPr indent="0" marL="0">
               <a:spcAft>
-                <a:spcPts val="300"/>
+                <a:spcPts val="100"/>
               </a:spcAft>
               <a:buNone/>
             </a:pPr>
             <a:r>
-              <a:rPr lang="en-US" sz="950" dirty="0">
+              <a:rPr lang="en-US" sz="1400" dirty="0">
                 <a:solidFill>
                   <a:srgbClr val="1B2B1F"/>
                 </a:solidFill>
@@ -2660,17 +2660,17 @@
               </a:rPr>
               <a:t>• 只寫出兩個聲部：cantus 與 tenor——主要以平行六度進行</a:t>
             </a:r>
-            <a:endParaRPr lang="en-US" sz="950" dirty="0"/>
+            <a:endParaRPr lang="en-US" sz="1400" dirty="0"/>
           </a:p>
           <a:p>
             <a:pPr indent="0" marL="0">
               <a:spcAft>
-                <a:spcPts val="300"/>
+                <a:spcPts val="100"/>
               </a:spcAft>
               <a:buNone/>
             </a:pPr>
             <a:r>
-              <a:rPr lang="en-US" sz="950" dirty="0">
+              <a:rPr lang="en-US" sz="1400" dirty="0">
                 <a:solidFill>
                   <a:srgbClr val="1B2B1F"/>
                 </a:solidFill>
@@ -2680,17 +2680,17 @@
               </a:rPr>
               <a:t>• 第三聲部不寫出——由歌手自動唱在 cantus 下方精確的平行四度</a:t>
             </a:r>
-            <a:endParaRPr lang="en-US" sz="950" dirty="0"/>
+            <a:endParaRPr lang="en-US" sz="1400" dirty="0"/>
           </a:p>
           <a:p>
             <a:pPr indent="0" marL="0">
               <a:spcAft>
-                <a:spcPts val="300"/>
+                <a:spcPts val="100"/>
               </a:spcAft>
               <a:buNone/>
             </a:pPr>
             <a:r>
-              <a:rPr lang="en-US" sz="950" dirty="0">
+              <a:rPr lang="en-US" sz="1400" dirty="0">
                 <a:solidFill>
                   <a:srgbClr val="1B2B1F"/>
                 </a:solidFill>
@@ -2700,17 +2700,17 @@
               </a:rPr>
               <a:t>• 結果形成連續的 6/3 和弦（類似英格蘭 faburden）</a:t>
             </a:r>
-            <a:endParaRPr lang="en-US" sz="950" dirty="0"/>
+            <a:endParaRPr lang="en-US" sz="1400" dirty="0"/>
           </a:p>
           <a:p>
             <a:pPr indent="0" marL="0">
               <a:spcAft>
-                <a:spcPts val="300"/>
+                <a:spcPts val="100"/>
               </a:spcAft>
               <a:buNone/>
             </a:pPr>
             <a:r>
-              <a:rPr lang="en-US" sz="950" dirty="0">
+              <a:rPr lang="en-US" sz="1400" dirty="0">
                 <a:solidFill>
                   <a:srgbClr val="1B2B1F"/>
                 </a:solidFill>
@@ -2720,17 +2720,17 @@
               </a:rPr>
               <a:t>• 每樂句末終止於開放五度與八度</a:t>
             </a:r>
-            <a:endParaRPr lang="en-US" sz="950" dirty="0"/>
+            <a:endParaRPr lang="en-US" sz="1400" dirty="0"/>
           </a:p>
           <a:p>
             <a:pPr indent="0" marL="0">
               <a:spcAft>
-                <a:spcPts val="300"/>
+                <a:spcPts val="100"/>
               </a:spcAft>
               <a:buNone/>
             </a:pPr>
             <a:r>
-              <a:rPr lang="en-US" sz="950" dirty="0">
+              <a:rPr lang="en-US" sz="1400" dirty="0">
                 <a:solidFill>
                   <a:srgbClr val="1B2B1F"/>
                 </a:solidFill>
@@ -2738,9 +2738,9 @@
                 <a:ea typeface="Calibri" pitchFamily="34" charset="-122"/>
                 <a:cs typeface="Calibri" pitchFamily="34" charset="-120"/>
               </a:rPr>
-              <a:t>• 受英格蘭 faburden 啟發——但技法不同（faburden 中聲部持 chant）</a:t>
-            </a:r>
-            <a:endParaRPr lang="en-US" sz="950" dirty="0"/>
+              <a:t>• 受英格蘭 faburden 啟發——但技法不同</a:t>
+            </a:r>
+            <a:endParaRPr lang="en-US" sz="1400" dirty="0"/>
           </a:p>
         </p:txBody>
       </p:sp>
@@ -2773,23 +2773,23 @@
         <p:spPr>
           <a:xfrm>
             <a:off x="411480" y="2907792"/>
-            <a:ext cx="3931920" cy="292608"/>
-          </a:xfrm>
-          <a:prstGeom prst="rect">
-            <a:avLst/>
-          </a:prstGeom>
-          <a:noFill/>
-          <a:ln/>
-        </p:spPr>
-        <p:txBody>
-          <a:bodyPr wrap="square" rtlCol="0" anchor="ctr"/>
-          <a:lstStyle/>
-          <a:p>
-            <a:pPr indent="0" marL="0">
-              <a:buNone/>
-            </a:pPr>
-            <a:r>
-              <a:rPr lang="en-US" sz="1200" b="1" dirty="0">
+            <a:ext cx="3931920" cy="365760"/>
+          </a:xfrm>
+          <a:prstGeom prst="rect">
+            <a:avLst/>
+          </a:prstGeom>
+          <a:noFill/>
+          <a:ln/>
+        </p:spPr>
+        <p:txBody>
+          <a:bodyPr wrap="square" lIns="0" tIns="0" rIns="0" bIns="0" rtlCol="0" anchor="ctr"/>
+          <a:lstStyle/>
+          <a:p>
+            <a:pPr indent="0" marL="0">
+              <a:buNone/>
+            </a:pPr>
+            <a:r>
+              <a:rPr lang="en-US" sz="1400" b="1" dirty="0">
                 <a:solidFill>
                   <a:srgbClr val="2E5A3A"/>
                 </a:solidFill>
@@ -2797,9 +2797,9 @@
                 <a:ea typeface="Georgia" pitchFamily="34" charset="-122"/>
                 <a:cs typeface="Georgia" pitchFamily="34" charset="-120"/>
               </a:rPr>
-              <a:t>📚 用途 Usage</a:t>
-            </a:r>
-            <a:endParaRPr lang="en-US" sz="1200" dirty="0"/>
+              <a:t>■ 用途 Usage</a:t>
+            </a:r>
+            <a:endParaRPr lang="en-US" sz="1400" dirty="0"/>
           </a:p>
         </p:txBody>
       </p:sp>
@@ -2811,27 +2811,27 @@
         </p:nvSpPr>
         <p:spPr>
           <a:xfrm>
-            <a:off x="457200" y="3218688"/>
-            <a:ext cx="3977640" cy="1554480"/>
-          </a:xfrm>
-          <a:prstGeom prst="rect">
-            <a:avLst/>
-          </a:prstGeom>
-          <a:noFill/>
-          <a:ln/>
-        </p:spPr>
-        <p:txBody>
-          <a:bodyPr wrap="square" rtlCol="0" anchor="ctr"/>
+            <a:off x="457200" y="3364992"/>
+            <a:ext cx="3977640" cy="1408176"/>
+          </a:xfrm>
+          <a:prstGeom prst="rect">
+            <a:avLst/>
+          </a:prstGeom>
+          <a:noFill/>
+          <a:ln/>
+        </p:spPr>
+        <p:txBody>
+          <a:bodyPr wrap="square" rtlCol="0" anchor="t"/>
           <a:lstStyle/>
           <a:p>
             <a:pPr indent="0" marL="0">
               <a:spcAft>
-                <a:spcPts val="200"/>
+                <a:spcPts val="100"/>
               </a:spcAft>
               <a:buNone/>
             </a:pPr>
             <a:r>
-              <a:rPr lang="en-US" sz="900" dirty="0">
+              <a:rPr lang="en-US" sz="1400" dirty="0">
                 <a:solidFill>
                   <a:srgbClr val="1B2B1F"/>
                 </a:solidFill>
@@ -2841,17 +2841,17 @@
               </a:rPr>
               <a:t>• Du Fay 有 24 部作品使用</a:t>
             </a:r>
-            <a:endParaRPr lang="en-US" sz="900" dirty="0"/>
+            <a:endParaRPr lang="en-US" sz="1400" dirty="0"/>
           </a:p>
           <a:p>
             <a:pPr indent="0" marL="0">
               <a:spcAft>
-                <a:spcPts val="200"/>
+                <a:spcPts val="100"/>
               </a:spcAft>
               <a:buNone/>
             </a:pPr>
             <a:r>
-              <a:rPr lang="en-US" sz="900" dirty="0">
+              <a:rPr lang="en-US" sz="1400" dirty="0">
                 <a:solidFill>
                   <a:srgbClr val="1B2B1F"/>
                 </a:solidFill>
@@ -2861,17 +2861,17 @@
               </a:rPr>
               <a:t>• 其他作曲家超過 100 部</a:t>
             </a:r>
-            <a:endParaRPr lang="en-US" sz="900" dirty="0"/>
+            <a:endParaRPr lang="en-US" sz="1400" dirty="0"/>
           </a:p>
           <a:p>
             <a:pPr indent="0" marL="0">
               <a:spcAft>
-                <a:spcPts val="200"/>
+                <a:spcPts val="100"/>
               </a:spcAft>
               <a:buNone/>
             </a:pPr>
             <a:r>
-              <a:rPr lang="en-US" sz="900" dirty="0">
+              <a:rPr lang="en-US" sz="1400" dirty="0">
                 <a:solidFill>
                   <a:srgbClr val="1B2B1F"/>
                 </a:solidFill>
@@ -2881,17 +2881,17 @@
               </a:rPr>
               <a:t>• 主要用於較簡單的日課聖歌：聖詩、對唱曲、詩篇、頌歌</a:t>
             </a:r>
-            <a:endParaRPr lang="en-US" sz="900" dirty="0"/>
+            <a:endParaRPr lang="en-US" sz="1400" dirty="0"/>
           </a:p>
           <a:p>
             <a:pPr indent="0" marL="0">
               <a:spcAft>
-                <a:spcPts val="200"/>
+                <a:spcPts val="100"/>
               </a:spcAft>
               <a:buNone/>
             </a:pPr>
             <a:r>
-              <a:rPr lang="en-US" sz="900" dirty="0">
+              <a:rPr lang="en-US" sz="1400" dirty="0">
                 <a:solidFill>
                   <a:srgbClr val="1B2B1F"/>
                 </a:solidFill>
@@ -2901,7 +2901,7 @@
               </a:rPr>
               <a:t>• cantus 中通常是 chant 的 paraphrase</a:t>
             </a:r>
-            <a:endParaRPr lang="en-US" sz="900" dirty="0"/>
+            <a:endParaRPr lang="en-US" sz="1400" dirty="0"/>
           </a:p>
         </p:txBody>
       </p:sp>
@@ -2934,23 +2934,23 @@
         <p:spPr>
           <a:xfrm>
             <a:off x="4800600" y="2907792"/>
-            <a:ext cx="3931920" cy="292608"/>
-          </a:xfrm>
-          <a:prstGeom prst="rect">
-            <a:avLst/>
-          </a:prstGeom>
-          <a:noFill/>
-          <a:ln/>
-        </p:spPr>
-        <p:txBody>
-          <a:bodyPr wrap="square" rtlCol="0" anchor="ctr"/>
-          <a:lstStyle/>
-          <a:p>
-            <a:pPr indent="0" marL="0">
-              <a:buNone/>
-            </a:pPr>
-            <a:r>
-              <a:rPr lang="en-US" sz="1200" b="1" dirty="0">
+            <a:ext cx="3931920" cy="365760"/>
+          </a:xfrm>
+          <a:prstGeom prst="rect">
+            <a:avLst/>
+          </a:prstGeom>
+          <a:noFill/>
+          <a:ln/>
+        </p:spPr>
+        <p:txBody>
+          <a:bodyPr wrap="square" lIns="0" tIns="0" rIns="0" bIns="0" rtlCol="0" anchor="ctr"/>
+          <a:lstStyle/>
+          <a:p>
+            <a:pPr indent="0" marL="0">
+              <a:buNone/>
+            </a:pPr>
+            <a:r>
+              <a:rPr lang="en-US" sz="1400" b="1" dirty="0">
                 <a:solidFill>
                   <a:srgbClr val="2E5A3A"/>
                 </a:solidFill>
@@ -2960,7 +2960,7 @@
               </a:rPr>
               <a:t>🆚 Faburden vs. Fauxbourdon</a:t>
             </a:r>
-            <a:endParaRPr lang="en-US" sz="1200" dirty="0"/>
+            <a:endParaRPr lang="en-US" sz="1400" dirty="0"/>
           </a:p>
         </p:txBody>
       </p:sp>
@@ -2972,27 +2972,27 @@
         </p:nvSpPr>
         <p:spPr>
           <a:xfrm>
-            <a:off x="4846320" y="3218688"/>
-            <a:ext cx="3977640" cy="1554480"/>
-          </a:xfrm>
-          <a:prstGeom prst="rect">
-            <a:avLst/>
-          </a:prstGeom>
-          <a:noFill/>
-          <a:ln/>
-        </p:spPr>
-        <p:txBody>
-          <a:bodyPr wrap="square" rtlCol="0" anchor="ctr"/>
+            <a:off x="4846320" y="3364992"/>
+            <a:ext cx="3977640" cy="1408176"/>
+          </a:xfrm>
+          <a:prstGeom prst="rect">
+            <a:avLst/>
+          </a:prstGeom>
+          <a:noFill/>
+          <a:ln/>
+        </p:spPr>
+        <p:txBody>
+          <a:bodyPr wrap="square" rtlCol="0" anchor="t"/>
           <a:lstStyle/>
           <a:p>
             <a:pPr indent="0" marL="0">
               <a:spcAft>
-                <a:spcPts val="200"/>
+                <a:spcPts val="100"/>
               </a:spcAft>
               <a:buNone/>
             </a:pPr>
             <a:r>
-              <a:rPr lang="en-US" sz="900" dirty="0">
+              <a:rPr lang="en-US" sz="1400" dirty="0">
                 <a:solidFill>
                   <a:srgbClr val="1B2B1F"/>
                 </a:solidFill>
@@ -3002,17 +3002,17 @@
               </a:rPr>
               <a:t>Faburden（英格蘭）</a:t>
             </a:r>
-            <a:endParaRPr lang="en-US" sz="900" dirty="0"/>
+            <a:endParaRPr lang="en-US" sz="1400" dirty="0"/>
           </a:p>
           <a:p>
             <a:pPr indent="0" marL="0">
               <a:spcAft>
-                <a:spcPts val="200"/>
+                <a:spcPts val="100"/>
               </a:spcAft>
               <a:buNone/>
             </a:pPr>
             <a:r>
-              <a:rPr lang="en-US" sz="900" dirty="0">
+              <a:rPr lang="en-US" sz="1400" dirty="0">
                 <a:solidFill>
                   <a:srgbClr val="1B2B1F"/>
                 </a:solidFill>
@@ -3020,19 +3020,19 @@
                 <a:ea typeface="Calibri" pitchFamily="34" charset="-122"/>
                 <a:cs typeface="Calibri" pitchFamily="34" charset="-120"/>
               </a:rPr>
-              <a:t>  • 中聲部 = chant</a:t>
-            </a:r>
-            <a:endParaRPr lang="en-US" sz="900" dirty="0"/>
+              <a:t>• 中聲部 = chant · 上下三四度</a:t>
+            </a:r>
+            <a:endParaRPr lang="en-US" sz="1400" dirty="0"/>
           </a:p>
           <a:p>
             <a:pPr indent="0" marL="0">
               <a:spcAft>
-                <a:spcPts val="200"/>
+                <a:spcPts val="100"/>
               </a:spcAft>
               <a:buNone/>
             </a:pPr>
             <a:r>
-              <a:rPr lang="en-US" sz="900" dirty="0">
+              <a:rPr lang="en-US" sz="1400" dirty="0">
                 <a:solidFill>
                   <a:srgbClr val="1B2B1F"/>
                 </a:solidFill>
@@ -3040,19 +3040,28 @@
                 <a:ea typeface="Calibri" pitchFamily="34" charset="-122"/>
                 <a:cs typeface="Calibri" pitchFamily="34" charset="-120"/>
               </a:rPr>
-              <a:t>  • 上方四度 · 下方三度</a:t>
-            </a:r>
-            <a:endParaRPr lang="en-US" sz="900" dirty="0"/>
+              <a:t>• 即興、規則式</a:t>
+            </a:r>
+            <a:endParaRPr lang="en-US" sz="1400" dirty="0"/>
           </a:p>
           <a:p>
             <a:pPr indent="0" marL="0">
               <a:spcAft>
-                <a:spcPts val="200"/>
+                <a:spcPts val="100"/>
               </a:spcAft>
               <a:buNone/>
             </a:pPr>
-            <a:r>
-              <a:rPr lang="en-US" sz="900" dirty="0">
+            <a:endParaRPr lang="en-US" sz="1400" dirty="0"/>
+          </a:p>
+          <a:p>
+            <a:pPr indent="0" marL="0">
+              <a:spcAft>
+                <a:spcPts val="100"/>
+              </a:spcAft>
+              <a:buNone/>
+            </a:pPr>
+            <a:r>
+              <a:rPr lang="en-US" sz="1400" dirty="0">
                 <a:solidFill>
                   <a:srgbClr val="1B2B1F"/>
                 </a:solidFill>
@@ -3060,28 +3069,39 @@
                 <a:ea typeface="Calibri" pitchFamily="34" charset="-122"/>
                 <a:cs typeface="Calibri" pitchFamily="34" charset="-120"/>
               </a:rPr>
-              <a:t>  • 即興、規則式</a:t>
-            </a:r>
-            <a:endParaRPr lang="en-US" sz="900" dirty="0"/>
+              <a:t>Fauxbourdon（歐陸）</a:t>
+            </a:r>
+            <a:endParaRPr lang="en-US" sz="1400" dirty="0"/>
           </a:p>
           <a:p>
             <a:pPr indent="0" marL="0">
               <a:spcAft>
-                <a:spcPts val="200"/>
+                <a:spcPts val="100"/>
               </a:spcAft>
               <a:buNone/>
             </a:pPr>
-            <a:endParaRPr lang="en-US" sz="900" dirty="0"/>
+            <a:r>
+              <a:rPr lang="en-US" sz="1400" dirty="0">
+                <a:solidFill>
+                  <a:srgbClr val="1B2B1F"/>
+                </a:solidFill>
+                <a:latin typeface="Calibri" pitchFamily="34" charset="0"/>
+                <a:ea typeface="Calibri" pitchFamily="34" charset="-122"/>
+                <a:cs typeface="Calibri" pitchFamily="34" charset="-120"/>
+              </a:rPr>
+              <a:t>• cantus = paraphrased chant</a:t>
+            </a:r>
+            <a:endParaRPr lang="en-US" sz="1400" dirty="0"/>
           </a:p>
           <a:p>
             <a:pPr indent="0" marL="0">
               <a:spcAft>
-                <a:spcPts val="200"/>
+                <a:spcPts val="100"/>
               </a:spcAft>
               <a:buNone/>
             </a:pPr>
             <a:r>
-              <a:rPr lang="en-US" sz="900" dirty="0">
+              <a:rPr lang="en-US" sz="1400" dirty="0">
                 <a:solidFill>
                   <a:srgbClr val="1B2B1F"/>
                 </a:solidFill>
@@ -3089,19 +3109,19 @@
                 <a:ea typeface="Calibri" pitchFamily="34" charset="-122"/>
                 <a:cs typeface="Calibri" pitchFamily="34" charset="-120"/>
               </a:rPr>
-              <a:t>Fauxbourdon（歐陸）</a:t>
-            </a:r>
-            <a:endParaRPr lang="en-US" sz="900" dirty="0"/>
+              <a:t>• 中聲部四度以下（未寫出）</a:t>
+            </a:r>
+            <a:endParaRPr lang="en-US" sz="1400" dirty="0"/>
           </a:p>
           <a:p>
             <a:pPr indent="0" marL="0">
               <a:spcAft>
-                <a:spcPts val="200"/>
+                <a:spcPts val="100"/>
               </a:spcAft>
               <a:buNone/>
             </a:pPr>
             <a:r>
-              <a:rPr lang="en-US" sz="900" dirty="0">
+              <a:rPr lang="en-US" sz="1400" dirty="0">
                 <a:solidFill>
                   <a:srgbClr val="1B2B1F"/>
                 </a:solidFill>
@@ -3109,49 +3129,9 @@
                 <a:ea typeface="Calibri" pitchFamily="34" charset="-122"/>
                 <a:cs typeface="Calibri" pitchFamily="34" charset="-120"/>
               </a:rPr>
-              <a:t>  • cantus（最高聲部）= paraphrased chant</a:t>
-            </a:r>
-            <a:endParaRPr lang="en-US" sz="900" dirty="0"/>
-          </a:p>
-          <a:p>
-            <a:pPr indent="0" marL="0">
-              <a:spcAft>
-                <a:spcPts val="200"/>
-              </a:spcAft>
-              <a:buNone/>
-            </a:pPr>
-            <a:r>
-              <a:rPr lang="en-US" sz="900" dirty="0">
-                <a:solidFill>
-                  <a:srgbClr val="1B2B1F"/>
-                </a:solidFill>
-                <a:latin typeface="Calibri" pitchFamily="34" charset="0"/>
-                <a:ea typeface="Calibri" pitchFamily="34" charset="-122"/>
-                <a:cs typeface="Calibri" pitchFamily="34" charset="-120"/>
-              </a:rPr>
-              <a:t>  • 未寫出的中聲部四度以下</a:t>
-            </a:r>
-            <a:endParaRPr lang="en-US" sz="900" dirty="0"/>
-          </a:p>
-          <a:p>
-            <a:pPr indent="0" marL="0">
-              <a:spcAft>
-                <a:spcPts val="200"/>
-              </a:spcAft>
-              <a:buNone/>
-            </a:pPr>
-            <a:r>
-              <a:rPr lang="en-US" sz="900" dirty="0">
-                <a:solidFill>
-                  <a:srgbClr val="1B2B1F"/>
-                </a:solidFill>
-                <a:latin typeface="Calibri" pitchFamily="34" charset="0"/>
-                <a:ea typeface="Calibri" pitchFamily="34" charset="-122"/>
-                <a:cs typeface="Calibri" pitchFamily="34" charset="-120"/>
-              </a:rPr>
-              <a:t>  • 寫譜作品</a:t>
-            </a:r>
-            <a:endParaRPr lang="en-US" sz="900" dirty="0"/>
+              <a:t>• 寫譜作品</a:t>
+            </a:r>
+            <a:endParaRPr lang="en-US" sz="1400" dirty="0"/>
           </a:p>
         </p:txBody>
       </p:sp>
@@ -3291,7 +3271,7 @@
               <a:buNone/>
             </a:pPr>
             <a:r>
-              <a:rPr lang="en-US" sz="1300" dirty="0">
+              <a:rPr lang="en-US" sz="1400" dirty="0">
                 <a:solidFill>
                   <a:srgbClr val="E8D8A8"/>
                 </a:solidFill>
@@ -3301,7 +3281,7 @@
               </a:rPr>
               <a:t>The Most Prestigious Musical Genre · 15th–16th Century</a:t>
             </a:r>
-            <a:endParaRPr lang="en-US" sz="1300" dirty="0"/>
+            <a:endParaRPr lang="en-US" sz="1400" dirty="0"/>
           </a:p>
         </p:txBody>
       </p:sp>
@@ -3422,14 +3402,14 @@
           <a:ln/>
         </p:spPr>
         <p:txBody>
-          <a:bodyPr wrap="square" rtlCol="0" anchor="ctr"/>
-          <a:lstStyle/>
-          <a:p>
-            <a:pPr indent="0" marL="0">
-              <a:buNone/>
-            </a:pPr>
-            <a:r>
-              <a:rPr lang="en-US" sz="1200" b="1" dirty="0">
+          <a:bodyPr wrap="square" lIns="0" tIns="0" rIns="0" bIns="0" rtlCol="0" anchor="ctr"/>
+          <a:lstStyle/>
+          <a:p>
+            <a:pPr indent="0" marL="0">
+              <a:buNone/>
+            </a:pPr>
+            <a:r>
+              <a:rPr lang="en-US" sz="1400" b="1" dirty="0">
                 <a:solidFill>
                   <a:srgbClr val="C8A020"/>
                 </a:solidFill>
@@ -3439,7 +3419,7 @@
               </a:rPr>
               <a:t>Stylistic Coherence 風格一致</a:t>
             </a:r>
-            <a:endParaRPr lang="en-US" sz="1200" dirty="0"/>
+            <a:endParaRPr lang="en-US" sz="1400" dirty="0"/>
           </a:p>
         </p:txBody>
       </p:sp>
@@ -3461,14 +3441,14 @@
           <a:ln/>
         </p:spPr>
         <p:txBody>
-          <a:bodyPr wrap="square" rtlCol="0" anchor="ctr"/>
-          <a:lstStyle/>
-          <a:p>
-            <a:pPr indent="0" marL="0">
-              <a:buNone/>
-            </a:pPr>
-            <a:r>
-              <a:rPr lang="en-US" sz="900" dirty="0">
+          <a:bodyPr wrap="square" rtlCol="0" anchor="t"/>
+          <a:lstStyle/>
+          <a:p>
+            <a:pPr indent="0" marL="0">
+              <a:buNone/>
+            </a:pPr>
+            <a:r>
+              <a:rPr lang="en-US" sz="1400" dirty="0">
                 <a:solidFill>
                   <a:srgbClr val="E8D8A8"/>
                 </a:solidFill>
@@ -3478,7 +3458,7 @@
               </a:rPr>
               <a:t>僅靠整體風格連結——最鬆散 · 無旋律關聯</a:t>
             </a:r>
-            <a:endParaRPr lang="en-US" sz="900" dirty="0"/>
+            <a:endParaRPr lang="en-US" sz="1400" dirty="0"/>
           </a:p>
         </p:txBody>
       </p:sp>
@@ -3579,14 +3559,14 @@
           <a:ln/>
         </p:spPr>
         <p:txBody>
-          <a:bodyPr wrap="square" rtlCol="0" anchor="ctr"/>
-          <a:lstStyle/>
-          <a:p>
-            <a:pPr indent="0" marL="0">
-              <a:buNone/>
-            </a:pPr>
-            <a:r>
-              <a:rPr lang="en-US" sz="1200" b="1" dirty="0">
+          <a:bodyPr wrap="square" lIns="0" tIns="0" rIns="0" bIns="0" rtlCol="0" anchor="ctr"/>
+          <a:lstStyle/>
+          <a:p>
+            <a:pPr indent="0" marL="0">
+              <a:buNone/>
+            </a:pPr>
+            <a:r>
+              <a:rPr lang="en-US" sz="1400" b="1" dirty="0">
                 <a:solidFill>
                   <a:srgbClr val="C8A020"/>
                 </a:solidFill>
@@ -3596,7 +3576,7 @@
               </a:rPr>
               <a:t>Plainsong Mass 聖歌彌撒</a:t>
             </a:r>
-            <a:endParaRPr lang="en-US" sz="1200" dirty="0"/>
+            <a:endParaRPr lang="en-US" sz="1400" dirty="0"/>
           </a:p>
         </p:txBody>
       </p:sp>
@@ -3618,14 +3598,14 @@
           <a:ln/>
         </p:spPr>
         <p:txBody>
-          <a:bodyPr wrap="square" rtlCol="0" anchor="ctr"/>
-          <a:lstStyle/>
-          <a:p>
-            <a:pPr indent="0" marL="0">
-              <a:buNone/>
-            </a:pPr>
-            <a:r>
-              <a:rPr lang="en-US" sz="900" dirty="0">
+          <a:bodyPr wrap="square" rtlCol="0" anchor="t"/>
+          <a:lstStyle/>
+          <a:p>
+            <a:pPr indent="0" marL="0">
+              <a:buNone/>
+            </a:pPr>
+            <a:r>
+              <a:rPr lang="en-US" sz="1400" dirty="0">
                 <a:solidFill>
                   <a:srgbClr val="E8D8A8"/>
                 </a:solidFill>
@@ -3635,7 +3615,7 @@
               </a:rPr>
               <a:t>各樂章用各自對應的 chant（如 Machaut 彌撒）· 僅禮儀相關</a:t>
             </a:r>
-            <a:endParaRPr lang="en-US" sz="900" dirty="0"/>
+            <a:endParaRPr lang="en-US" sz="1400" dirty="0"/>
           </a:p>
         </p:txBody>
       </p:sp>
@@ -3736,14 +3716,14 @@
           <a:ln/>
         </p:spPr>
         <p:txBody>
-          <a:bodyPr wrap="square" rtlCol="0" anchor="ctr"/>
-          <a:lstStyle/>
-          <a:p>
-            <a:pPr indent="0" marL="0">
-              <a:buNone/>
-            </a:pPr>
-            <a:r>
-              <a:rPr lang="en-US" sz="1200" b="1" dirty="0">
+          <a:bodyPr wrap="square" lIns="0" tIns="0" rIns="0" bIns="0" rtlCol="0" anchor="ctr"/>
+          <a:lstStyle/>
+          <a:p>
+            <a:pPr indent="0" marL="0">
+              <a:buNone/>
+            </a:pPr>
+            <a:r>
+              <a:rPr lang="en-US" sz="1400" b="1" dirty="0">
                 <a:solidFill>
                   <a:srgbClr val="C8A020"/>
                 </a:solidFill>
@@ -3753,7 +3733,7 @@
               </a:rPr>
               <a:t>Motto Mass 動機彌撒</a:t>
             </a:r>
-            <a:endParaRPr lang="en-US" sz="1200" dirty="0"/>
+            <a:endParaRPr lang="en-US" sz="1400" dirty="0"/>
           </a:p>
         </p:txBody>
       </p:sp>
@@ -3775,14 +3755,14 @@
           <a:ln/>
         </p:spPr>
         <p:txBody>
-          <a:bodyPr wrap="square" rtlCol="0" anchor="ctr"/>
-          <a:lstStyle/>
-          <a:p>
-            <a:pPr indent="0" marL="0">
-              <a:buNone/>
-            </a:pPr>
-            <a:r>
-              <a:rPr lang="en-US" sz="900" dirty="0">
+          <a:bodyPr wrap="square" rtlCol="0" anchor="t"/>
+          <a:lstStyle/>
+          <a:p>
+            <a:pPr indent="0" marL="0">
+              <a:buNone/>
+            </a:pPr>
+            <a:r>
+              <a:rPr lang="en-US" sz="1400" dirty="0">
                 <a:solidFill>
                   <a:srgbClr val="E8D8A8"/>
                 </a:solidFill>
@@ -3792,7 +3772,7 @@
               </a:rPr>
               <a:t>各樂章以相同 head motive（開頭音型）開始</a:t>
             </a:r>
-            <a:endParaRPr lang="en-US" sz="900" dirty="0"/>
+            <a:endParaRPr lang="en-US" sz="1400" dirty="0"/>
           </a:p>
         </p:txBody>
       </p:sp>
@@ -3893,14 +3873,14 @@
           <a:ln/>
         </p:spPr>
         <p:txBody>
-          <a:bodyPr wrap="square" rtlCol="0" anchor="ctr"/>
-          <a:lstStyle/>
-          <a:p>
-            <a:pPr indent="0" marL="0">
-              <a:buNone/>
-            </a:pPr>
-            <a:r>
-              <a:rPr lang="en-US" sz="1200" b="1" dirty="0">
+          <a:bodyPr wrap="square" lIns="0" tIns="0" rIns="0" bIns="0" rtlCol="0" anchor="ctr"/>
+          <a:lstStyle/>
+          <a:p>
+            <a:pPr indent="0" marL="0">
+              <a:buNone/>
+            </a:pPr>
+            <a:r>
+              <a:rPr lang="en-US" sz="1400" b="1" dirty="0">
                 <a:solidFill>
                   <a:srgbClr val="C8A020"/>
                 </a:solidFill>
@@ -3910,7 +3890,7 @@
               </a:rPr>
               <a:t>Cantus-firmus / Tenor Mass</a:t>
             </a:r>
-            <a:endParaRPr lang="en-US" sz="1200" dirty="0"/>
+            <a:endParaRPr lang="en-US" sz="1400" dirty="0"/>
           </a:p>
         </p:txBody>
       </p:sp>
@@ -3932,14 +3912,14 @@
           <a:ln/>
         </p:spPr>
         <p:txBody>
-          <a:bodyPr wrap="square" rtlCol="0" anchor="ctr"/>
-          <a:lstStyle/>
-          <a:p>
-            <a:pPr indent="0" marL="0">
-              <a:buNone/>
-            </a:pPr>
-            <a:r>
-              <a:rPr lang="en-US" sz="900" dirty="0">
+          <a:bodyPr wrap="square" rtlCol="0" anchor="t"/>
+          <a:lstStyle/>
+          <a:p>
+            <a:pPr indent="0" marL="0">
+              <a:buNone/>
+            </a:pPr>
+            <a:r>
+              <a:rPr lang="en-US" sz="1400" dirty="0">
                 <a:solidFill>
                   <a:srgbClr val="E8D8A8"/>
                 </a:solidFill>
@@ -3949,7 +3929,7 @@
               </a:rPr>
               <a:t>同一 cantus firmus 置於所有樂章的 tenor · 15 世紀下半主流 · 通常四聲部</a:t>
             </a:r>
-            <a:endParaRPr lang="en-US" sz="900" dirty="0"/>
+            <a:endParaRPr lang="en-US" sz="1400" dirty="0"/>
           </a:p>
         </p:txBody>
       </p:sp>
@@ -4050,14 +4030,14 @@
           <a:ln/>
         </p:spPr>
         <p:txBody>
-          <a:bodyPr wrap="square" rtlCol="0" anchor="ctr"/>
-          <a:lstStyle/>
-          <a:p>
-            <a:pPr indent="0" marL="0">
-              <a:buNone/>
-            </a:pPr>
-            <a:r>
-              <a:rPr lang="en-US" sz="1200" b="1" dirty="0">
+          <a:bodyPr wrap="square" lIns="0" tIns="0" rIns="0" bIns="0" rtlCol="0" anchor="ctr"/>
+          <a:lstStyle/>
+          <a:p>
+            <a:pPr indent="0" marL="0">
+              <a:buNone/>
+            </a:pPr>
+            <a:r>
+              <a:rPr lang="en-US" sz="1400" b="1" dirty="0">
                 <a:solidFill>
                   <a:srgbClr val="C8A020"/>
                 </a:solidFill>
@@ -4067,7 +4047,7 @@
               </a:rPr>
               <a:t>Cantus-firmus/Imitation Mass</a:t>
             </a:r>
-            <a:endParaRPr lang="en-US" sz="1200" dirty="0"/>
+            <a:endParaRPr lang="en-US" sz="1400" dirty="0"/>
           </a:p>
         </p:txBody>
       </p:sp>
@@ -4089,14 +4069,14 @@
           <a:ln/>
         </p:spPr>
         <p:txBody>
-          <a:bodyPr wrap="square" rtlCol="0" anchor="ctr"/>
-          <a:lstStyle/>
-          <a:p>
-            <a:pPr indent="0" marL="0">
-              <a:buNone/>
-            </a:pPr>
-            <a:r>
-              <a:rPr lang="en-US" sz="900" dirty="0">
+          <a:bodyPr wrap="square" rtlCol="0" anchor="t"/>
+          <a:lstStyle/>
+          <a:p>
+            <a:pPr indent="0" marL="0">
+              <a:buNone/>
+            </a:pPr>
+            <a:r>
+              <a:rPr lang="en-US" sz="1400" dirty="0">
                 <a:solidFill>
                   <a:srgbClr val="E8D8A8"/>
                 </a:solidFill>
@@ -4106,7 +4086,7 @@
               </a:rPr>
               <a:t>不只借用 tenor，也借用原曲其他聲部的片段（Du Fay Missa Se la face ay pale）</a:t>
             </a:r>
-            <a:endParaRPr lang="en-US" sz="900" dirty="0"/>
+            <a:endParaRPr lang="en-US" sz="1400" dirty="0"/>
           </a:p>
         </p:txBody>
       </p:sp>
@@ -4246,7 +4226,7 @@
               <a:buNone/>
             </a:pPr>
             <a:r>
-              <a:rPr lang="en-US" sz="1300" dirty="0">
+              <a:rPr lang="en-US" sz="1400" dirty="0">
                 <a:solidFill>
                   <a:srgbClr val="3A4C38"/>
                 </a:solidFill>
@@ -4256,7 +4236,7 @@
               </a:rPr>
               <a:t>Four Voices · Missa Caput · L'homme armé Tradition</a:t>
             </a:r>
-            <a:endParaRPr lang="en-US" sz="1300" dirty="0"/>
+            <a:endParaRPr lang="en-US" sz="1400" dirty="0"/>
           </a:p>
         </p:txBody>
       </p:sp>
@@ -4289,7 +4269,7 @@
         <p:spPr>
           <a:xfrm>
             <a:off x="274320" y="1188720"/>
-            <a:ext cx="4206240" cy="3611880"/>
+            <a:ext cx="4206240" cy="3794760"/>
           </a:xfrm>
           <a:prstGeom prst="rect">
             <a:avLst/>
@@ -4309,23 +4289,23 @@
         <p:spPr>
           <a:xfrm>
             <a:off x="411480" y="1261872"/>
-            <a:ext cx="3931920" cy="292608"/>
-          </a:xfrm>
-          <a:prstGeom prst="rect">
-            <a:avLst/>
-          </a:prstGeom>
-          <a:noFill/>
-          <a:ln/>
-        </p:spPr>
-        <p:txBody>
-          <a:bodyPr wrap="square" rtlCol="0" anchor="ctr"/>
-          <a:lstStyle/>
-          <a:p>
-            <a:pPr indent="0" marL="0">
-              <a:buNone/>
-            </a:pPr>
-            <a:r>
-              <a:rPr lang="en-US" sz="1200" b="1" dirty="0">
+            <a:ext cx="3931920" cy="365760"/>
+          </a:xfrm>
+          <a:prstGeom prst="rect">
+            <a:avLst/>
+          </a:prstGeom>
+          <a:noFill/>
+          <a:ln/>
+        </p:spPr>
+        <p:txBody>
+          <a:bodyPr wrap="square" lIns="0" tIns="0" rIns="0" bIns="0" rtlCol="0" anchor="ctr"/>
+          <a:lstStyle/>
+          <a:p>
+            <a:pPr indent="0" marL="0">
+              <a:buNone/>
+            </a:pPr>
+            <a:r>
+              <a:rPr lang="en-US" sz="1400" b="1" dirty="0">
                 <a:solidFill>
                   <a:srgbClr val="7A2830"/>
                 </a:solidFill>
@@ -4333,9 +4313,9 @@
                 <a:ea typeface="Georgia" pitchFamily="34" charset="-122"/>
                 <a:cs typeface="Georgia" pitchFamily="34" charset="-120"/>
               </a:rPr>
-              <a:t>🔑 關鍵創新 Key Innovations</a:t>
-            </a:r>
-            <a:endParaRPr lang="en-US" sz="1200" dirty="0"/>
+              <a:t>■ 關鍵創新 Key Innovations</a:t>
+            </a:r>
+            <a:endParaRPr lang="en-US" sz="1400" dirty="0"/>
           </a:p>
         </p:txBody>
       </p:sp>
@@ -4347,27 +4327,27 @@
         </p:nvSpPr>
         <p:spPr>
           <a:xfrm>
-            <a:off x="457200" y="1572768"/>
-            <a:ext cx="3977640" cy="3154680"/>
-          </a:xfrm>
-          <a:prstGeom prst="rect">
-            <a:avLst/>
-          </a:prstGeom>
-          <a:noFill/>
-          <a:ln/>
-        </p:spPr>
-        <p:txBody>
-          <a:bodyPr wrap="square" rtlCol="0" anchor="ctr"/>
+            <a:off x="457200" y="1719072"/>
+            <a:ext cx="3977640" cy="3246120"/>
+          </a:xfrm>
+          <a:prstGeom prst="rect">
+            <a:avLst/>
+          </a:prstGeom>
+          <a:noFill/>
+          <a:ln/>
+        </p:spPr>
+        <p:txBody>
+          <a:bodyPr wrap="square" rtlCol="0" anchor="t"/>
           <a:lstStyle/>
           <a:p>
             <a:pPr indent="0" marL="0">
               <a:spcAft>
-                <a:spcPts val="200"/>
+                <a:spcPts val="100"/>
               </a:spcAft>
               <a:buNone/>
             </a:pPr>
             <a:r>
-              <a:rPr lang="en-US" sz="850" dirty="0">
+              <a:rPr lang="en-US" sz="1400" dirty="0">
                 <a:solidFill>
                   <a:srgbClr val="1B2B1F"/>
                 </a:solidFill>
@@ -4377,17 +4357,17 @@
               </a:rPr>
               <a:t>• 英格蘭作曲家最早寫作——Dunstable、Leonel Power（d. 1445）</a:t>
             </a:r>
-            <a:endParaRPr lang="en-US" sz="850" dirty="0"/>
+            <a:endParaRPr lang="en-US" sz="1400" dirty="0"/>
           </a:p>
           <a:p>
             <a:pPr indent="0" marL="0">
               <a:spcAft>
-                <a:spcPts val="200"/>
+                <a:spcPts val="100"/>
               </a:spcAft>
               <a:buNone/>
             </a:pPr>
             <a:r>
-              <a:rPr lang="en-US" sz="850" dirty="0">
+              <a:rPr lang="en-US" sz="1400" dirty="0">
                 <a:solidFill>
                   <a:srgbClr val="1B2B1F"/>
                 </a:solidFill>
@@ -4397,17 +4377,17 @@
               </a:rPr>
               <a:t>• 早期為三聲部——cantus firmus 置於 tenor</a:t>
             </a:r>
-            <a:endParaRPr lang="en-US" sz="850" dirty="0"/>
+            <a:endParaRPr lang="en-US" sz="1400" dirty="0"/>
           </a:p>
           <a:p>
             <a:pPr indent="0" marL="0">
               <a:spcAft>
-                <a:spcPts val="200"/>
+                <a:spcPts val="100"/>
               </a:spcAft>
               <a:buNone/>
             </a:pPr>
             <a:r>
-              <a:rPr lang="en-US" sz="850" dirty="0">
+              <a:rPr lang="en-US" sz="1400" dirty="0">
                 <a:solidFill>
                   <a:srgbClr val="1B2B1F"/>
                 </a:solidFill>
@@ -4417,17 +4397,17 @@
               </a:rPr>
               <a:t>• 問題：tenor 若為最低聲部，則無法作為和聲基礎</a:t>
             </a:r>
-            <a:endParaRPr lang="en-US" sz="850" dirty="0"/>
+            <a:endParaRPr lang="en-US" sz="1400" dirty="0"/>
           </a:p>
           <a:p>
             <a:pPr indent="0" marL="0">
               <a:spcAft>
-                <a:spcPts val="200"/>
+                <a:spcPts val="100"/>
               </a:spcAft>
               <a:buNone/>
             </a:pPr>
             <a:r>
-              <a:rPr lang="en-US" sz="850" dirty="0">
+              <a:rPr lang="en-US" sz="1400" dirty="0">
                 <a:solidFill>
                   <a:srgbClr val="1B2B1F"/>
                 </a:solidFill>
@@ -4437,17 +4417,17 @@
               </a:rPr>
               <a:t>• 解決：1440s 匿名 Missa Caput 首創——在 tenor 下加入第四聲部</a:t>
             </a:r>
-            <a:endParaRPr lang="en-US" sz="850" dirty="0"/>
+            <a:endParaRPr lang="en-US" sz="1400" dirty="0"/>
           </a:p>
           <a:p>
             <a:pPr indent="0" marL="0">
               <a:spcAft>
-                <a:spcPts val="200"/>
+                <a:spcPts val="100"/>
               </a:spcAft>
               <a:buNone/>
             </a:pPr>
             <a:r>
-              <a:rPr lang="en-US" sz="850" dirty="0">
+              <a:rPr lang="en-US" sz="1400" dirty="0">
                 <a:solidFill>
                   <a:srgbClr val="1B2B1F"/>
                 </a:solidFill>
@@ -4457,17 +4437,17 @@
               </a:rPr>
               <a:t>• 四聲部命名：</a:t>
             </a:r>
-            <a:endParaRPr lang="en-US" sz="850" dirty="0"/>
+            <a:endParaRPr lang="en-US" sz="1400" dirty="0"/>
           </a:p>
           <a:p>
             <a:pPr indent="0" marL="0">
               <a:spcAft>
-                <a:spcPts val="200"/>
+                <a:spcPts val="100"/>
               </a:spcAft>
               <a:buNone/>
             </a:pPr>
             <a:r>
-              <a:rPr lang="en-US" sz="850" dirty="0">
+              <a:rPr lang="en-US" sz="1400" dirty="0">
                 <a:solidFill>
                   <a:srgbClr val="1B2B1F"/>
                 </a:solidFill>
@@ -4477,17 +4457,17 @@
               </a:rPr>
               <a:t>  - superius / cantus / discantus（英文 soprano 來源）</a:t>
             </a:r>
-            <a:endParaRPr lang="en-US" sz="850" dirty="0"/>
+            <a:endParaRPr lang="en-US" sz="1400" dirty="0"/>
           </a:p>
           <a:p>
             <a:pPr indent="0" marL="0">
               <a:spcAft>
-                <a:spcPts val="200"/>
+                <a:spcPts val="100"/>
               </a:spcAft>
               <a:buNone/>
             </a:pPr>
             <a:r>
-              <a:rPr lang="en-US" sz="850" dirty="0">
+              <a:rPr lang="en-US" sz="1400" dirty="0">
                 <a:solidFill>
                   <a:srgbClr val="1B2B1F"/>
                 </a:solidFill>
@@ -4497,17 +4477,17 @@
               </a:rPr>
               <a:t>  - contratenor altus → altus → alto</a:t>
             </a:r>
-            <a:endParaRPr lang="en-US" sz="850" dirty="0"/>
+            <a:endParaRPr lang="en-US" sz="1400" dirty="0"/>
           </a:p>
           <a:p>
             <a:pPr indent="0" marL="0">
               <a:spcAft>
-                <a:spcPts val="200"/>
+                <a:spcPts val="100"/>
               </a:spcAft>
               <a:buNone/>
             </a:pPr>
             <a:r>
-              <a:rPr lang="en-US" sz="850" dirty="0">
+              <a:rPr lang="en-US" sz="1400" dirty="0">
                 <a:solidFill>
                   <a:srgbClr val="1B2B1F"/>
                 </a:solidFill>
@@ -4517,17 +4497,17 @@
               </a:rPr>
               <a:t>  - tenor（持 cantus firmus）</a:t>
             </a:r>
-            <a:endParaRPr lang="en-US" sz="850" dirty="0"/>
+            <a:endParaRPr lang="en-US" sz="1400" dirty="0"/>
           </a:p>
           <a:p>
             <a:pPr indent="0" marL="0">
               <a:spcAft>
-                <a:spcPts val="200"/>
+                <a:spcPts val="100"/>
               </a:spcAft>
               <a:buNone/>
             </a:pPr>
             <a:r>
-              <a:rPr lang="en-US" sz="850" dirty="0">
+              <a:rPr lang="en-US" sz="1400" dirty="0">
                 <a:solidFill>
                   <a:srgbClr val="1B2B1F"/>
                 </a:solidFill>
@@ -4537,17 +4517,17 @@
               </a:rPr>
               <a:t>  - contratenor bassus → bassus → bass</a:t>
             </a:r>
-            <a:endParaRPr lang="en-US" sz="850" dirty="0"/>
+            <a:endParaRPr lang="en-US" sz="1400" dirty="0"/>
           </a:p>
           <a:p>
             <a:pPr indent="0" marL="0">
               <a:spcAft>
-                <a:spcPts val="200"/>
+                <a:spcPts val="100"/>
               </a:spcAft>
               <a:buNone/>
             </a:pPr>
             <a:r>
-              <a:rPr lang="en-US" sz="850" dirty="0">
+              <a:rPr lang="en-US" sz="1400" dirty="0">
                 <a:solidFill>
                   <a:srgbClr val="1B2B1F"/>
                 </a:solidFill>
@@ -4557,7 +4537,7 @@
               </a:rPr>
               <a:t>• 四聲部織度至此成為標準——持續至今</a:t>
             </a:r>
-            <a:endParaRPr lang="en-US" sz="850" dirty="0"/>
+            <a:endParaRPr lang="en-US" sz="1400" dirty="0"/>
           </a:p>
         </p:txBody>
       </p:sp>
@@ -4570,7 +4550,7 @@
         <p:spPr>
           <a:xfrm>
             <a:off x="4663440" y="1188720"/>
-            <a:ext cx="4206240" cy="3611880"/>
+            <a:ext cx="4206240" cy="3794760"/>
           </a:xfrm>
           <a:prstGeom prst="rect">
             <a:avLst/>
@@ -4590,23 +4570,23 @@
         <p:spPr>
           <a:xfrm>
             <a:off x="4800600" y="1261872"/>
-            <a:ext cx="3931920" cy="292608"/>
-          </a:xfrm>
-          <a:prstGeom prst="rect">
-            <a:avLst/>
-          </a:prstGeom>
-          <a:noFill/>
-          <a:ln/>
-        </p:spPr>
-        <p:txBody>
-          <a:bodyPr wrap="square" rtlCol="0" anchor="ctr"/>
-          <a:lstStyle/>
-          <a:p>
-            <a:pPr indent="0" marL="0">
-              <a:buNone/>
-            </a:pPr>
-            <a:r>
-              <a:rPr lang="en-US" sz="1200" b="1" dirty="0">
+            <a:ext cx="3931920" cy="365760"/>
+          </a:xfrm>
+          <a:prstGeom prst="rect">
+            <a:avLst/>
+          </a:prstGeom>
+          <a:noFill/>
+          <a:ln/>
+        </p:spPr>
+        <p:txBody>
+          <a:bodyPr wrap="square" lIns="0" tIns="0" rIns="0" bIns="0" rtlCol="0" anchor="ctr"/>
+          <a:lstStyle/>
+          <a:p>
+            <a:pPr indent="0" marL="0">
+              <a:buNone/>
+            </a:pPr>
+            <a:r>
+              <a:rPr lang="en-US" sz="1400" b="1" dirty="0">
                 <a:solidFill>
                   <a:srgbClr val="7A2830"/>
                 </a:solidFill>
@@ -4614,9 +4594,9 @@
                 <a:ea typeface="Georgia" pitchFamily="34" charset="-122"/>
                 <a:cs typeface="Georgia" pitchFamily="34" charset="-120"/>
               </a:rPr>
-              <a:t>⭐ Missa Se la face ay pale (NAWM 37)</a:t>
-            </a:r>
-            <a:endParaRPr lang="en-US" sz="1200" dirty="0"/>
+              <a:t>■ Missa Se la face ay pale (NAWM 37)</a:t>
+            </a:r>
+            <a:endParaRPr lang="en-US" sz="1400" dirty="0"/>
           </a:p>
         </p:txBody>
       </p:sp>
@@ -4628,27 +4608,27 @@
         </p:nvSpPr>
         <p:spPr>
           <a:xfrm>
-            <a:off x="4846320" y="1572768"/>
-            <a:ext cx="3977640" cy="3154680"/>
-          </a:xfrm>
-          <a:prstGeom prst="rect">
-            <a:avLst/>
-          </a:prstGeom>
-          <a:noFill/>
-          <a:ln/>
-        </p:spPr>
-        <p:txBody>
-          <a:bodyPr wrap="square" rtlCol="0" anchor="ctr"/>
+            <a:off x="4846320" y="1719072"/>
+            <a:ext cx="3977640" cy="3246120"/>
+          </a:xfrm>
+          <a:prstGeom prst="rect">
+            <a:avLst/>
+          </a:prstGeom>
+          <a:noFill/>
+          <a:ln/>
+        </p:spPr>
+        <p:txBody>
+          <a:bodyPr wrap="square" rtlCol="0" anchor="t"/>
           <a:lstStyle/>
           <a:p>
             <a:pPr indent="0" marL="0">
               <a:spcAft>
-                <a:spcPts val="200"/>
+                <a:spcPts val="100"/>
               </a:spcAft>
               <a:buNone/>
             </a:pPr>
             <a:r>
-              <a:rPr lang="en-US" sz="800" dirty="0">
+              <a:rPr lang="en-US" sz="1400" dirty="0">
                 <a:solidFill>
                   <a:srgbClr val="1B2B1F"/>
                 </a:solidFill>
@@ -4658,17 +4638,17 @@
               </a:rPr>
               <a:t>Du Fay 1450s 寫於 Savoy</a:t>
             </a:r>
-            <a:endParaRPr lang="en-US" sz="800" dirty="0"/>
+            <a:endParaRPr lang="en-US" sz="1400" dirty="0"/>
           </a:p>
           <a:p>
             <a:pPr indent="0" marL="0">
               <a:spcAft>
-                <a:spcPts val="200"/>
+                <a:spcPts val="100"/>
               </a:spcAft>
               <a:buNone/>
             </a:pPr>
             <a:r>
-              <a:rPr lang="en-US" sz="800" dirty="0">
+              <a:rPr lang="en-US" sz="1400" dirty="0">
                 <a:solidFill>
                   <a:srgbClr val="1B2B1F"/>
                 </a:solidFill>
@@ -4676,19 +4656,19 @@
                 <a:ea typeface="Calibri" pitchFamily="34" charset="-122"/>
                 <a:cs typeface="Calibri" pitchFamily="34" charset="-120"/>
               </a:rPr>
-              <a:t>• 首部已知以世俗歌曲為 cantus firmus 的完整彌撒</a:t>
-            </a:r>
-            <a:endParaRPr lang="en-US" sz="800" dirty="0"/>
+              <a:t>• 首部以世俗歌曲為 cantus firmus 的完整彌撒</a:t>
+            </a:r>
+            <a:endParaRPr lang="en-US" sz="1400" dirty="0"/>
           </a:p>
           <a:p>
             <a:pPr indent="0" marL="0">
               <a:spcAft>
-                <a:spcPts val="200"/>
+                <a:spcPts val="100"/>
               </a:spcAft>
               <a:buNone/>
             </a:pPr>
             <a:r>
-              <a:rPr lang="en-US" sz="800" dirty="0">
+              <a:rPr lang="en-US" sz="1400" dirty="0">
                 <a:solidFill>
                   <a:srgbClr val="1B2B1F"/>
                 </a:solidFill>
@@ -4696,19 +4676,19 @@
                 <a:ea typeface="Calibri" pitchFamily="34" charset="-122"/>
                 <a:cs typeface="Calibri" pitchFamily="34" charset="-120"/>
               </a:rPr>
-              <a:t>• 以自己的 ballade tenor 為 cantus firmus</a:t>
-            </a:r>
-            <a:endParaRPr lang="en-US" sz="800" dirty="0"/>
+              <a:t>• 以自己的 ballade tenor 為 c.f.</a:t>
+            </a:r>
+            <a:endParaRPr lang="en-US" sz="1400" dirty="0"/>
           </a:p>
           <a:p>
             <a:pPr indent="0" marL="0">
               <a:spcAft>
-                <a:spcPts val="200"/>
+                <a:spcPts val="100"/>
               </a:spcAft>
               <a:buNone/>
             </a:pPr>
             <a:r>
-              <a:rPr lang="en-US" sz="800" dirty="0">
+              <a:rPr lang="en-US" sz="1400" dirty="0">
                 <a:solidFill>
                   <a:srgbClr val="1B2B1F"/>
                 </a:solidFill>
@@ -4716,28 +4696,28 @@
                 <a:ea typeface="Calibri" pitchFamily="34" charset="-122"/>
                 <a:cs typeface="Calibri" pitchFamily="34" charset="-120"/>
               </a:rPr>
-              <a:t>• 可能為了紀念 1453 Savoy 公爵獲得「都靈裹屍布」——歌曲歌詞「蒼白面容、為愛受苦」可詮釋為基督受難</a:t>
-            </a:r>
-            <a:endParaRPr lang="en-US" sz="800" dirty="0"/>
+              <a:t>• 可能紀念 1453 都靈裹屍布——歌詞「蒼白面容」喻基督受難</a:t>
+            </a:r>
+            <a:endParaRPr lang="en-US" sz="1400" dirty="0"/>
           </a:p>
           <a:p>
             <a:pPr indent="0" marL="0">
               <a:spcAft>
-                <a:spcPts val="200"/>
+                <a:spcPts val="100"/>
               </a:spcAft>
               <a:buNone/>
             </a:pPr>
-            <a:endParaRPr lang="en-US" sz="800" dirty="0"/>
+            <a:endParaRPr lang="en-US" sz="1400" dirty="0"/>
           </a:p>
           <a:p>
             <a:pPr indent="0" marL="0">
               <a:spcAft>
-                <a:spcPts val="200"/>
+                <a:spcPts val="100"/>
               </a:spcAft>
               <a:buNone/>
             </a:pPr>
             <a:r>
-              <a:rPr lang="en-US" sz="800" dirty="0">
+              <a:rPr lang="en-US" sz="1400" dirty="0">
                 <a:solidFill>
                   <a:srgbClr val="1B2B1F"/>
                 </a:solidFill>
@@ -4745,19 +4725,19 @@
                 <a:ea typeface="Calibri" pitchFamily="34" charset="-122"/>
                 <a:cs typeface="Calibri" pitchFamily="34" charset="-120"/>
               </a:rPr>
-              <a:t>節奏變形（augmentation）：</a:t>
-            </a:r>
-            <a:endParaRPr lang="en-US" sz="800" dirty="0"/>
+              <a:t>節奏變形（augmentation）</a:t>
+            </a:r>
+            <a:endParaRPr lang="en-US" sz="1400" dirty="0"/>
           </a:p>
           <a:p>
             <a:pPr indent="0" marL="0">
               <a:spcAft>
-                <a:spcPts val="200"/>
+                <a:spcPts val="100"/>
               </a:spcAft>
               <a:buNone/>
             </a:pPr>
             <a:r>
-              <a:rPr lang="en-US" sz="800" dirty="0">
+              <a:rPr lang="en-US" sz="1400" dirty="0">
                 <a:solidFill>
                   <a:srgbClr val="1B2B1F"/>
                 </a:solidFill>
@@ -4767,17 +4747,17 @@
               </a:rPr>
               <a:t>• Kyrie、Sanctus、Agnus：音值加倍</a:t>
             </a:r>
-            <a:endParaRPr lang="en-US" sz="800" dirty="0"/>
+            <a:endParaRPr lang="en-US" sz="1400" dirty="0"/>
           </a:p>
           <a:p>
             <a:pPr indent="0" marL="0">
               <a:spcAft>
-                <a:spcPts val="200"/>
+                <a:spcPts val="100"/>
               </a:spcAft>
               <a:buNone/>
             </a:pPr>
             <a:r>
-              <a:rPr lang="en-US" sz="800" dirty="0">
+              <a:rPr lang="en-US" sz="1400" dirty="0">
                 <a:solidFill>
                   <a:srgbClr val="1B2B1F"/>
                 </a:solidFill>
@@ -4785,19 +4765,19 @@
                 <a:ea typeface="Calibri" pitchFamily="34" charset="-122"/>
                 <a:cs typeface="Calibri" pitchFamily="34" charset="-120"/>
               </a:rPr>
-              <a:t>• Gloria、Credo：cantus firmus 出現三次</a:t>
-            </a:r>
-            <a:endParaRPr lang="en-US" sz="800" dirty="0"/>
+              <a:t>• Gloria、Credo：c.f. 出現三次</a:t>
+            </a:r>
+            <a:endParaRPr lang="en-US" sz="1400" dirty="0"/>
           </a:p>
           <a:p>
             <a:pPr indent="0" marL="0">
               <a:spcAft>
-                <a:spcPts val="200"/>
+                <a:spcPts val="100"/>
               </a:spcAft>
               <a:buNone/>
             </a:pPr>
             <a:r>
-              <a:rPr lang="en-US" sz="800" dirty="0">
+              <a:rPr lang="en-US" sz="1400" dirty="0">
                 <a:solidFill>
                   <a:srgbClr val="1B2B1F"/>
                 </a:solidFill>
@@ -4805,19 +4785,19 @@
                 <a:ea typeface="Calibri" pitchFamily="34" charset="-122"/>
                 <a:cs typeface="Calibri" pitchFamily="34" charset="-120"/>
               </a:rPr>
-              <a:t>  - 第 1 次：三倍音值</a:t>
-            </a:r>
-            <a:endParaRPr lang="en-US" sz="800" dirty="0"/>
+              <a:t>  三倍 → 雙倍 → 原速（旋律最清楚可辨）</a:t>
+            </a:r>
+            <a:endParaRPr lang="en-US" sz="1400" dirty="0"/>
           </a:p>
           <a:p>
             <a:pPr indent="0" marL="0">
               <a:spcAft>
-                <a:spcPts val="200"/>
+                <a:spcPts val="100"/>
               </a:spcAft>
               <a:buNone/>
             </a:pPr>
             <a:r>
-              <a:rPr lang="en-US" sz="800" dirty="0">
+              <a:rPr lang="en-US" sz="1400" dirty="0">
                 <a:solidFill>
                   <a:srgbClr val="1B2B1F"/>
                 </a:solidFill>
@@ -4825,19 +4805,19 @@
                 <a:ea typeface="Calibri" pitchFamily="34" charset="-122"/>
                 <a:cs typeface="Calibri" pitchFamily="34" charset="-120"/>
               </a:rPr>
-              <a:t>  - 第 2 次：雙倍音值</a:t>
-            </a:r>
-            <a:endParaRPr lang="en-US" sz="800" dirty="0"/>
+              <a:t>• Amen 借用 ballade 其他聲部（c.f./imitation）</a:t>
+            </a:r>
+            <a:endParaRPr lang="en-US" sz="1400" dirty="0"/>
           </a:p>
           <a:p>
             <a:pPr indent="0" marL="0">
               <a:spcAft>
-                <a:spcPts val="200"/>
+                <a:spcPts val="100"/>
               </a:spcAft>
               <a:buNone/>
             </a:pPr>
             <a:r>
-              <a:rPr lang="en-US" sz="800" dirty="0">
+              <a:rPr lang="en-US" sz="1400" dirty="0">
                 <a:solidFill>
                   <a:srgbClr val="1B2B1F"/>
                 </a:solidFill>
@@ -4845,49 +4825,9 @@
                 <a:ea typeface="Calibri" pitchFamily="34" charset="-122"/>
                 <a:cs typeface="Calibri" pitchFamily="34" charset="-120"/>
               </a:rPr>
-              <a:t>  - 第 3 次：原速——此時旋律最清楚可辨</a:t>
-            </a:r>
-            <a:endParaRPr lang="en-US" sz="800" dirty="0"/>
-          </a:p>
-          <a:p>
-            <a:pPr indent="0" marL="0">
-              <a:spcAft>
-                <a:spcPts val="200"/>
-              </a:spcAft>
-              <a:buNone/>
-            </a:pPr>
-            <a:r>
-              <a:rPr lang="en-US" sz="800" dirty="0">
-                <a:solidFill>
-                  <a:srgbClr val="1B2B1F"/>
-                </a:solidFill>
-                <a:latin typeface="Calibri" pitchFamily="34" charset="0"/>
-                <a:ea typeface="Calibri" pitchFamily="34" charset="-122"/>
-                <a:cs typeface="Calibri" pitchFamily="34" charset="-120"/>
-              </a:rPr>
-              <a:t>• 終結 Amen 處借用 ballade 的其他聲部——cantus-firmus/imitation</a:t>
-            </a:r>
-            <a:endParaRPr lang="en-US" sz="800" dirty="0"/>
-          </a:p>
-          <a:p>
-            <a:pPr indent="0" marL="0">
-              <a:spcAft>
-                <a:spcPts val="200"/>
-              </a:spcAft>
-              <a:buNone/>
-            </a:pPr>
-            <a:r>
-              <a:rPr lang="en-US" sz="800" dirty="0">
-                <a:solidFill>
-                  <a:srgbClr val="1B2B1F"/>
-                </a:solidFill>
-                <a:latin typeface="Calibri" pitchFamily="34" charset="0"/>
-                <a:ea typeface="Calibri" pitchFamily="34" charset="-122"/>
-                <a:cs typeface="Calibri" pitchFamily="34" charset="-120"/>
-              </a:rPr>
               <a:t>• 各樂章共用 head motive——結構統一</a:t>
             </a:r>
-            <a:endParaRPr lang="en-US" sz="800" dirty="0"/>
+            <a:endParaRPr lang="en-US" sz="1400" dirty="0"/>
           </a:p>
         </p:txBody>
       </p:sp>
@@ -5027,7 +4967,7 @@
               <a:buNone/>
             </a:pPr>
             <a:r>
-              <a:rPr lang="en-US" sz="1300" dirty="0">
+              <a:rPr lang="en-US" sz="1400" dirty="0">
                 <a:solidFill>
                   <a:srgbClr val="E8D8A8"/>
                 </a:solidFill>
@@ -5037,7 +4977,7 @@
               </a:rPr>
               <a:t>England, Burgundy, and Music · 1400–1477</a:t>
             </a:r>
-            <a:endParaRPr lang="en-US" sz="1300" dirty="0"/>
+            <a:endParaRPr lang="en-US" sz="1400" dirty="0"/>
           </a:p>
         </p:txBody>
       </p:sp>
@@ -5079,14 +5019,14 @@
           <a:ln/>
         </p:spPr>
         <p:txBody>
-          <a:bodyPr wrap="square" rtlCol="0" anchor="ctr"/>
-          <a:lstStyle/>
-          <a:p>
-            <a:pPr indent="0" marL="0">
-              <a:buNone/>
-            </a:pPr>
-            <a:r>
-              <a:rPr lang="en-US" sz="1000" b="1" dirty="0">
+          <a:bodyPr wrap="square" lIns="0" tIns="0" rIns="0" bIns="0" rtlCol="0" anchor="ctr"/>
+          <a:lstStyle/>
+          <a:p>
+            <a:pPr indent="0" marL="0">
+              <a:buNone/>
+            </a:pPr>
+            <a:r>
+              <a:rPr lang="en-US" sz="1400" b="1" dirty="0">
                 <a:solidFill>
                   <a:srgbClr val="C8A020"/>
                 </a:solidFill>
@@ -5096,7 +5036,7 @@
               </a:rPr>
               <a:t>1414–18</a:t>
             </a:r>
-            <a:endParaRPr lang="en-US" sz="1000" dirty="0"/>
+            <a:endParaRPr lang="en-US" sz="1400" dirty="0"/>
           </a:p>
         </p:txBody>
       </p:sp>
@@ -5118,14 +5058,14 @@
           <a:ln/>
         </p:spPr>
         <p:txBody>
-          <a:bodyPr wrap="square" rtlCol="0" anchor="ctr"/>
-          <a:lstStyle/>
-          <a:p>
-            <a:pPr indent="0" marL="0">
-              <a:buNone/>
-            </a:pPr>
-            <a:r>
-              <a:rPr lang="en-US" sz="900" dirty="0">
+          <a:bodyPr wrap="square" rtlCol="0" anchor="t"/>
+          <a:lstStyle/>
+          <a:p>
+            <a:pPr indent="0" marL="0">
+              <a:buNone/>
+            </a:pPr>
+            <a:r>
+              <a:rPr lang="en-US" sz="1400" dirty="0">
                 <a:solidFill>
                   <a:srgbClr val="E8D8A8"/>
                 </a:solidFill>
@@ -5135,7 +5075,7 @@
               </a:rPr>
               <a:t>Council of Constance 結束大分裂</a:t>
             </a:r>
-            <a:endParaRPr lang="en-US" sz="900" dirty="0"/>
+            <a:endParaRPr lang="en-US" sz="1400" dirty="0"/>
           </a:p>
         </p:txBody>
       </p:sp>
@@ -5157,14 +5097,14 @@
           <a:ln/>
         </p:spPr>
         <p:txBody>
-          <a:bodyPr wrap="square" rtlCol="0" anchor="ctr"/>
-          <a:lstStyle/>
-          <a:p>
-            <a:pPr indent="0" marL="0">
-              <a:buNone/>
-            </a:pPr>
-            <a:r>
-              <a:rPr lang="en-US" sz="1000" b="1" dirty="0">
+          <a:bodyPr wrap="square" lIns="0" tIns="0" rIns="0" bIns="0" rtlCol="0" anchor="ctr"/>
+          <a:lstStyle/>
+          <a:p>
+            <a:pPr indent="0" marL="0">
+              <a:buNone/>
+            </a:pPr>
+            <a:r>
+              <a:rPr lang="en-US" sz="1400" b="1" dirty="0">
                 <a:solidFill>
                   <a:srgbClr val="C8A020"/>
                 </a:solidFill>
@@ -5174,7 +5114,7 @@
               </a:rPr>
               <a:t>1415</a:t>
             </a:r>
-            <a:endParaRPr lang="en-US" sz="1000" dirty="0"/>
+            <a:endParaRPr lang="en-US" sz="1400" dirty="0"/>
           </a:p>
         </p:txBody>
       </p:sp>
@@ -5196,14 +5136,14 @@
           <a:ln/>
         </p:spPr>
         <p:txBody>
-          <a:bodyPr wrap="square" rtlCol="0" anchor="ctr"/>
-          <a:lstStyle/>
-          <a:p>
-            <a:pPr indent="0" marL="0">
-              <a:buNone/>
-            </a:pPr>
-            <a:r>
-              <a:rPr lang="en-US" sz="900" dirty="0">
+          <a:bodyPr wrap="square" rtlCol="0" anchor="t"/>
+          <a:lstStyle/>
+          <a:p>
+            <a:pPr indent="0" marL="0">
+              <a:buNone/>
+            </a:pPr>
+            <a:r>
+              <a:rPr lang="en-US" sz="1400" dirty="0">
                 <a:solidFill>
                   <a:srgbClr val="E8D8A8"/>
                 </a:solidFill>
@@ -5213,7 +5153,7 @@
               </a:rPr>
               <a:t>英王 Henry V 於 Agincourt 大勝</a:t>
             </a:r>
-            <a:endParaRPr lang="en-US" sz="900" dirty="0"/>
+            <a:endParaRPr lang="en-US" sz="1400" dirty="0"/>
           </a:p>
         </p:txBody>
       </p:sp>
@@ -5235,14 +5175,14 @@
           <a:ln/>
         </p:spPr>
         <p:txBody>
-          <a:bodyPr wrap="square" rtlCol="0" anchor="ctr"/>
-          <a:lstStyle/>
-          <a:p>
-            <a:pPr indent="0" marL="0">
-              <a:buNone/>
-            </a:pPr>
-            <a:r>
-              <a:rPr lang="en-US" sz="1000" b="1" dirty="0">
+          <a:bodyPr wrap="square" lIns="0" tIns="0" rIns="0" bIns="0" rtlCol="0" anchor="ctr"/>
+          <a:lstStyle/>
+          <a:p>
+            <a:pPr indent="0" marL="0">
+              <a:buNone/>
+            </a:pPr>
+            <a:r>
+              <a:rPr lang="en-US" sz="1400" b="1" dirty="0">
                 <a:solidFill>
                   <a:srgbClr val="C8A020"/>
                 </a:solidFill>
@@ -5252,7 +5192,7 @@
               </a:rPr>
               <a:t>1419–67</a:t>
             </a:r>
-            <a:endParaRPr lang="en-US" sz="1000" dirty="0"/>
+            <a:endParaRPr lang="en-US" sz="1400" dirty="0"/>
           </a:p>
         </p:txBody>
       </p:sp>
@@ -5274,14 +5214,14 @@
           <a:ln/>
         </p:spPr>
         <p:txBody>
-          <a:bodyPr wrap="square" rtlCol="0" anchor="ctr"/>
-          <a:lstStyle/>
-          <a:p>
-            <a:pPr indent="0" marL="0">
-              <a:buNone/>
-            </a:pPr>
-            <a:r>
-              <a:rPr lang="en-US" sz="900" dirty="0">
+          <a:bodyPr wrap="square" rtlCol="0" anchor="t"/>
+          <a:lstStyle/>
+          <a:p>
+            <a:pPr indent="0" marL="0">
+              <a:buNone/>
+            </a:pPr>
+            <a:r>
+              <a:rPr lang="en-US" sz="1400" dirty="0">
                 <a:solidFill>
                   <a:srgbClr val="E8D8A8"/>
                 </a:solidFill>
@@ -5291,7 +5231,7 @@
               </a:rPr>
               <a:t>Philip the Good 統治勃艮第</a:t>
             </a:r>
-            <a:endParaRPr lang="en-US" sz="900" dirty="0"/>
+            <a:endParaRPr lang="en-US" sz="1400" dirty="0"/>
           </a:p>
         </p:txBody>
       </p:sp>
@@ -5313,14 +5253,14 @@
           <a:ln/>
         </p:spPr>
         <p:txBody>
-          <a:bodyPr wrap="square" rtlCol="0" anchor="ctr"/>
-          <a:lstStyle/>
-          <a:p>
-            <a:pPr indent="0" marL="0">
-              <a:buNone/>
-            </a:pPr>
-            <a:r>
-              <a:rPr lang="en-US" sz="1000" b="1" dirty="0">
+          <a:bodyPr wrap="square" lIns="0" tIns="0" rIns="0" bIns="0" rtlCol="0" anchor="ctr"/>
+          <a:lstStyle/>
+          <a:p>
+            <a:pPr indent="0" marL="0">
+              <a:buNone/>
+            </a:pPr>
+            <a:r>
+              <a:rPr lang="en-US" sz="1400" b="1" dirty="0">
                 <a:solidFill>
                   <a:srgbClr val="C8A020"/>
                 </a:solidFill>
@@ -5330,7 +5270,7 @@
               </a:rPr>
               <a:t>1419–35</a:t>
             </a:r>
-            <a:endParaRPr lang="en-US" sz="1000" dirty="0"/>
+            <a:endParaRPr lang="en-US" sz="1400" dirty="0"/>
           </a:p>
         </p:txBody>
       </p:sp>
@@ -5352,14 +5292,14 @@
           <a:ln/>
         </p:spPr>
         <p:txBody>
-          <a:bodyPr wrap="square" rtlCol="0" anchor="ctr"/>
-          <a:lstStyle/>
-          <a:p>
-            <a:pPr indent="0" marL="0">
-              <a:buNone/>
-            </a:pPr>
-            <a:r>
-              <a:rPr lang="en-US" sz="900" dirty="0">
+          <a:bodyPr wrap="square" rtlCol="0" anchor="t"/>
+          <a:lstStyle/>
+          <a:p>
+            <a:pPr indent="0" marL="0">
+              <a:buNone/>
+            </a:pPr>
+            <a:r>
+              <a:rPr lang="en-US" sz="1400" dirty="0">
                 <a:solidFill>
                   <a:srgbClr val="E8D8A8"/>
                 </a:solidFill>
@@ -5369,7 +5309,7 @@
               </a:rPr>
               <a:t>勃艮第與英格蘭結盟</a:t>
             </a:r>
-            <a:endParaRPr lang="en-US" sz="900" dirty="0"/>
+            <a:endParaRPr lang="en-US" sz="1400" dirty="0"/>
           </a:p>
         </p:txBody>
       </p:sp>
@@ -5391,14 +5331,14 @@
           <a:ln/>
         </p:spPr>
         <p:txBody>
-          <a:bodyPr wrap="square" rtlCol="0" anchor="ctr"/>
-          <a:lstStyle/>
-          <a:p>
-            <a:pPr indent="0" marL="0">
-              <a:buNone/>
-            </a:pPr>
-            <a:r>
-              <a:rPr lang="en-US" sz="1000" b="1" dirty="0">
+          <a:bodyPr wrap="square" lIns="0" tIns="0" rIns="0" bIns="0" rtlCol="0" anchor="ctr"/>
+          <a:lstStyle/>
+          <a:p>
+            <a:pPr indent="0" marL="0">
+              <a:buNone/>
+            </a:pPr>
+            <a:r>
+              <a:rPr lang="en-US" sz="1400" b="1" dirty="0">
                 <a:solidFill>
                   <a:srgbClr val="C8A020"/>
                 </a:solidFill>
@@ -5408,7 +5348,7 @@
               </a:rPr>
               <a:t>1422</a:t>
             </a:r>
-            <a:endParaRPr lang="en-US" sz="1000" dirty="0"/>
+            <a:endParaRPr lang="en-US" sz="1400" dirty="0"/>
           </a:p>
         </p:txBody>
       </p:sp>
@@ -5430,14 +5370,14 @@
           <a:ln/>
         </p:spPr>
         <p:txBody>
-          <a:bodyPr wrap="square" rtlCol="0" anchor="ctr"/>
-          <a:lstStyle/>
-          <a:p>
-            <a:pPr indent="0" marL="0">
-              <a:buNone/>
-            </a:pPr>
-            <a:r>
-              <a:rPr lang="en-US" sz="900" dirty="0">
+          <a:bodyPr wrap="square" rtlCol="0" anchor="t"/>
+          <a:lstStyle/>
+          <a:p>
+            <a:pPr indent="0" marL="0">
+              <a:buNone/>
+            </a:pPr>
+            <a:r>
+              <a:rPr lang="en-US" sz="1400" dirty="0">
                 <a:solidFill>
                   <a:srgbClr val="E8D8A8"/>
                 </a:solidFill>
@@ -5447,7 +5387,7 @@
               </a:rPr>
               <a:t>Henry VI 即位 · Bedford 攝政法國</a:t>
             </a:r>
-            <a:endParaRPr lang="en-US" sz="900" dirty="0"/>
+            <a:endParaRPr lang="en-US" sz="1400" dirty="0"/>
           </a:p>
         </p:txBody>
       </p:sp>
@@ -5469,14 +5409,14 @@
           <a:ln/>
         </p:spPr>
         <p:txBody>
-          <a:bodyPr wrap="square" rtlCol="0" anchor="ctr"/>
-          <a:lstStyle/>
-          <a:p>
-            <a:pPr indent="0" marL="0">
-              <a:buNone/>
-            </a:pPr>
-            <a:r>
-              <a:rPr lang="en-US" sz="1000" b="1" dirty="0">
+          <a:bodyPr wrap="square" lIns="0" tIns="0" rIns="0" bIns="0" rtlCol="0" anchor="ctr"/>
+          <a:lstStyle/>
+          <a:p>
+            <a:pPr indent="0" marL="0">
+              <a:buNone/>
+            </a:pPr>
+            <a:r>
+              <a:rPr lang="en-US" sz="1400" b="1" dirty="0">
                 <a:solidFill>
                   <a:srgbClr val="C8A020"/>
                 </a:solidFill>
@@ -5486,7 +5426,7 @@
               </a:rPr>
               <a:t>1423</a:t>
             </a:r>
-            <a:endParaRPr lang="en-US" sz="1000" dirty="0"/>
+            <a:endParaRPr lang="en-US" sz="1400" dirty="0"/>
           </a:p>
         </p:txBody>
       </p:sp>
@@ -5508,14 +5448,14 @@
           <a:ln/>
         </p:spPr>
         <p:txBody>
-          <a:bodyPr wrap="square" rtlCol="0" anchor="ctr"/>
-          <a:lstStyle/>
-          <a:p>
-            <a:pPr indent="0" marL="0">
-              <a:buNone/>
-            </a:pPr>
-            <a:r>
-              <a:rPr lang="en-US" sz="900" dirty="0">
+          <a:bodyPr wrap="square" rtlCol="0" anchor="t"/>
+          <a:lstStyle/>
+          <a:p>
+            <a:pPr indent="0" marL="0">
+              <a:buNone/>
+            </a:pPr>
+            <a:r>
+              <a:rPr lang="en-US" sz="1400" dirty="0">
                 <a:solidFill>
                   <a:srgbClr val="E8D8A8"/>
                 </a:solidFill>
@@ -5525,7 +5465,7 @@
               </a:rPr>
               <a:t>Du Fay 在 Rimini 寫 Resvellies vous</a:t>
             </a:r>
-            <a:endParaRPr lang="en-US" sz="900" dirty="0"/>
+            <a:endParaRPr lang="en-US" sz="1400" dirty="0"/>
           </a:p>
         </p:txBody>
       </p:sp>
@@ -5547,14 +5487,14 @@
           <a:ln/>
         </p:spPr>
         <p:txBody>
-          <a:bodyPr wrap="square" rtlCol="0" anchor="ctr"/>
-          <a:lstStyle/>
-          <a:p>
-            <a:pPr indent="0" marL="0">
-              <a:buNone/>
-            </a:pPr>
-            <a:r>
-              <a:rPr lang="en-US" sz="1000" b="1" dirty="0">
+          <a:bodyPr wrap="square" lIns="0" tIns="0" rIns="0" bIns="0" rtlCol="0" anchor="ctr"/>
+          <a:lstStyle/>
+          <a:p>
+            <a:pPr indent="0" marL="0">
+              <a:buNone/>
+            </a:pPr>
+            <a:r>
+              <a:rPr lang="en-US" sz="1400" b="1" dirty="0">
                 <a:solidFill>
                   <a:srgbClr val="C8A020"/>
                 </a:solidFill>
@@ -5564,7 +5504,7 @@
               </a:rPr>
               <a:t>ca. 1425</a:t>
             </a:r>
-            <a:endParaRPr lang="en-US" sz="1000" dirty="0"/>
+            <a:endParaRPr lang="en-US" sz="1400" dirty="0"/>
           </a:p>
         </p:txBody>
       </p:sp>
@@ -5586,14 +5526,14 @@
           <a:ln/>
         </p:spPr>
         <p:txBody>
-          <a:bodyPr wrap="square" rtlCol="0" anchor="ctr"/>
-          <a:lstStyle/>
-          <a:p>
-            <a:pPr indent="0" marL="0">
-              <a:buNone/>
-            </a:pPr>
-            <a:r>
-              <a:rPr lang="en-US" sz="900" dirty="0">
+          <a:bodyPr wrap="square" rtlCol="0" anchor="t"/>
+          <a:lstStyle/>
+          <a:p>
+            <a:pPr indent="0" marL="0">
+              <a:buNone/>
+            </a:pPr>
+            <a:r>
+              <a:rPr lang="en-US" sz="1400" dirty="0">
                 <a:solidFill>
                   <a:srgbClr val="E8D8A8"/>
                 </a:solidFill>
@@ -5603,7 +5543,7 @@
               </a:rPr>
               <a:t>Binchois · De plus en plus</a:t>
             </a:r>
-            <a:endParaRPr lang="en-US" sz="900" dirty="0"/>
+            <a:endParaRPr lang="en-US" sz="1400" dirty="0"/>
           </a:p>
         </p:txBody>
       </p:sp>
@@ -5625,14 +5565,14 @@
           <a:ln/>
         </p:spPr>
         <p:txBody>
-          <a:bodyPr wrap="square" rtlCol="0" anchor="ctr"/>
-          <a:lstStyle/>
-          <a:p>
-            <a:pPr indent="0" marL="0">
-              <a:buNone/>
-            </a:pPr>
-            <a:r>
-              <a:rPr lang="en-US" sz="1000" b="1" dirty="0">
+          <a:bodyPr wrap="square" lIns="0" tIns="0" rIns="0" bIns="0" rtlCol="0" anchor="ctr"/>
+          <a:lstStyle/>
+          <a:p>
+            <a:pPr indent="0" marL="0">
+              <a:buNone/>
+            </a:pPr>
+            <a:r>
+              <a:rPr lang="en-US" sz="1400" b="1" dirty="0">
                 <a:solidFill>
                   <a:srgbClr val="C8A020"/>
                 </a:solidFill>
@@ -5642,7 +5582,7 @@
               </a:rPr>
               <a:t>1427</a:t>
             </a:r>
-            <a:endParaRPr lang="en-US" sz="1000" dirty="0"/>
+            <a:endParaRPr lang="en-US" sz="1400" dirty="0"/>
           </a:p>
         </p:txBody>
       </p:sp>
@@ -5664,14 +5604,14 @@
           <a:ln/>
         </p:spPr>
         <p:txBody>
-          <a:bodyPr wrap="square" rtlCol="0" anchor="ctr"/>
-          <a:lstStyle/>
-          <a:p>
-            <a:pPr indent="0" marL="0">
-              <a:buNone/>
-            </a:pPr>
-            <a:r>
-              <a:rPr lang="en-US" sz="900" dirty="0">
+          <a:bodyPr wrap="square" rtlCol="0" anchor="t"/>
+          <a:lstStyle/>
+          <a:p>
+            <a:pPr indent="0" marL="0">
+              <a:buNone/>
+            </a:pPr>
+            <a:r>
+              <a:rPr lang="en-US" sz="1400" dirty="0">
                 <a:solidFill>
                   <a:srgbClr val="E8D8A8"/>
                 </a:solidFill>
@@ -5681,7 +5621,7 @@
               </a:rPr>
               <a:t>Binchois 加入 Philip the Good 禮拜堂</a:t>
             </a:r>
-            <a:endParaRPr lang="en-US" sz="900" dirty="0"/>
+            <a:endParaRPr lang="en-US" sz="1400" dirty="0"/>
           </a:p>
         </p:txBody>
       </p:sp>
@@ -5703,14 +5643,14 @@
           <a:ln/>
         </p:spPr>
         <p:txBody>
-          <a:bodyPr wrap="square" rtlCol="0" anchor="ctr"/>
-          <a:lstStyle/>
-          <a:p>
-            <a:pPr indent="0" marL="0">
-              <a:buNone/>
-            </a:pPr>
-            <a:r>
-              <a:rPr lang="en-US" sz="1000" b="1" dirty="0">
+          <a:bodyPr wrap="square" lIns="0" tIns="0" rIns="0" bIns="0" rtlCol="0" anchor="ctr"/>
+          <a:lstStyle/>
+          <a:p>
+            <a:pPr indent="0" marL="0">
+              <a:buNone/>
+            </a:pPr>
+            <a:r>
+              <a:rPr lang="en-US" sz="1400" b="1" dirty="0">
                 <a:solidFill>
                   <a:srgbClr val="C8A020"/>
                 </a:solidFill>
@@ -5720,7 +5660,7 @@
               </a:rPr>
               <a:t>1428–39</a:t>
             </a:r>
-            <a:endParaRPr lang="en-US" sz="1000" dirty="0"/>
+            <a:endParaRPr lang="en-US" sz="1400" dirty="0"/>
           </a:p>
         </p:txBody>
       </p:sp>
@@ -5742,14 +5682,14 @@
           <a:ln/>
         </p:spPr>
         <p:txBody>
-          <a:bodyPr wrap="square" rtlCol="0" anchor="ctr"/>
-          <a:lstStyle/>
-          <a:p>
-            <a:pPr indent="0" marL="0">
-              <a:buNone/>
-            </a:pPr>
-            <a:r>
-              <a:rPr lang="en-US" sz="900" dirty="0">
+          <a:bodyPr wrap="square" rtlCol="0" anchor="t"/>
+          <a:lstStyle/>
+          <a:p>
+            <a:pPr indent="0" marL="0">
+              <a:buNone/>
+            </a:pPr>
+            <a:r>
+              <a:rPr lang="en-US" sz="1400" dirty="0">
                 <a:solidFill>
                   <a:srgbClr val="E8D8A8"/>
                 </a:solidFill>
@@ -5759,7 +5699,7 @@
               </a:rPr>
               <a:t>Du Fay 往返教宗禮拜堂與 Savoy</a:t>
             </a:r>
-            <a:endParaRPr lang="en-US" sz="900" dirty="0"/>
+            <a:endParaRPr lang="en-US" sz="1400" dirty="0"/>
           </a:p>
         </p:txBody>
       </p:sp>
@@ -5781,14 +5721,14 @@
           <a:ln/>
         </p:spPr>
         <p:txBody>
-          <a:bodyPr wrap="square" rtlCol="0" anchor="ctr"/>
-          <a:lstStyle/>
-          <a:p>
-            <a:pPr indent="0" marL="0">
-              <a:buNone/>
-            </a:pPr>
-            <a:r>
-              <a:rPr lang="en-US" sz="1000" b="1" dirty="0">
+          <a:bodyPr wrap="square" lIns="0" tIns="0" rIns="0" bIns="0" rtlCol="0" anchor="ctr"/>
+          <a:lstStyle/>
+          <a:p>
+            <a:pPr indent="0" marL="0">
+              <a:buNone/>
+            </a:pPr>
+            <a:r>
+              <a:rPr lang="en-US" sz="1400" b="1" dirty="0">
                 <a:solidFill>
                   <a:srgbClr val="C8A020"/>
                 </a:solidFill>
@@ -5798,7 +5738,7 @@
               </a:rPr>
               <a:t>ca. 1430s</a:t>
             </a:r>
-            <a:endParaRPr lang="en-US" sz="1000" dirty="0"/>
+            <a:endParaRPr lang="en-US" sz="1400" dirty="0"/>
           </a:p>
         </p:txBody>
       </p:sp>
@@ -5820,14 +5760,14 @@
           <a:ln/>
         </p:spPr>
         <p:txBody>
-          <a:bodyPr wrap="square" rtlCol="0" anchor="ctr"/>
-          <a:lstStyle/>
-          <a:p>
-            <a:pPr indent="0" marL="0">
-              <a:buNone/>
-            </a:pPr>
-            <a:r>
-              <a:rPr lang="en-US" sz="900" dirty="0">
+          <a:bodyPr wrap="square" rtlCol="0" anchor="t"/>
+          <a:lstStyle/>
+          <a:p>
+            <a:pPr indent="0" marL="0">
+              <a:buNone/>
+            </a:pPr>
+            <a:r>
+              <a:rPr lang="en-US" sz="1400" dirty="0">
                 <a:solidFill>
                   <a:srgbClr val="E8D8A8"/>
                 </a:solidFill>
@@ -5837,7 +5777,7 @@
               </a:rPr>
               <a:t>首批 cantus-firmus mass cycles</a:t>
             </a:r>
-            <a:endParaRPr lang="en-US" sz="900" dirty="0"/>
+            <a:endParaRPr lang="en-US" sz="1400" dirty="0"/>
           </a:p>
         </p:txBody>
       </p:sp>
@@ -5859,14 +5799,14 @@
           <a:ln/>
         </p:spPr>
         <p:txBody>
-          <a:bodyPr wrap="square" rtlCol="0" anchor="ctr"/>
-          <a:lstStyle/>
-          <a:p>
-            <a:pPr indent="0" marL="0">
-              <a:buNone/>
-            </a:pPr>
-            <a:r>
-              <a:rPr lang="en-US" sz="1000" b="1" dirty="0">
+          <a:bodyPr wrap="square" lIns="0" tIns="0" rIns="0" bIns="0" rtlCol="0" anchor="ctr"/>
+          <a:lstStyle/>
+          <a:p>
+            <a:pPr indent="0" marL="0">
+              <a:buNone/>
+            </a:pPr>
+            <a:r>
+              <a:rPr lang="en-US" sz="1400" b="1" dirty="0">
                 <a:solidFill>
                   <a:srgbClr val="C8A020"/>
                 </a:solidFill>
@@ -5876,7 +5816,7 @@
               </a:rPr>
               <a:t>1436</a:t>
             </a:r>
-            <a:endParaRPr lang="en-US" sz="1000" dirty="0"/>
+            <a:endParaRPr lang="en-US" sz="1400" dirty="0"/>
           </a:p>
         </p:txBody>
       </p:sp>
@@ -5898,14 +5838,14 @@
           <a:ln/>
         </p:spPr>
         <p:txBody>
-          <a:bodyPr wrap="square" rtlCol="0" anchor="ctr"/>
-          <a:lstStyle/>
-          <a:p>
-            <a:pPr indent="0" marL="0">
-              <a:buNone/>
-            </a:pPr>
-            <a:r>
-              <a:rPr lang="en-US" sz="900" dirty="0">
+          <a:bodyPr wrap="square" rtlCol="0" anchor="t"/>
+          <a:lstStyle/>
+          <a:p>
+            <a:pPr indent="0" marL="0">
+              <a:buNone/>
+            </a:pPr>
+            <a:r>
+              <a:rPr lang="en-US" sz="1400" dirty="0">
                 <a:solidFill>
                   <a:srgbClr val="E8D8A8"/>
                 </a:solidFill>
@@ -5915,7 +5855,7 @@
               </a:rPr>
               <a:t>Du Fay · Nuper rosarum flores（佛羅倫斯穹頂）</a:t>
             </a:r>
-            <a:endParaRPr lang="en-US" sz="900" dirty="0"/>
+            <a:endParaRPr lang="en-US" sz="1400" dirty="0"/>
           </a:p>
         </p:txBody>
       </p:sp>
@@ -5937,14 +5877,14 @@
           <a:ln/>
         </p:spPr>
         <p:txBody>
-          <a:bodyPr wrap="square" rtlCol="0" anchor="ctr"/>
-          <a:lstStyle/>
-          <a:p>
-            <a:pPr indent="0" marL="0">
-              <a:buNone/>
-            </a:pPr>
-            <a:r>
-              <a:rPr lang="en-US" sz="1000" b="1" dirty="0">
+          <a:bodyPr wrap="square" lIns="0" tIns="0" rIns="0" bIns="0" rtlCol="0" anchor="ctr"/>
+          <a:lstStyle/>
+          <a:p>
+            <a:pPr indent="0" marL="0">
+              <a:buNone/>
+            </a:pPr>
+            <a:r>
+              <a:rPr lang="en-US" sz="1400" b="1" dirty="0">
                 <a:solidFill>
                   <a:srgbClr val="C8A020"/>
                 </a:solidFill>
@@ -5954,7 +5894,7 @@
               </a:rPr>
               <a:t>1440–42</a:t>
             </a:r>
-            <a:endParaRPr lang="en-US" sz="1000" dirty="0"/>
+            <a:endParaRPr lang="en-US" sz="1400" dirty="0"/>
           </a:p>
         </p:txBody>
       </p:sp>
@@ -5976,14 +5916,14 @@
           <a:ln/>
         </p:spPr>
         <p:txBody>
-          <a:bodyPr wrap="square" rtlCol="0" anchor="ctr"/>
-          <a:lstStyle/>
-          <a:p>
-            <a:pPr indent="0" marL="0">
-              <a:buNone/>
-            </a:pPr>
-            <a:r>
-              <a:rPr lang="en-US" sz="900" dirty="0">
+          <a:bodyPr wrap="square" rtlCol="0" anchor="t"/>
+          <a:lstStyle/>
+          <a:p>
+            <a:pPr indent="0" marL="0">
+              <a:buNone/>
+            </a:pPr>
+            <a:r>
+              <a:rPr lang="en-US" sz="1400" dirty="0">
                 <a:solidFill>
                   <a:srgbClr val="E8D8A8"/>
                 </a:solidFill>
@@ -5993,7 +5933,7 @@
               </a:rPr>
               <a:t>Le Franc · Le champion des dames</a:t>
             </a:r>
-            <a:endParaRPr lang="en-US" sz="900" dirty="0"/>
+            <a:endParaRPr lang="en-US" sz="1400" dirty="0"/>
           </a:p>
         </p:txBody>
       </p:sp>
@@ -6015,14 +5955,14 @@
           <a:ln/>
         </p:spPr>
         <p:txBody>
-          <a:bodyPr wrap="square" rtlCol="0" anchor="ctr"/>
-          <a:lstStyle/>
-          <a:p>
-            <a:pPr indent="0" marL="0">
-              <a:buNone/>
-            </a:pPr>
-            <a:r>
-              <a:rPr lang="en-US" sz="1000" b="1" dirty="0">
+          <a:bodyPr wrap="square" lIns="0" tIns="0" rIns="0" bIns="0" rtlCol="0" anchor="ctr"/>
+          <a:lstStyle/>
+          <a:p>
+            <a:pPr indent="0" marL="0">
+              <a:buNone/>
+            </a:pPr>
+            <a:r>
+              <a:rPr lang="en-US" sz="1400" b="1" dirty="0">
                 <a:solidFill>
                   <a:srgbClr val="C8A020"/>
                 </a:solidFill>
@@ -6032,7 +5972,7 @@
               </a:rPr>
               <a:t>1440s</a:t>
             </a:r>
-            <a:endParaRPr lang="en-US" sz="1000" dirty="0"/>
+            <a:endParaRPr lang="en-US" sz="1400" dirty="0"/>
           </a:p>
         </p:txBody>
       </p:sp>
@@ -6054,14 +5994,14 @@
           <a:ln/>
         </p:spPr>
         <p:txBody>
-          <a:bodyPr wrap="square" rtlCol="0" anchor="ctr"/>
-          <a:lstStyle/>
-          <a:p>
-            <a:pPr indent="0" marL="0">
-              <a:buNone/>
-            </a:pPr>
-            <a:r>
-              <a:rPr lang="en-US" sz="900" dirty="0">
+          <a:bodyPr wrap="square" rtlCol="0" anchor="t"/>
+          <a:lstStyle/>
+          <a:p>
+            <a:pPr indent="0" marL="0">
+              <a:buNone/>
+            </a:pPr>
+            <a:r>
+              <a:rPr lang="en-US" sz="1400" dirty="0">
                 <a:solidFill>
                   <a:srgbClr val="E8D8A8"/>
                 </a:solidFill>
@@ -6071,7 +6011,7 @@
               </a:rPr>
               <a:t>匿名 Missa Caput——四聲部開端</a:t>
             </a:r>
-            <a:endParaRPr lang="en-US" sz="900" dirty="0"/>
+            <a:endParaRPr lang="en-US" sz="1400" dirty="0"/>
           </a:p>
         </p:txBody>
       </p:sp>
@@ -6093,14 +6033,14 @@
           <a:ln/>
         </p:spPr>
         <p:txBody>
-          <a:bodyPr wrap="square" rtlCol="0" anchor="ctr"/>
-          <a:lstStyle/>
-          <a:p>
-            <a:pPr indent="0" marL="0">
-              <a:buNone/>
-            </a:pPr>
-            <a:r>
-              <a:rPr lang="en-US" sz="1000" b="1" dirty="0">
+          <a:bodyPr wrap="square" lIns="0" tIns="0" rIns="0" bIns="0" rtlCol="0" anchor="ctr"/>
+          <a:lstStyle/>
+          <a:p>
+            <a:pPr indent="0" marL="0">
+              <a:buNone/>
+            </a:pPr>
+            <a:r>
+              <a:rPr lang="en-US" sz="1400" b="1" dirty="0">
                 <a:solidFill>
                   <a:srgbClr val="C8A020"/>
                 </a:solidFill>
@@ -6110,7 +6050,7 @@
               </a:rPr>
               <a:t>1450s</a:t>
             </a:r>
-            <a:endParaRPr lang="en-US" sz="1000" dirty="0"/>
+            <a:endParaRPr lang="en-US" sz="1400" dirty="0"/>
           </a:p>
         </p:txBody>
       </p:sp>
@@ -6132,14 +6072,14 @@
           <a:ln/>
         </p:spPr>
         <p:txBody>
-          <a:bodyPr wrap="square" rtlCol="0" anchor="ctr"/>
-          <a:lstStyle/>
-          <a:p>
-            <a:pPr indent="0" marL="0">
-              <a:buNone/>
-            </a:pPr>
-            <a:r>
-              <a:rPr lang="en-US" sz="900" dirty="0">
+          <a:bodyPr wrap="square" rtlCol="0" anchor="t"/>
+          <a:lstStyle/>
+          <a:p>
+            <a:pPr indent="0" marL="0">
+              <a:buNone/>
+            </a:pPr>
+            <a:r>
+              <a:rPr lang="en-US" sz="1400" dirty="0">
                 <a:solidFill>
                   <a:srgbClr val="E8D8A8"/>
                 </a:solidFill>
@@ -6149,7 +6089,7 @@
               </a:rPr>
               <a:t>Du Fay · Missa Se la face ay pale</a:t>
             </a:r>
-            <a:endParaRPr lang="en-US" sz="900" dirty="0"/>
+            <a:endParaRPr lang="en-US" sz="1400" dirty="0"/>
           </a:p>
         </p:txBody>
       </p:sp>
@@ -6171,14 +6111,14 @@
           <a:ln/>
         </p:spPr>
         <p:txBody>
-          <a:bodyPr wrap="square" rtlCol="0" anchor="ctr"/>
-          <a:lstStyle/>
-          <a:p>
-            <a:pPr indent="0" marL="0">
-              <a:buNone/>
-            </a:pPr>
-            <a:r>
-              <a:rPr lang="en-US" sz="1000" b="1" dirty="0">
+          <a:bodyPr wrap="square" lIns="0" tIns="0" rIns="0" bIns="0" rtlCol="0" anchor="ctr"/>
+          <a:lstStyle/>
+          <a:p>
+            <a:pPr indent="0" marL="0">
+              <a:buNone/>
+            </a:pPr>
+            <a:r>
+              <a:rPr lang="en-US" sz="1400" b="1" dirty="0">
                 <a:solidFill>
                   <a:srgbClr val="C8A020"/>
                 </a:solidFill>
@@ -6188,7 +6128,7 @@
               </a:rPr>
               <a:t>1453</a:t>
             </a:r>
-            <a:endParaRPr lang="en-US" sz="1000" dirty="0"/>
+            <a:endParaRPr lang="en-US" sz="1400" dirty="0"/>
           </a:p>
         </p:txBody>
       </p:sp>
@@ -6210,14 +6150,14 @@
           <a:ln/>
         </p:spPr>
         <p:txBody>
-          <a:bodyPr wrap="square" rtlCol="0" anchor="ctr"/>
-          <a:lstStyle/>
-          <a:p>
-            <a:pPr indent="0" marL="0">
-              <a:buNone/>
-            </a:pPr>
-            <a:r>
-              <a:rPr lang="en-US" sz="900" dirty="0">
+          <a:bodyPr wrap="square" rtlCol="0" anchor="t"/>
+          <a:lstStyle/>
+          <a:p>
+            <a:pPr indent="0" marL="0">
+              <a:buNone/>
+            </a:pPr>
+            <a:r>
+              <a:rPr lang="en-US" sz="1400" dirty="0">
                 <a:solidFill>
                   <a:srgbClr val="E8D8A8"/>
                 </a:solidFill>
@@ -6227,7 +6167,7 @@
               </a:rPr>
               <a:t>百年戰爭結束 · Dunstable 卒</a:t>
             </a:r>
-            <a:endParaRPr lang="en-US" sz="900" dirty="0"/>
+            <a:endParaRPr lang="en-US" sz="1400" dirty="0"/>
           </a:p>
         </p:txBody>
       </p:sp>
@@ -6249,14 +6189,14 @@
           <a:ln/>
         </p:spPr>
         <p:txBody>
-          <a:bodyPr wrap="square" rtlCol="0" anchor="ctr"/>
-          <a:lstStyle/>
-          <a:p>
-            <a:pPr indent="0" marL="0">
-              <a:buNone/>
-            </a:pPr>
-            <a:r>
-              <a:rPr lang="en-US" sz="1000" b="1" dirty="0">
+          <a:bodyPr wrap="square" lIns="0" tIns="0" rIns="0" bIns="0" rtlCol="0" anchor="ctr"/>
+          <a:lstStyle/>
+          <a:p>
+            <a:pPr indent="0" marL="0">
+              <a:buNone/>
+            </a:pPr>
+            <a:r>
+              <a:rPr lang="en-US" sz="1400" b="1" dirty="0">
                 <a:solidFill>
                   <a:srgbClr val="C8A020"/>
                 </a:solidFill>
@@ -6266,7 +6206,7 @@
               </a:rPr>
               <a:t>1460</a:t>
             </a:r>
-            <a:endParaRPr lang="en-US" sz="1000" dirty="0"/>
+            <a:endParaRPr lang="en-US" sz="1400" dirty="0"/>
           </a:p>
         </p:txBody>
       </p:sp>
@@ -6288,14 +6228,14 @@
           <a:ln/>
         </p:spPr>
         <p:txBody>
-          <a:bodyPr wrap="square" rtlCol="0" anchor="ctr"/>
-          <a:lstStyle/>
-          <a:p>
-            <a:pPr indent="0" marL="0">
-              <a:buNone/>
-            </a:pPr>
-            <a:r>
-              <a:rPr lang="en-US" sz="900" dirty="0">
+          <a:bodyPr wrap="square" rtlCol="0" anchor="t"/>
+          <a:lstStyle/>
+          <a:p>
+            <a:pPr indent="0" marL="0">
+              <a:buNone/>
+            </a:pPr>
+            <a:r>
+              <a:rPr lang="en-US" sz="1400" dirty="0">
                 <a:solidFill>
                   <a:srgbClr val="E8D8A8"/>
                 </a:solidFill>
@@ -6305,7 +6245,7 @@
               </a:rPr>
               <a:t>Binchois 卒</a:t>
             </a:r>
-            <a:endParaRPr lang="en-US" sz="900" dirty="0"/>
+            <a:endParaRPr lang="en-US" sz="1400" dirty="0"/>
           </a:p>
         </p:txBody>
       </p:sp>
@@ -6327,14 +6267,14 @@
           <a:ln/>
         </p:spPr>
         <p:txBody>
-          <a:bodyPr wrap="square" rtlCol="0" anchor="ctr"/>
-          <a:lstStyle/>
-          <a:p>
-            <a:pPr indent="0" marL="0">
-              <a:buNone/>
-            </a:pPr>
-            <a:r>
-              <a:rPr lang="en-US" sz="1000" b="1" dirty="0">
+          <a:bodyPr wrap="square" lIns="0" tIns="0" rIns="0" bIns="0" rtlCol="0" anchor="ctr"/>
+          <a:lstStyle/>
+          <a:p>
+            <a:pPr indent="0" marL="0">
+              <a:buNone/>
+            </a:pPr>
+            <a:r>
+              <a:rPr lang="en-US" sz="1400" b="1" dirty="0">
                 <a:solidFill>
                   <a:srgbClr val="C8A020"/>
                 </a:solidFill>
@@ -6344,7 +6284,7 @@
               </a:rPr>
               <a:t>1474</a:t>
             </a:r>
-            <a:endParaRPr lang="en-US" sz="1000" dirty="0"/>
+            <a:endParaRPr lang="en-US" sz="1400" dirty="0"/>
           </a:p>
         </p:txBody>
       </p:sp>
@@ -6366,14 +6306,14 @@
           <a:ln/>
         </p:spPr>
         <p:txBody>
-          <a:bodyPr wrap="square" rtlCol="0" anchor="ctr"/>
-          <a:lstStyle/>
-          <a:p>
-            <a:pPr indent="0" marL="0">
-              <a:buNone/>
-            </a:pPr>
-            <a:r>
-              <a:rPr lang="en-US" sz="900" dirty="0">
+          <a:bodyPr wrap="square" rtlCol="0" anchor="t"/>
+          <a:lstStyle/>
+          <a:p>
+            <a:pPr indent="0" marL="0">
+              <a:buNone/>
+            </a:pPr>
+            <a:r>
+              <a:rPr lang="en-US" sz="1400" dirty="0">
                 <a:solidFill>
                   <a:srgbClr val="E8D8A8"/>
                 </a:solidFill>
@@ -6383,7 +6323,7 @@
               </a:rPr>
               <a:t>Du Fay 卒 於 Cambrai</a:t>
             </a:r>
-            <a:endParaRPr lang="en-US" sz="900" dirty="0"/>
+            <a:endParaRPr lang="en-US" sz="1400" dirty="0"/>
           </a:p>
         </p:txBody>
       </p:sp>
@@ -6405,14 +6345,14 @@
           <a:ln/>
         </p:spPr>
         <p:txBody>
-          <a:bodyPr wrap="square" rtlCol="0" anchor="ctr"/>
-          <a:lstStyle/>
-          <a:p>
-            <a:pPr indent="0" marL="0">
-              <a:buNone/>
-            </a:pPr>
-            <a:r>
-              <a:rPr lang="en-US" sz="1000" b="1" dirty="0">
+          <a:bodyPr wrap="square" lIns="0" tIns="0" rIns="0" bIns="0" rtlCol="0" anchor="ctr"/>
+          <a:lstStyle/>
+          <a:p>
+            <a:pPr indent="0" marL="0">
+              <a:buNone/>
+            </a:pPr>
+            <a:r>
+              <a:rPr lang="en-US" sz="1400" b="1" dirty="0">
                 <a:solidFill>
                   <a:srgbClr val="C8A020"/>
                 </a:solidFill>
@@ -6422,7 +6362,7 @@
               </a:rPr>
               <a:t>1477</a:t>
             </a:r>
-            <a:endParaRPr lang="en-US" sz="1000" dirty="0"/>
+            <a:endParaRPr lang="en-US" sz="1400" dirty="0"/>
           </a:p>
         </p:txBody>
       </p:sp>
@@ -6444,14 +6384,14 @@
           <a:ln/>
         </p:spPr>
         <p:txBody>
-          <a:bodyPr wrap="square" rtlCol="0" anchor="ctr"/>
-          <a:lstStyle/>
-          <a:p>
-            <a:pPr indent="0" marL="0">
-              <a:buNone/>
-            </a:pPr>
-            <a:r>
-              <a:rPr lang="en-US" sz="900" dirty="0">
+          <a:bodyPr wrap="square" rtlCol="0" anchor="t"/>
+          <a:lstStyle/>
+          <a:p>
+            <a:pPr indent="0" marL="0">
+              <a:buNone/>
+            </a:pPr>
+            <a:r>
+              <a:rPr lang="en-US" sz="1400" dirty="0">
                 <a:solidFill>
                   <a:srgbClr val="E8D8A8"/>
                 </a:solidFill>
@@ -6461,7 +6401,7 @@
               </a:rPr>
               <a:t>Charles the Bold 戰死 · 法國併吞勃艮第</a:t>
             </a:r>
-            <a:endParaRPr lang="en-US" sz="900" dirty="0"/>
+            <a:endParaRPr lang="en-US" sz="1400" dirty="0"/>
           </a:p>
         </p:txBody>
       </p:sp>
@@ -6601,7 +6541,7 @@
               <a:buNone/>
             </a:pPr>
             <a:r>
-              <a:rPr lang="en-US" sz="1300" i="1" dirty="0">
+              <a:rPr lang="en-US" sz="1400" i="1" dirty="0">
                 <a:solidFill>
                   <a:srgbClr val="3A4C38"/>
                 </a:solidFill>
@@ -6611,7 +6551,7 @@
               </a:rPr>
               <a:t>Chapter Summary · 持久的音樂語言</a:t>
             </a:r>
-            <a:endParaRPr lang="en-US" sz="1300" dirty="0"/>
+            <a:endParaRPr lang="en-US" sz="1400" dirty="0"/>
           </a:p>
         </p:txBody>
       </p:sp>
@@ -6685,7 +6625,7 @@
                   <a:srgbClr val="000000"/>
                 </a:solidFill>
               </a:rPr>
-              <a:t>🏴󠁧󠁢󠁥󠁮󠁧󠁿</a:t>
+              <a:t>■󠁧󠁢󠁥󠁮󠁧󠁿</a:t>
             </a:r>
             <a:endParaRPr lang="en-US" sz="1800" dirty="0"/>
           </a:p>
@@ -6709,14 +6649,14 @@
           <a:ln/>
         </p:spPr>
         <p:txBody>
-          <a:bodyPr wrap="square" rtlCol="0" anchor="ctr"/>
-          <a:lstStyle/>
-          <a:p>
-            <a:pPr indent="0" marL="0">
-              <a:buNone/>
-            </a:pPr>
-            <a:r>
-              <a:rPr lang="en-US" sz="1300" b="1" dirty="0">
+          <a:bodyPr wrap="square" lIns="0" tIns="0" rIns="0" bIns="0" rtlCol="0" anchor="ctr"/>
+          <a:lstStyle/>
+          <a:p>
+            <a:pPr indent="0" marL="0">
+              <a:buNone/>
+            </a:pPr>
+            <a:r>
+              <a:rPr lang="en-US" sz="1400" b="1" dirty="0">
                 <a:solidFill>
                   <a:srgbClr val="1B2B1F"/>
                 </a:solidFill>
@@ -6726,7 +6666,7 @@
               </a:rPr>
               <a:t>英格蘭的貢獻</a:t>
             </a:r>
-            <a:endParaRPr lang="en-US" sz="1300" dirty="0"/>
+            <a:endParaRPr lang="en-US" sz="1400" dirty="0"/>
           </a:p>
         </p:txBody>
       </p:sp>
@@ -6748,14 +6688,14 @@
           <a:ln/>
         </p:spPr>
         <p:txBody>
-          <a:bodyPr wrap="square" rtlCol="0" anchor="ctr"/>
-          <a:lstStyle/>
-          <a:p>
-            <a:pPr indent="0" marL="0">
-              <a:buNone/>
-            </a:pPr>
-            <a:r>
-              <a:rPr lang="en-US" sz="1000" dirty="0">
+          <a:bodyPr wrap="square" rtlCol="0" anchor="t"/>
+          <a:lstStyle/>
+          <a:p>
+            <a:pPr indent="0" marL="0">
+              <a:buNone/>
+            </a:pPr>
+            <a:r>
+              <a:rPr lang="en-US" sz="1400" dirty="0">
                 <a:solidFill>
                   <a:srgbClr val="3A4C38"/>
                 </a:solidFill>
@@ -6765,7 +6705,7 @@
               </a:rPr>
               <a:t>三六度協和、頻繁平行音程、同節奏織度——15 世紀大陸風格的靈感來源</a:t>
             </a:r>
-            <a:endParaRPr lang="en-US" sz="1000" dirty="0"/>
+            <a:endParaRPr lang="en-US" sz="1400" dirty="0"/>
           </a:p>
         </p:txBody>
       </p:sp>
@@ -6819,7 +6759,7 @@
                   <a:srgbClr val="000000"/>
                 </a:solidFill>
               </a:rPr>
-              <a:t>🔗</a:t>
+              <a:t>■</a:t>
             </a:r>
             <a:endParaRPr lang="en-US" sz="1800" dirty="0"/>
           </a:p>
@@ -6843,14 +6783,14 @@
           <a:ln/>
         </p:spPr>
         <p:txBody>
-          <a:bodyPr wrap="square" rtlCol="0" anchor="ctr"/>
-          <a:lstStyle/>
-          <a:p>
-            <a:pPr indent="0" marL="0">
-              <a:buNone/>
-            </a:pPr>
-            <a:r>
-              <a:rPr lang="en-US" sz="1300" b="1" dirty="0">
+          <a:bodyPr wrap="square" lIns="0" tIns="0" rIns="0" bIns="0" rtlCol="0" anchor="ctr"/>
+          <a:lstStyle/>
+          <a:p>
+            <a:pPr indent="0" marL="0">
+              <a:buNone/>
+            </a:pPr>
+            <a:r>
+              <a:rPr lang="en-US" sz="1400" b="1" dirty="0">
                 <a:solidFill>
                   <a:srgbClr val="1B2B1F"/>
                 </a:solidFill>
@@ -6860,7 +6800,7 @@
               </a:rPr>
               <a:t>國際風格的誕生</a:t>
             </a:r>
-            <a:endParaRPr lang="en-US" sz="1300" dirty="0"/>
+            <a:endParaRPr lang="en-US" sz="1400" dirty="0"/>
           </a:p>
         </p:txBody>
       </p:sp>
@@ -6882,14 +6822,14 @@
           <a:ln/>
         </p:spPr>
         <p:txBody>
-          <a:bodyPr wrap="square" rtlCol="0" anchor="ctr"/>
-          <a:lstStyle/>
-          <a:p>
-            <a:pPr indent="0" marL="0">
-              <a:buNone/>
-            </a:pPr>
-            <a:r>
-              <a:rPr lang="en-US" sz="1000" dirty="0">
+          <a:bodyPr wrap="square" rtlCol="0" anchor="t"/>
+          <a:lstStyle/>
+          <a:p>
+            <a:pPr indent="0" marL="0">
+              <a:buNone/>
+            </a:pPr>
+            <a:r>
+              <a:rPr lang="en-US" sz="1400" dirty="0">
                 <a:solidFill>
                   <a:srgbClr val="3A4C38"/>
                 </a:solidFill>
@@ -6899,7 +6839,7 @@
               </a:rPr>
               <a:t>Du Fay、Binchois 融合法、義、英三種傳統——mid-15c international style</a:t>
             </a:r>
-            <a:endParaRPr lang="en-US" sz="1000" dirty="0"/>
+            <a:endParaRPr lang="en-US" sz="1400" dirty="0"/>
           </a:p>
         </p:txBody>
       </p:sp>
@@ -6953,7 +6893,7 @@
                   <a:srgbClr val="000000"/>
                 </a:solidFill>
               </a:rPr>
-              <a:t>⛪</a:t>
+              <a:t>■</a:t>
             </a:r>
             <a:endParaRPr lang="en-US" sz="1800" dirty="0"/>
           </a:p>
@@ -6977,14 +6917,14 @@
           <a:ln/>
         </p:spPr>
         <p:txBody>
-          <a:bodyPr wrap="square" rtlCol="0" anchor="ctr"/>
-          <a:lstStyle/>
-          <a:p>
-            <a:pPr indent="0" marL="0">
-              <a:buNone/>
-            </a:pPr>
-            <a:r>
-              <a:rPr lang="en-US" sz="1300" b="1" dirty="0">
+          <a:bodyPr wrap="square" lIns="0" tIns="0" rIns="0" bIns="0" rtlCol="0" anchor="ctr"/>
+          <a:lstStyle/>
+          <a:p>
+            <a:pPr indent="0" marL="0">
+              <a:buNone/>
+            </a:pPr>
+            <a:r>
+              <a:rPr lang="en-US" sz="1400" b="1" dirty="0">
                 <a:solidFill>
                   <a:srgbClr val="1B2B1F"/>
                 </a:solidFill>
@@ -6994,7 +6934,7 @@
               </a:rPr>
               <a:t>複音彌撒的確立</a:t>
             </a:r>
-            <a:endParaRPr lang="en-US" sz="1300" dirty="0"/>
+            <a:endParaRPr lang="en-US" sz="1400" dirty="0"/>
           </a:p>
         </p:txBody>
       </p:sp>
@@ -7016,14 +6956,14 @@
           <a:ln/>
         </p:spPr>
         <p:txBody>
-          <a:bodyPr wrap="square" rtlCol="0" anchor="ctr"/>
-          <a:lstStyle/>
-          <a:p>
-            <a:pPr indent="0" marL="0">
-              <a:buNone/>
-            </a:pPr>
-            <a:r>
-              <a:rPr lang="en-US" sz="1000" dirty="0">
+          <a:bodyPr wrap="square" rtlCol="0" anchor="t"/>
+          <a:lstStyle/>
+          <a:p>
+            <a:pPr indent="0" marL="0">
+              <a:buNone/>
+            </a:pPr>
+            <a:r>
+              <a:rPr lang="en-US" sz="1400" dirty="0">
                 <a:solidFill>
                   <a:srgbClr val="3A4C38"/>
                 </a:solidFill>
@@ -7033,7 +6973,7 @@
               </a:rPr>
               <a:t>從配對樂章到完整 cycles——cantus-firmus mass 成為最尊貴的類型</a:t>
             </a:r>
-            <a:endParaRPr lang="en-US" sz="1000" dirty="0"/>
+            <a:endParaRPr lang="en-US" sz="1400" dirty="0"/>
           </a:p>
         </p:txBody>
       </p:sp>
@@ -7087,7 +7027,7 @@
                   <a:srgbClr val="000000"/>
                 </a:solidFill>
               </a:rPr>
-              <a:t>🎼</a:t>
+              <a:t>■</a:t>
             </a:r>
             <a:endParaRPr lang="en-US" sz="1800" dirty="0"/>
           </a:p>
@@ -7111,14 +7051,14 @@
           <a:ln/>
         </p:spPr>
         <p:txBody>
-          <a:bodyPr wrap="square" rtlCol="0" anchor="ctr"/>
-          <a:lstStyle/>
-          <a:p>
-            <a:pPr indent="0" marL="0">
-              <a:buNone/>
-            </a:pPr>
-            <a:r>
-              <a:rPr lang="en-US" sz="1300" b="1" dirty="0">
+          <a:bodyPr wrap="square" lIns="0" tIns="0" rIns="0" bIns="0" rtlCol="0" anchor="ctr"/>
+          <a:lstStyle/>
+          <a:p>
+            <a:pPr indent="0" marL="0">
+              <a:buNone/>
+            </a:pPr>
+            <a:r>
+              <a:rPr lang="en-US" sz="1400" b="1" dirty="0">
                 <a:solidFill>
                   <a:srgbClr val="1B2B1F"/>
                 </a:solidFill>
@@ -7128,7 +7068,7 @@
               </a:rPr>
               <a:t>四聲部織度</a:t>
             </a:r>
-            <a:endParaRPr lang="en-US" sz="1300" dirty="0"/>
+            <a:endParaRPr lang="en-US" sz="1400" dirty="0"/>
           </a:p>
         </p:txBody>
       </p:sp>
@@ -7150,14 +7090,14 @@
           <a:ln/>
         </p:spPr>
         <p:txBody>
-          <a:bodyPr wrap="square" rtlCol="0" anchor="ctr"/>
-          <a:lstStyle/>
-          <a:p>
-            <a:pPr indent="0" marL="0">
-              <a:buNone/>
-            </a:pPr>
-            <a:r>
-              <a:rPr lang="en-US" sz="1000" dirty="0">
+          <a:bodyPr wrap="square" rtlCol="0" anchor="t"/>
+          <a:lstStyle/>
+          <a:p>
+            <a:pPr indent="0" marL="0">
+              <a:buNone/>
+            </a:pPr>
+            <a:r>
+              <a:rPr lang="en-US" sz="1400" dirty="0">
                 <a:solidFill>
                   <a:srgbClr val="3A4C38"/>
                 </a:solidFill>
@@ -7167,7 +7107,7 @@
               </a:rPr>
               <a:t>匿名 Missa Caput 首創（1440s）——SATB 架構自此成為標準</a:t>
             </a:r>
-            <a:endParaRPr lang="en-US" sz="1000" dirty="0"/>
+            <a:endParaRPr lang="en-US" sz="1400" dirty="0"/>
           </a:p>
         </p:txBody>
       </p:sp>
@@ -7221,7 +7161,7 @@
                   <a:srgbClr val="000000"/>
                 </a:solidFill>
               </a:rPr>
-              <a:t>🎵</a:t>
+              <a:t>■</a:t>
             </a:r>
             <a:endParaRPr lang="en-US" sz="1800" dirty="0"/>
           </a:p>
@@ -7245,14 +7185,14 @@
           <a:ln/>
         </p:spPr>
         <p:txBody>
-          <a:bodyPr wrap="square" rtlCol="0" anchor="ctr"/>
-          <a:lstStyle/>
-          <a:p>
-            <a:pPr indent="0" marL="0">
-              <a:buNone/>
-            </a:pPr>
-            <a:r>
-              <a:rPr lang="en-US" sz="1300" b="1" dirty="0">
+          <a:bodyPr wrap="square" lIns="0" tIns="0" rIns="0" bIns="0" rtlCol="0" anchor="ctr"/>
+          <a:lstStyle/>
+          <a:p>
+            <a:pPr indent="0" marL="0">
+              <a:buNone/>
+            </a:pPr>
+            <a:r>
+              <a:rPr lang="en-US" sz="1400" b="1" dirty="0">
                 <a:solidFill>
                   <a:srgbClr val="1B2B1F"/>
                 </a:solidFill>
@@ -7262,7 +7202,7 @@
               </a:rPr>
               <a:t>新的音響美學</a:t>
             </a:r>
-            <a:endParaRPr lang="en-US" sz="1300" dirty="0"/>
+            <a:endParaRPr lang="en-US" sz="1400" dirty="0"/>
           </a:p>
         </p:txBody>
       </p:sp>
@@ -7284,14 +7224,14 @@
           <a:ln/>
         </p:spPr>
         <p:txBody>
-          <a:bodyPr wrap="square" rtlCol="0" anchor="ctr"/>
-          <a:lstStyle/>
-          <a:p>
-            <a:pPr indent="0" marL="0">
-              <a:buNone/>
-            </a:pPr>
-            <a:r>
-              <a:rPr lang="en-US" sz="1000" dirty="0">
+          <a:bodyPr wrap="square" rtlCol="0" anchor="t"/>
+          <a:lstStyle/>
+          <a:p>
+            <a:pPr indent="0" marL="0">
+              <a:buNone/>
+            </a:pPr>
+            <a:r>
+              <a:rPr lang="en-US" sz="1400" dirty="0">
                 <a:solidFill>
                   <a:srgbClr val="3A4C38"/>
                 </a:solidFill>
@@ -7301,7 +7241,7 @@
               </a:rPr>
               <a:t>徹底協和、控制不協和、避免平行五八度——15–16 世紀的共同語言</a:t>
             </a:r>
-            <a:endParaRPr lang="en-US" sz="1000" dirty="0"/>
+            <a:endParaRPr lang="en-US" sz="1400" dirty="0"/>
           </a:p>
         </p:txBody>
       </p:sp>
@@ -7355,7 +7295,7 @@
                   <a:srgbClr val="000000"/>
                 </a:solidFill>
               </a:rPr>
-              <a:t>🏛</a:t>
+              <a:t>■</a:t>
             </a:r>
             <a:endParaRPr lang="en-US" sz="1800" dirty="0"/>
           </a:p>
@@ -7379,14 +7319,14 @@
           <a:ln/>
         </p:spPr>
         <p:txBody>
-          <a:bodyPr wrap="square" rtlCol="0" anchor="ctr"/>
-          <a:lstStyle/>
-          <a:p>
-            <a:pPr indent="0" marL="0">
-              <a:buNone/>
-            </a:pPr>
-            <a:r>
-              <a:rPr lang="en-US" sz="1300" b="1" dirty="0">
+          <a:bodyPr wrap="square" lIns="0" tIns="0" rIns="0" bIns="0" rtlCol="0" anchor="ctr"/>
+          <a:lstStyle/>
+          <a:p>
+            <a:pPr indent="0" marL="0">
+              <a:buNone/>
+            </a:pPr>
+            <a:r>
+              <a:rPr lang="en-US" sz="1400" b="1" dirty="0">
                 <a:solidFill>
                   <a:srgbClr val="1B2B1F"/>
                 </a:solidFill>
@@ -7396,7 +7336,7 @@
               </a:rPr>
               <a:t>持久的影響</a:t>
             </a:r>
-            <a:endParaRPr lang="en-US" sz="1300" dirty="0"/>
+            <a:endParaRPr lang="en-US" sz="1400" dirty="0"/>
           </a:p>
         </p:txBody>
       </p:sp>
@@ -7418,14 +7358,14 @@
           <a:ln/>
         </p:spPr>
         <p:txBody>
-          <a:bodyPr wrap="square" rtlCol="0" anchor="ctr"/>
-          <a:lstStyle/>
-          <a:p>
-            <a:pPr indent="0" marL="0">
-              <a:buNone/>
-            </a:pPr>
-            <a:r>
-              <a:rPr lang="en-US" sz="1000" dirty="0">
+          <a:bodyPr wrap="square" rtlCol="0" anchor="t"/>
+          <a:lstStyle/>
+          <a:p>
+            <a:pPr indent="0" marL="0">
+              <a:buNone/>
+            </a:pPr>
+            <a:r>
+              <a:rPr lang="en-US" sz="1400" dirty="0">
                 <a:solidFill>
                   <a:srgbClr val="3A4C38"/>
                 </a:solidFill>
@@ -7435,7 +7375,7 @@
               </a:rPr>
               <a:t>Du Fay 時代的聲響對現代人仍聽來「熟悉」——中世紀與文藝復興的分水嶺</a:t>
             </a:r>
-            <a:endParaRPr lang="en-US" sz="1000" dirty="0"/>
+            <a:endParaRPr lang="en-US" sz="1400" dirty="0"/>
           </a:p>
         </p:txBody>
       </p:sp>
@@ -7575,7 +7515,7 @@
               <a:buNone/>
             </a:pPr>
             <a:r>
-              <a:rPr lang="en-US" sz="1300" dirty="0">
+              <a:rPr lang="en-US" sz="1400" dirty="0">
                 <a:solidFill>
                   <a:srgbClr val="E8D8A8"/>
                 </a:solidFill>
@@ -7585,7 +7525,7 @@
               </a:rPr>
               <a:t>Key Terms · Further Reading</a:t>
             </a:r>
-            <a:endParaRPr lang="en-US" sz="1300" dirty="0"/>
+            <a:endParaRPr lang="en-US" sz="1400" dirty="0"/>
           </a:p>
         </p:txBody>
       </p:sp>
@@ -7618,7 +7558,7 @@
         <p:spPr>
           <a:xfrm>
             <a:off x="274320" y="1188720"/>
-            <a:ext cx="8595360" cy="2011680"/>
+            <a:ext cx="8595360" cy="1783080"/>
           </a:xfrm>
           <a:prstGeom prst="rect">
             <a:avLst/>
@@ -7637,24 +7577,24 @@
         </p:nvSpPr>
         <p:spPr>
           <a:xfrm>
-            <a:off x="411480" y="1243584"/>
-            <a:ext cx="8321040" cy="274320"/>
-          </a:xfrm>
-          <a:prstGeom prst="rect">
-            <a:avLst/>
-          </a:prstGeom>
-          <a:noFill/>
-          <a:ln/>
-        </p:spPr>
-        <p:txBody>
-          <a:bodyPr wrap="square" rtlCol="0" anchor="ctr"/>
-          <a:lstStyle/>
-          <a:p>
-            <a:pPr indent="0" marL="0">
-              <a:buNone/>
-            </a:pPr>
-            <a:r>
-              <a:rPr lang="en-US" sz="1300" b="1" dirty="0">
+            <a:off x="411480" y="1225296"/>
+            <a:ext cx="8321040" cy="256032"/>
+          </a:xfrm>
+          <a:prstGeom prst="rect">
+            <a:avLst/>
+          </a:prstGeom>
+          <a:noFill/>
+          <a:ln/>
+        </p:spPr>
+        <p:txBody>
+          <a:bodyPr wrap="square" lIns="0" tIns="0" rIns="0" bIns="0" rtlCol="0" anchor="t"/>
+          <a:lstStyle/>
+          <a:p>
+            <a:pPr indent="0" marL="0">
+              <a:buNone/>
+            </a:pPr>
+            <a:r>
+              <a:rPr lang="en-US" sz="1400" b="1" dirty="0">
                 <a:solidFill>
                   <a:srgbClr val="C8A020"/>
                 </a:solidFill>
@@ -7662,9 +7602,9 @@
                 <a:ea typeface="Georgia" pitchFamily="34" charset="-122"/>
                 <a:cs typeface="Georgia" pitchFamily="34" charset="-120"/>
               </a:rPr>
-              <a:t>🔑 重要術語 Key Terms</a:t>
-            </a:r>
-            <a:endParaRPr lang="en-US" sz="1300" dirty="0"/>
+              <a:t>■ 重要術語 Key Terms</a:t>
+            </a:r>
+            <a:endParaRPr lang="en-US" sz="1400" dirty="0"/>
           </a:p>
         </p:txBody>
       </p:sp>
@@ -7676,24 +7616,24 @@
         </p:nvSpPr>
         <p:spPr>
           <a:xfrm>
-            <a:off x="457200" y="1536192"/>
-            <a:ext cx="4114800" cy="237744"/>
-          </a:xfrm>
-          <a:prstGeom prst="rect">
-            <a:avLst/>
-          </a:prstGeom>
-          <a:noFill/>
-          <a:ln/>
-        </p:spPr>
-        <p:txBody>
-          <a:bodyPr wrap="square" rtlCol="0" anchor="ctr"/>
-          <a:lstStyle/>
-          <a:p>
-            <a:pPr indent="0" marL="0">
-              <a:buNone/>
-            </a:pPr>
-            <a:r>
-              <a:rPr lang="en-US" sz="900" dirty="0">
+            <a:off x="457200" y="1508760"/>
+            <a:ext cx="4114800" cy="219456"/>
+          </a:xfrm>
+          <a:prstGeom prst="rect">
+            <a:avLst/>
+          </a:prstGeom>
+          <a:noFill/>
+          <a:ln/>
+        </p:spPr>
+        <p:txBody>
+          <a:bodyPr wrap="square" lIns="0" tIns="0" rIns="0" bIns="0" rtlCol="0" anchor="t"/>
+          <a:lstStyle/>
+          <a:p>
+            <a:pPr indent="0" marL="0">
+              <a:buNone/>
+            </a:pPr>
+            <a:r>
+              <a:rPr lang="en-US" sz="1400" dirty="0">
                 <a:solidFill>
                   <a:srgbClr val="E8D8A8"/>
                 </a:solidFill>
@@ -7703,7 +7643,7 @@
               </a:rPr>
               <a:t>• Contenance angloise</a:t>
             </a:r>
-            <a:endParaRPr lang="en-US" sz="900" dirty="0"/>
+            <a:endParaRPr lang="en-US" sz="1400" dirty="0"/>
           </a:p>
         </p:txBody>
       </p:sp>
@@ -7715,24 +7655,24 @@
         </p:nvSpPr>
         <p:spPr>
           <a:xfrm>
-            <a:off x="457200" y="1792224"/>
-            <a:ext cx="4114800" cy="237744"/>
-          </a:xfrm>
-          <a:prstGeom prst="rect">
-            <a:avLst/>
-          </a:prstGeom>
-          <a:noFill/>
-          <a:ln/>
-        </p:spPr>
-        <p:txBody>
-          <a:bodyPr wrap="square" rtlCol="0" anchor="ctr"/>
-          <a:lstStyle/>
-          <a:p>
-            <a:pPr indent="0" marL="0">
-              <a:buNone/>
-            </a:pPr>
-            <a:r>
-              <a:rPr lang="en-US" sz="900" dirty="0">
+            <a:off x="457200" y="1737360"/>
+            <a:ext cx="4114800" cy="219456"/>
+          </a:xfrm>
+          <a:prstGeom prst="rect">
+            <a:avLst/>
+          </a:prstGeom>
+          <a:noFill/>
+          <a:ln/>
+        </p:spPr>
+        <p:txBody>
+          <a:bodyPr wrap="square" lIns="0" tIns="0" rIns="0" bIns="0" rtlCol="0" anchor="t"/>
+          <a:lstStyle/>
+          <a:p>
+            <a:pPr indent="0" marL="0">
+              <a:buNone/>
+            </a:pPr>
+            <a:r>
+              <a:rPr lang="en-US" sz="1400" dirty="0">
                 <a:solidFill>
                   <a:srgbClr val="E8D8A8"/>
                 </a:solidFill>
@@ -7742,7 +7682,7 @@
               </a:rPr>
               <a:t>• Sarum rite · Faburden</a:t>
             </a:r>
-            <a:endParaRPr lang="en-US" sz="900" dirty="0"/>
+            <a:endParaRPr lang="en-US" sz="1400" dirty="0"/>
           </a:p>
         </p:txBody>
       </p:sp>
@@ -7754,24 +7694,24 @@
         </p:nvSpPr>
         <p:spPr>
           <a:xfrm>
-            <a:off x="457200" y="2048256"/>
-            <a:ext cx="4114800" cy="237744"/>
-          </a:xfrm>
-          <a:prstGeom prst="rect">
-            <a:avLst/>
-          </a:prstGeom>
-          <a:noFill/>
-          <a:ln/>
-        </p:spPr>
-        <p:txBody>
-          <a:bodyPr wrap="square" rtlCol="0" anchor="ctr"/>
-          <a:lstStyle/>
-          <a:p>
-            <a:pPr indent="0" marL="0">
-              <a:buNone/>
-            </a:pPr>
-            <a:r>
-              <a:rPr lang="en-US" sz="900" dirty="0">
+            <a:off x="457200" y="1965960"/>
+            <a:ext cx="4114800" cy="219456"/>
+          </a:xfrm>
+          <a:prstGeom prst="rect">
+            <a:avLst/>
+          </a:prstGeom>
+          <a:noFill/>
+          <a:ln/>
+        </p:spPr>
+        <p:txBody>
+          <a:bodyPr wrap="square" lIns="0" tIns="0" rIns="0" bIns="0" rtlCol="0" anchor="t"/>
+          <a:lstStyle/>
+          <a:p>
+            <a:pPr indent="0" marL="0">
+              <a:buNone/>
+            </a:pPr>
+            <a:r>
+              <a:rPr lang="en-US" sz="1400" dirty="0">
                 <a:solidFill>
                   <a:srgbClr val="E8D8A8"/>
                 </a:solidFill>
@@ -7781,7 +7721,7 @@
               </a:rPr>
               <a:t>• Carol · Burden</a:t>
             </a:r>
-            <a:endParaRPr lang="en-US" sz="900" dirty="0"/>
+            <a:endParaRPr lang="en-US" sz="1400" dirty="0"/>
           </a:p>
         </p:txBody>
       </p:sp>
@@ -7793,24 +7733,24 @@
         </p:nvSpPr>
         <p:spPr>
           <a:xfrm>
-            <a:off x="457200" y="2304288"/>
-            <a:ext cx="4114800" cy="237744"/>
-          </a:xfrm>
-          <a:prstGeom prst="rect">
-            <a:avLst/>
-          </a:prstGeom>
-          <a:noFill/>
-          <a:ln/>
-        </p:spPr>
-        <p:txBody>
-          <a:bodyPr wrap="square" rtlCol="0" anchor="ctr"/>
-          <a:lstStyle/>
-          <a:p>
-            <a:pPr indent="0" marL="0">
-              <a:buNone/>
-            </a:pPr>
-            <a:r>
-              <a:rPr lang="en-US" sz="900" dirty="0">
+            <a:off x="457200" y="2194560"/>
+            <a:ext cx="4114800" cy="219456"/>
+          </a:xfrm>
+          <a:prstGeom prst="rect">
+            <a:avLst/>
+          </a:prstGeom>
+          <a:noFill/>
+          <a:ln/>
+        </p:spPr>
+        <p:txBody>
+          <a:bodyPr wrap="square" lIns="0" tIns="0" rIns="0" bIns="0" rtlCol="0" anchor="t"/>
+          <a:lstStyle/>
+          <a:p>
+            <a:pPr indent="0" marL="0">
+              <a:buNone/>
+            </a:pPr>
+            <a:r>
+              <a:rPr lang="en-US" sz="1400" dirty="0">
                 <a:solidFill>
                   <a:srgbClr val="E8D8A8"/>
                 </a:solidFill>
@@ -7820,7 +7760,7 @@
               </a:rPr>
               <a:t>• Cantilena · Motet</a:t>
             </a:r>
-            <a:endParaRPr lang="en-US" sz="900" dirty="0"/>
+            <a:endParaRPr lang="en-US" sz="1400" dirty="0"/>
           </a:p>
         </p:txBody>
       </p:sp>
@@ -7832,24 +7772,24 @@
         </p:nvSpPr>
         <p:spPr>
           <a:xfrm>
-            <a:off x="457200" y="2560320"/>
-            <a:ext cx="4114800" cy="237744"/>
-          </a:xfrm>
-          <a:prstGeom prst="rect">
-            <a:avLst/>
-          </a:prstGeom>
-          <a:noFill/>
-          <a:ln/>
-        </p:spPr>
-        <p:txBody>
-          <a:bodyPr wrap="square" rtlCol="0" anchor="ctr"/>
-          <a:lstStyle/>
-          <a:p>
-            <a:pPr indent="0" marL="0">
-              <a:buNone/>
-            </a:pPr>
-            <a:r>
-              <a:rPr lang="en-US" sz="900" dirty="0">
+            <a:off x="457200" y="2423160"/>
+            <a:ext cx="4114800" cy="219456"/>
+          </a:xfrm>
+          <a:prstGeom prst="rect">
+            <a:avLst/>
+          </a:prstGeom>
+          <a:noFill/>
+          <a:ln/>
+        </p:spPr>
+        <p:txBody>
+          <a:bodyPr wrap="square" lIns="0" tIns="0" rIns="0" bIns="0" rtlCol="0" anchor="t"/>
+          <a:lstStyle/>
+          <a:p>
+            <a:pPr indent="0" marL="0">
+              <a:buNone/>
+            </a:pPr>
+            <a:r>
+              <a:rPr lang="en-US" sz="1400" dirty="0">
                 <a:solidFill>
                   <a:srgbClr val="E8D8A8"/>
                 </a:solidFill>
@@ -7859,7 +7799,7 @@
               </a:rPr>
               <a:t>• Fauxbourdon</a:t>
             </a:r>
-            <a:endParaRPr lang="en-US" sz="900" dirty="0"/>
+            <a:endParaRPr lang="en-US" sz="1400" dirty="0"/>
           </a:p>
         </p:txBody>
       </p:sp>
@@ -7871,24 +7811,24 @@
         </p:nvSpPr>
         <p:spPr>
           <a:xfrm>
-            <a:off x="457200" y="2816352"/>
-            <a:ext cx="4114800" cy="237744"/>
-          </a:xfrm>
-          <a:prstGeom prst="rect">
-            <a:avLst/>
-          </a:prstGeom>
-          <a:noFill/>
-          <a:ln/>
-        </p:spPr>
-        <p:txBody>
-          <a:bodyPr wrap="square" rtlCol="0" anchor="ctr"/>
-          <a:lstStyle/>
-          <a:p>
-            <a:pPr indent="0" marL="0">
-              <a:buNone/>
-            </a:pPr>
-            <a:r>
-              <a:rPr lang="en-US" sz="900" dirty="0">
+            <a:off x="457200" y="2651760"/>
+            <a:ext cx="4114800" cy="219456"/>
+          </a:xfrm>
+          <a:prstGeom prst="rect">
+            <a:avLst/>
+          </a:prstGeom>
+          <a:noFill/>
+          <a:ln/>
+        </p:spPr>
+        <p:txBody>
+          <a:bodyPr wrap="square" lIns="0" tIns="0" rIns="0" bIns="0" rtlCol="0" anchor="t"/>
+          <a:lstStyle/>
+          <a:p>
+            <a:pPr indent="0" marL="0">
+              <a:buNone/>
+            </a:pPr>
+            <a:r>
+              <a:rPr lang="en-US" sz="1400" dirty="0">
                 <a:solidFill>
                   <a:srgbClr val="E8D8A8"/>
                 </a:solidFill>
@@ -7898,7 +7838,7 @@
               </a:rPr>
               <a:t>• Head motive · Motto mass</a:t>
             </a:r>
-            <a:endParaRPr lang="en-US" sz="900" dirty="0"/>
+            <a:endParaRPr lang="en-US" sz="1400" dirty="0"/>
           </a:p>
         </p:txBody>
       </p:sp>
@@ -7910,24 +7850,24 @@
         </p:nvSpPr>
         <p:spPr>
           <a:xfrm>
-            <a:off x="4663440" y="1536192"/>
-            <a:ext cx="4114800" cy="237744"/>
-          </a:xfrm>
-          <a:prstGeom prst="rect">
-            <a:avLst/>
-          </a:prstGeom>
-          <a:noFill/>
-          <a:ln/>
-        </p:spPr>
-        <p:txBody>
-          <a:bodyPr wrap="square" rtlCol="0" anchor="ctr"/>
-          <a:lstStyle/>
-          <a:p>
-            <a:pPr indent="0" marL="0">
-              <a:buNone/>
-            </a:pPr>
-            <a:r>
-              <a:rPr lang="en-US" sz="900" dirty="0">
+            <a:off x="4663440" y="1508760"/>
+            <a:ext cx="4114800" cy="219456"/>
+          </a:xfrm>
+          <a:prstGeom prst="rect">
+            <a:avLst/>
+          </a:prstGeom>
+          <a:noFill/>
+          <a:ln/>
+        </p:spPr>
+        <p:txBody>
+          <a:bodyPr wrap="square" lIns="0" tIns="0" rIns="0" bIns="0" rtlCol="0" anchor="t"/>
+          <a:lstStyle/>
+          <a:p>
+            <a:pPr indent="0" marL="0">
+              <a:buNone/>
+            </a:pPr>
+            <a:r>
+              <a:rPr lang="en-US" sz="1400" dirty="0">
                 <a:solidFill>
                   <a:srgbClr val="E8D8A8"/>
                 </a:solidFill>
@@ -7937,7 +7877,7 @@
               </a:rPr>
               <a:t>• Polyphonic mass cycle</a:t>
             </a:r>
-            <a:endParaRPr lang="en-US" sz="900" dirty="0"/>
+            <a:endParaRPr lang="en-US" sz="1400" dirty="0"/>
           </a:p>
         </p:txBody>
       </p:sp>
@@ -7949,24 +7889,24 @@
         </p:nvSpPr>
         <p:spPr>
           <a:xfrm>
-            <a:off x="4663440" y="1792224"/>
-            <a:ext cx="4114800" cy="237744"/>
-          </a:xfrm>
-          <a:prstGeom prst="rect">
-            <a:avLst/>
-          </a:prstGeom>
-          <a:noFill/>
-          <a:ln/>
-        </p:spPr>
-        <p:txBody>
-          <a:bodyPr wrap="square" rtlCol="0" anchor="ctr"/>
-          <a:lstStyle/>
-          <a:p>
-            <a:pPr indent="0" marL="0">
-              <a:buNone/>
-            </a:pPr>
-            <a:r>
-              <a:rPr lang="en-US" sz="900" dirty="0">
+            <a:off x="4663440" y="1737360"/>
+            <a:ext cx="4114800" cy="219456"/>
+          </a:xfrm>
+          <a:prstGeom prst="rect">
+            <a:avLst/>
+          </a:prstGeom>
+          <a:noFill/>
+          <a:ln/>
+        </p:spPr>
+        <p:txBody>
+          <a:bodyPr wrap="square" lIns="0" tIns="0" rIns="0" bIns="0" rtlCol="0" anchor="t"/>
+          <a:lstStyle/>
+          <a:p>
+            <a:pPr indent="0" marL="0">
+              <a:buNone/>
+            </a:pPr>
+            <a:r>
+              <a:rPr lang="en-US" sz="1400" dirty="0">
                 <a:solidFill>
                   <a:srgbClr val="E8D8A8"/>
                 </a:solidFill>
@@ -7976,7 +7916,7 @@
               </a:rPr>
               <a:t>• Cantus-firmus / Tenor mass</a:t>
             </a:r>
-            <a:endParaRPr lang="en-US" sz="900" dirty="0"/>
+            <a:endParaRPr lang="en-US" sz="1400" dirty="0"/>
           </a:p>
         </p:txBody>
       </p:sp>
@@ -7988,24 +7928,24 @@
         </p:nvSpPr>
         <p:spPr>
           <a:xfrm>
-            <a:off x="4663440" y="2048256"/>
-            <a:ext cx="4114800" cy="237744"/>
-          </a:xfrm>
-          <a:prstGeom prst="rect">
-            <a:avLst/>
-          </a:prstGeom>
-          <a:noFill/>
-          <a:ln/>
-        </p:spPr>
-        <p:txBody>
-          <a:bodyPr wrap="square" rtlCol="0" anchor="ctr"/>
-          <a:lstStyle/>
-          <a:p>
-            <a:pPr indent="0" marL="0">
-              <a:buNone/>
-            </a:pPr>
-            <a:r>
-              <a:rPr lang="en-US" sz="900" dirty="0">
+            <a:off x="4663440" y="1965960"/>
+            <a:ext cx="4114800" cy="219456"/>
+          </a:xfrm>
+          <a:prstGeom prst="rect">
+            <a:avLst/>
+          </a:prstGeom>
+          <a:noFill/>
+          <a:ln/>
+        </p:spPr>
+        <p:txBody>
+          <a:bodyPr wrap="square" lIns="0" tIns="0" rIns="0" bIns="0" rtlCol="0" anchor="t"/>
+          <a:lstStyle/>
+          <a:p>
+            <a:pPr indent="0" marL="0">
+              <a:buNone/>
+            </a:pPr>
+            <a:r>
+              <a:rPr lang="en-US" sz="1400" dirty="0">
                 <a:solidFill>
                   <a:srgbClr val="E8D8A8"/>
                 </a:solidFill>
@@ -8015,7 +7955,7 @@
               </a:rPr>
               <a:t>• Cantus-firmus/Imitation mass</a:t>
             </a:r>
-            <a:endParaRPr lang="en-US" sz="900" dirty="0"/>
+            <a:endParaRPr lang="en-US" sz="1400" dirty="0"/>
           </a:p>
         </p:txBody>
       </p:sp>
@@ -8027,24 +7967,24 @@
         </p:nvSpPr>
         <p:spPr>
           <a:xfrm>
-            <a:off x="4663440" y="2304288"/>
-            <a:ext cx="4114800" cy="237744"/>
-          </a:xfrm>
-          <a:prstGeom prst="rect">
-            <a:avLst/>
-          </a:prstGeom>
-          <a:noFill/>
-          <a:ln/>
-        </p:spPr>
-        <p:txBody>
-          <a:bodyPr wrap="square" rtlCol="0" anchor="ctr"/>
-          <a:lstStyle/>
-          <a:p>
-            <a:pPr indent="0" marL="0">
-              <a:buNone/>
-            </a:pPr>
-            <a:r>
-              <a:rPr lang="en-US" sz="900" dirty="0">
+            <a:off x="4663440" y="2194560"/>
+            <a:ext cx="4114800" cy="219456"/>
+          </a:xfrm>
+          <a:prstGeom prst="rect">
+            <a:avLst/>
+          </a:prstGeom>
+          <a:noFill/>
+          <a:ln/>
+        </p:spPr>
+        <p:txBody>
+          <a:bodyPr wrap="square" lIns="0" tIns="0" rIns="0" bIns="0" rtlCol="0" anchor="t"/>
+          <a:lstStyle/>
+          <a:p>
+            <a:pPr indent="0" marL="0">
+              <a:buNone/>
+            </a:pPr>
+            <a:r>
+              <a:rPr lang="en-US" sz="1400" dirty="0">
                 <a:solidFill>
                   <a:srgbClr val="E8D8A8"/>
                 </a:solidFill>
@@ -8054,7 +7994,7 @@
               </a:rPr>
               <a:t>• Plainsong mass</a:t>
             </a:r>
-            <a:endParaRPr lang="en-US" sz="900" dirty="0"/>
+            <a:endParaRPr lang="en-US" sz="1400" dirty="0"/>
           </a:p>
         </p:txBody>
       </p:sp>
@@ -8066,24 +8006,24 @@
         </p:nvSpPr>
         <p:spPr>
           <a:xfrm>
-            <a:off x="4663440" y="2560320"/>
-            <a:ext cx="4114800" cy="237744"/>
-          </a:xfrm>
-          <a:prstGeom prst="rect">
-            <a:avLst/>
-          </a:prstGeom>
-          <a:noFill/>
-          <a:ln/>
-        </p:spPr>
-        <p:txBody>
-          <a:bodyPr wrap="square" rtlCol="0" anchor="ctr"/>
-          <a:lstStyle/>
-          <a:p>
-            <a:pPr indent="0" marL="0">
-              <a:buNone/>
-            </a:pPr>
-            <a:r>
-              <a:rPr lang="en-US" sz="900" dirty="0">
+            <a:off x="4663440" y="2423160"/>
+            <a:ext cx="4114800" cy="219456"/>
+          </a:xfrm>
+          <a:prstGeom prst="rect">
+            <a:avLst/>
+          </a:prstGeom>
+          <a:noFill/>
+          <a:ln/>
+        </p:spPr>
+        <p:txBody>
+          <a:bodyPr wrap="square" lIns="0" tIns="0" rIns="0" bIns="0" rtlCol="0" anchor="t"/>
+          <a:lstStyle/>
+          <a:p>
+            <a:pPr indent="0" marL="0">
+              <a:buNone/>
+            </a:pPr>
+            <a:r>
+              <a:rPr lang="en-US" sz="1400" dirty="0">
                 <a:solidFill>
                   <a:srgbClr val="E8D8A8"/>
                 </a:solidFill>
@@ -8093,7 +8033,7 @@
               </a:rPr>
               <a:t>• Superius · Altus · Tenor · Bassus</a:t>
             </a:r>
-            <a:endParaRPr lang="en-US" sz="900" dirty="0"/>
+            <a:endParaRPr lang="en-US" sz="1400" dirty="0"/>
           </a:p>
         </p:txBody>
       </p:sp>
@@ -8105,24 +8045,24 @@
         </p:nvSpPr>
         <p:spPr>
           <a:xfrm>
-            <a:off x="4663440" y="2816352"/>
-            <a:ext cx="4114800" cy="237744"/>
-          </a:xfrm>
-          <a:prstGeom prst="rect">
-            <a:avLst/>
-          </a:prstGeom>
-          <a:noFill/>
-          <a:ln/>
-        </p:spPr>
-        <p:txBody>
-          <a:bodyPr wrap="square" rtlCol="0" anchor="ctr"/>
-          <a:lstStyle/>
-          <a:p>
-            <a:pPr indent="0" marL="0">
-              <a:buNone/>
-            </a:pPr>
-            <a:r>
-              <a:rPr lang="en-US" sz="900" dirty="0">
+            <a:off x="4663440" y="2651760"/>
+            <a:ext cx="4114800" cy="219456"/>
+          </a:xfrm>
+          <a:prstGeom prst="rect">
+            <a:avLst/>
+          </a:prstGeom>
+          <a:noFill/>
+          <a:ln/>
+        </p:spPr>
+        <p:txBody>
+          <a:bodyPr wrap="square" lIns="0" tIns="0" rIns="0" bIns="0" rtlCol="0" anchor="t"/>
+          <a:lstStyle/>
+          <a:p>
+            <a:pPr indent="0" marL="0">
+              <a:buNone/>
+            </a:pPr>
+            <a:r>
+              <a:rPr lang="en-US" sz="1400" dirty="0">
                 <a:solidFill>
                   <a:srgbClr val="E8D8A8"/>
                 </a:solidFill>
@@ -8132,7 +8072,7 @@
               </a:rPr>
               <a:t>• L'homme armé · Missa Caput</a:t>
             </a:r>
-            <a:endParaRPr lang="en-US" sz="900" dirty="0"/>
+            <a:endParaRPr lang="en-US" sz="1400" dirty="0"/>
           </a:p>
         </p:txBody>
       </p:sp>
@@ -8144,8 +8084,8 @@
         </p:nvSpPr>
         <p:spPr>
           <a:xfrm>
-            <a:off x="274320" y="3273552"/>
-            <a:ext cx="8595360" cy="1417320"/>
+            <a:off x="274320" y="3017520"/>
+            <a:ext cx="8595360" cy="1600200"/>
           </a:xfrm>
           <a:prstGeom prst="rect">
             <a:avLst/>
@@ -8164,24 +8104,24 @@
         </p:nvSpPr>
         <p:spPr>
           <a:xfrm>
-            <a:off x="411480" y="3328416"/>
-            <a:ext cx="8321040" cy="274320"/>
-          </a:xfrm>
-          <a:prstGeom prst="rect">
-            <a:avLst/>
-          </a:prstGeom>
-          <a:noFill/>
-          <a:ln/>
-        </p:spPr>
-        <p:txBody>
-          <a:bodyPr wrap="square" rtlCol="0" anchor="ctr"/>
-          <a:lstStyle/>
-          <a:p>
-            <a:pPr indent="0" marL="0">
-              <a:buNone/>
-            </a:pPr>
-            <a:r>
-              <a:rPr lang="en-US" sz="1200" b="1" dirty="0">
+            <a:off x="411480" y="3054096"/>
+            <a:ext cx="8321040" cy="256032"/>
+          </a:xfrm>
+          <a:prstGeom prst="rect">
+            <a:avLst/>
+          </a:prstGeom>
+          <a:noFill/>
+          <a:ln/>
+        </p:spPr>
+        <p:txBody>
+          <a:bodyPr wrap="square" lIns="0" tIns="0" rIns="0" bIns="0" rtlCol="0" anchor="t"/>
+          <a:lstStyle/>
+          <a:p>
+            <a:pPr indent="0" marL="0">
+              <a:buNone/>
+            </a:pPr>
+            <a:r>
+              <a:rPr lang="en-US" sz="1400" b="1" dirty="0">
                 <a:solidFill>
                   <a:srgbClr val="C8A020"/>
                 </a:solidFill>
@@ -8189,9 +8129,9 @@
                 <a:ea typeface="Georgia" pitchFamily="34" charset="-122"/>
                 <a:cs typeface="Georgia" pitchFamily="34" charset="-120"/>
               </a:rPr>
-              <a:t>🎧 聆聽 Listen (NAWM 32–37)</a:t>
-            </a:r>
-            <a:endParaRPr lang="en-US" sz="1200" dirty="0"/>
+              <a:t>■ 聆聽 Listen (NAWM 32–37)</a:t>
+            </a:r>
+            <a:endParaRPr lang="en-US" sz="1400" dirty="0"/>
           </a:p>
         </p:txBody>
       </p:sp>
@@ -8203,24 +8143,24 @@
         </p:nvSpPr>
         <p:spPr>
           <a:xfrm>
-            <a:off x="457200" y="3593592"/>
-            <a:ext cx="8321040" cy="1069848"/>
-          </a:xfrm>
-          <a:prstGeom prst="rect">
-            <a:avLst/>
-          </a:prstGeom>
-          <a:noFill/>
-          <a:ln/>
-        </p:spPr>
-        <p:txBody>
-          <a:bodyPr wrap="square" rtlCol="0" anchor="ctr"/>
-          <a:lstStyle/>
-          <a:p>
-            <a:pPr indent="0" marL="0">
-              <a:buNone/>
-            </a:pPr>
-            <a:r>
-              <a:rPr lang="en-US" sz="900" dirty="0">
+            <a:off x="457200" y="3310128"/>
+            <a:ext cx="8321040" cy="1280160"/>
+          </a:xfrm>
+          <a:prstGeom prst="rect">
+            <a:avLst/>
+          </a:prstGeom>
+          <a:noFill/>
+          <a:ln/>
+        </p:spPr>
+        <p:txBody>
+          <a:bodyPr wrap="square" lIns="0" tIns="0" rIns="0" bIns="0" rtlCol="0" anchor="t"/>
+          <a:lstStyle/>
+          <a:p>
+            <a:pPr indent="0" marL="0">
+              <a:buNone/>
+            </a:pPr>
+            <a:r>
+              <a:rPr lang="en-US" sz="1400" dirty="0">
                 <a:solidFill>
                   <a:srgbClr val="E8D8A8"/>
                 </a:solidFill>
@@ -8230,14 +8170,14 @@
               </a:rPr>
               <a:t>• A newë work (English carol, NAWM 32)  youtu.be/odCOfgR0HkI</a:t>
             </a:r>
-            <a:endParaRPr lang="en-US" sz="900" dirty="0"/>
-          </a:p>
-          <a:p>
-            <a:pPr indent="0" marL="0">
-              <a:buNone/>
-            </a:pPr>
-            <a:r>
-              <a:rPr lang="en-US" sz="900" dirty="0">
+            <a:endParaRPr lang="en-US" sz="1400" dirty="0"/>
+          </a:p>
+          <a:p>
+            <a:pPr indent="0" marL="0">
+              <a:buNone/>
+            </a:pPr>
+            <a:r>
+              <a:rPr lang="en-US" sz="1400" dirty="0">
                 <a:solidFill>
                   <a:srgbClr val="E8D8A8"/>
                 </a:solidFill>
@@ -8247,14 +8187,14 @@
               </a:rPr>
               <a:t>• Dunstable — Quam pulchra es (NAWM 33)  youtu.be/lMoyfuCbnjs</a:t>
             </a:r>
-            <a:endParaRPr lang="en-US" sz="900" dirty="0"/>
-          </a:p>
-          <a:p>
-            <a:pPr indent="0" marL="0">
-              <a:buNone/>
-            </a:pPr>
-            <a:r>
-              <a:rPr lang="en-US" sz="900" dirty="0">
+            <a:endParaRPr lang="en-US" sz="1400" dirty="0"/>
+          </a:p>
+          <a:p>
+            <a:pPr indent="0" marL="0">
+              <a:buNone/>
+            </a:pPr>
+            <a:r>
+              <a:rPr lang="en-US" sz="1400" dirty="0">
                 <a:solidFill>
                   <a:srgbClr val="E8D8A8"/>
                 </a:solidFill>
@@ -8264,14 +8204,14 @@
               </a:rPr>
               <a:t>• Binchois — De plus en plus (NAWM 34)  youtu.be/dzjB7HaFKFg</a:t>
             </a:r>
-            <a:endParaRPr lang="en-US" sz="900" dirty="0"/>
-          </a:p>
-          <a:p>
-            <a:pPr indent="0" marL="0">
-              <a:buNone/>
-            </a:pPr>
-            <a:r>
-              <a:rPr lang="en-US" sz="900" dirty="0">
+            <a:endParaRPr lang="en-US" sz="1400" dirty="0"/>
+          </a:p>
+          <a:p>
+            <a:pPr indent="0" marL="0">
+              <a:buNone/>
+            </a:pPr>
+            <a:r>
+              <a:rPr lang="en-US" sz="1400" dirty="0">
                 <a:solidFill>
                   <a:srgbClr val="E8D8A8"/>
                 </a:solidFill>
@@ -8281,14 +8221,14 @@
               </a:rPr>
               <a:t>• Du Fay — Resvellies vous (NAWM 35)  youtu.be/iObHTuqHxRo</a:t>
             </a:r>
-            <a:endParaRPr lang="en-US" sz="900" dirty="0"/>
-          </a:p>
-          <a:p>
-            <a:pPr indent="0" marL="0">
-              <a:buNone/>
-            </a:pPr>
-            <a:r>
-              <a:rPr lang="en-US" sz="900" dirty="0">
+            <a:endParaRPr lang="en-US" sz="1400" dirty="0"/>
+          </a:p>
+          <a:p>
+            <a:pPr indent="0" marL="0">
+              <a:buNone/>
+            </a:pPr>
+            <a:r>
+              <a:rPr lang="en-US" sz="1400" dirty="0">
                 <a:solidFill>
                   <a:srgbClr val="E8D8A8"/>
                 </a:solidFill>
@@ -8298,14 +8238,14 @@
               </a:rPr>
               <a:t>• Du Fay — Conditor alme siderum (NAWM 36)  youtu.be/UqYgWMdkhSg</a:t>
             </a:r>
-            <a:endParaRPr lang="en-US" sz="900" dirty="0"/>
-          </a:p>
-          <a:p>
-            <a:pPr indent="0" marL="0">
-              <a:buNone/>
-            </a:pPr>
-            <a:r>
-              <a:rPr lang="en-US" sz="900" dirty="0">
+            <a:endParaRPr lang="en-US" sz="1400" dirty="0"/>
+          </a:p>
+          <a:p>
+            <a:pPr indent="0" marL="0">
+              <a:buNone/>
+            </a:pPr>
+            <a:r>
+              <a:rPr lang="en-US" sz="1400" dirty="0">
                 <a:solidFill>
                   <a:srgbClr val="E8D8A8"/>
                 </a:solidFill>
@@ -8315,7 +8255,7 @@
               </a:rPr>
               <a:t>• Du Fay — Se la face ay pale (NAWM 37)  youtu.be/_EMbGN2jeno</a:t>
             </a:r>
-            <a:endParaRPr lang="en-US" sz="900" dirty="0"/>
+            <a:endParaRPr lang="en-US" sz="1400" dirty="0"/>
           </a:p>
         </p:txBody>
       </p:sp>
@@ -8327,8 +8267,8 @@
         </p:nvSpPr>
         <p:spPr>
           <a:xfrm>
-            <a:off x="274320" y="4754880"/>
-            <a:ext cx="8595360" cy="457200"/>
+            <a:off x="274320" y="4663440"/>
+            <a:ext cx="8595360" cy="411480"/>
           </a:xfrm>
           <a:prstGeom prst="rect">
             <a:avLst/>
@@ -8347,24 +8287,24 @@
         </p:nvSpPr>
         <p:spPr>
           <a:xfrm>
-            <a:off x="457200" y="4818888"/>
-            <a:ext cx="8321040" cy="365760"/>
-          </a:xfrm>
-          <a:prstGeom prst="rect">
-            <a:avLst/>
-          </a:prstGeom>
-          <a:noFill/>
-          <a:ln/>
-        </p:spPr>
-        <p:txBody>
-          <a:bodyPr wrap="square" rtlCol="0" anchor="ctr"/>
-          <a:lstStyle/>
-          <a:p>
-            <a:pPr indent="0" marL="0">
-              <a:buNone/>
-            </a:pPr>
-            <a:r>
-              <a:rPr lang="en-US" sz="800" i="1" dirty="0">
+            <a:off x="457200" y="4709160"/>
+            <a:ext cx="8321040" cy="320040"/>
+          </a:xfrm>
+          <a:prstGeom prst="rect">
+            <a:avLst/>
+          </a:prstGeom>
+          <a:noFill/>
+          <a:ln/>
+        </p:spPr>
+        <p:txBody>
+          <a:bodyPr wrap="square" lIns="0" tIns="0" rIns="0" bIns="0" rtlCol="0" anchor="t"/>
+          <a:lstStyle/>
+          <a:p>
+            <a:pPr indent="0" marL="0">
+              <a:buNone/>
+            </a:pPr>
+            <a:r>
+              <a:rPr lang="en-US" sz="1400" i="1" dirty="0">
                 <a:solidFill>
                   <a:srgbClr val="E8D8A8"/>
                 </a:solidFill>
@@ -8372,9 +8312,9 @@
                 <a:ea typeface="Calibri" pitchFamily="34" charset="-122"/>
                 <a:cs typeface="Calibri" pitchFamily="34" charset="-120"/>
               </a:rPr>
-              <a:t>📚 Fallows, Dufay · Bent, Dunstaple · Kirkman, Cultural Life of the Early Polyphonic Mass · Strohm, Rise of European Music</a:t>
-            </a:r>
-            <a:endParaRPr lang="en-US" sz="800" dirty="0"/>
+              <a:t>Fallows, Dufay · Bent, Dunstaple · Kirkman, Polyphonic Mass · Strohm, Rise of European Music</a:t>
+            </a:r>
+            <a:endParaRPr lang="en-US" sz="1400" dirty="0"/>
           </a:p>
         </p:txBody>
       </p:sp>
@@ -8468,7 +8408,7 @@
           <a:ln/>
         </p:spPr>
         <p:txBody>
-          <a:bodyPr wrap="square" rtlCol="0" anchor="ctr"/>
+          <a:bodyPr wrap="square" lIns="0" tIns="0" rIns="0" bIns="0" rtlCol="0" anchor="ctr"/>
           <a:lstStyle/>
           <a:p>
             <a:pPr indent="0" marL="0">
@@ -8559,7 +8499,7 @@
                   <a:srgbClr val="000000"/>
                 </a:solidFill>
               </a:rPr>
-              <a:t>🏰</a:t>
+              <a:t>■</a:t>
             </a:r>
             <a:endParaRPr lang="en-US" sz="2000" dirty="0"/>
           </a:p>
@@ -8622,14 +8562,14 @@
           <a:ln/>
         </p:spPr>
         <p:txBody>
-          <a:bodyPr wrap="square" lIns="0" tIns="0" rIns="0" bIns="0" rtlCol="0" anchor="ctr"/>
-          <a:lstStyle/>
-          <a:p>
-            <a:pPr indent="0" marL="0">
-              <a:buNone/>
-            </a:pPr>
-            <a:r>
-              <a:rPr lang="en-US" sz="1100" dirty="0">
+          <a:bodyPr wrap="square" lIns="0" tIns="0" rIns="0" bIns="0" rtlCol="0" anchor="t"/>
+          <a:lstStyle/>
+          <a:p>
+            <a:pPr indent="0" marL="0">
+              <a:buNone/>
+            </a:pPr>
+            <a:r>
+              <a:rPr lang="en-US" sz="1400" dirty="0">
                 <a:solidFill>
                   <a:srgbClr val="3E6B4C"/>
                 </a:solidFill>
@@ -8639,7 +8579,7 @@
               </a:rPr>
               <a:t>Sarum rite · Faburden · Carol · 三六度協和 · Dunstable</a:t>
             </a:r>
-            <a:endParaRPr lang="en-US" sz="1100" dirty="0"/>
+            <a:endParaRPr lang="en-US" sz="1400" dirty="0"/>
           </a:p>
         </p:txBody>
       </p:sp>
@@ -8693,7 +8633,7 @@
                   <a:srgbClr val="000000"/>
                 </a:solidFill>
               </a:rPr>
-              <a:t>🎵</a:t>
+              <a:t>■</a:t>
             </a:r>
             <a:endParaRPr lang="en-US" sz="2000" dirty="0"/>
           </a:p>
@@ -8756,14 +8696,14 @@
           <a:ln/>
         </p:spPr>
         <p:txBody>
-          <a:bodyPr wrap="square" lIns="0" tIns="0" rIns="0" bIns="0" rtlCol="0" anchor="ctr"/>
-          <a:lstStyle/>
-          <a:p>
-            <a:pPr indent="0" marL="0">
-              <a:buNone/>
-            </a:pPr>
-            <a:r>
-              <a:rPr lang="en-US" sz="1100" dirty="0">
+          <a:bodyPr wrap="square" lIns="0" tIns="0" rIns="0" bIns="0" rtlCol="0" anchor="t"/>
+          <a:lstStyle/>
+          <a:p>
+            <a:pPr indent="0" marL="0">
+              <a:buNone/>
+            </a:pPr>
+            <a:r>
+              <a:rPr lang="en-US" sz="1400" dirty="0">
                 <a:solidFill>
                   <a:srgbClr val="3E6B4C"/>
                 </a:solidFill>
@@ -8773,7 +8713,7 @@
               </a:rPr>
               <a:t>Martin Le Franc 1440 詩篇 · 大陸作曲家學習英格蘭風格</a:t>
             </a:r>
-            <a:endParaRPr lang="en-US" sz="1100" dirty="0"/>
+            <a:endParaRPr lang="en-US" sz="1400" dirty="0"/>
           </a:p>
         </p:txBody>
       </p:sp>
@@ -8827,7 +8767,7 @@
                   <a:srgbClr val="000000"/>
                 </a:solidFill>
               </a:rPr>
-              <a:t>⚜</a:t>
+              <a:t>■</a:t>
             </a:r>
             <a:endParaRPr lang="en-US" sz="2000" dirty="0"/>
           </a:p>
@@ -8890,14 +8830,14 @@
           <a:ln/>
         </p:spPr>
         <p:txBody>
-          <a:bodyPr wrap="square" lIns="0" tIns="0" rIns="0" bIns="0" rtlCol="0" anchor="ctr"/>
-          <a:lstStyle/>
-          <a:p>
-            <a:pPr indent="0" marL="0">
-              <a:buNone/>
-            </a:pPr>
-            <a:r>
-              <a:rPr lang="en-US" sz="1100" dirty="0">
+          <a:bodyPr wrap="square" lIns="0" tIns="0" rIns="0" bIns="0" rtlCol="0" anchor="t"/>
+          <a:lstStyle/>
+          <a:p>
+            <a:pPr indent="0" marL="0">
+              <a:buNone/>
+            </a:pPr>
+            <a:r>
+              <a:rPr lang="en-US" sz="1400" dirty="0">
                 <a:solidFill>
                   <a:srgbClr val="3E6B4C"/>
                 </a:solidFill>
@@ -8907,7 +8847,7 @@
               </a:rPr>
               <a:t>Philip the Good · 歐洲最盛的禮拜堂樂團 · 國際樂風</a:t>
             </a:r>
-            <a:endParaRPr lang="en-US" sz="1100" dirty="0"/>
+            <a:endParaRPr lang="en-US" sz="1400" dirty="0"/>
           </a:p>
         </p:txBody>
       </p:sp>
@@ -8961,7 +8901,7 @@
                   <a:srgbClr val="000000"/>
                 </a:solidFill>
               </a:rPr>
-              <a:t>🎼</a:t>
+              <a:t>■</a:t>
             </a:r>
             <a:endParaRPr lang="en-US" sz="2000" dirty="0"/>
           </a:p>
@@ -9024,14 +8964,14 @@
           <a:ln/>
         </p:spPr>
         <p:txBody>
-          <a:bodyPr wrap="square" lIns="0" tIns="0" rIns="0" bIns="0" rtlCol="0" anchor="ctr"/>
-          <a:lstStyle/>
-          <a:p>
-            <a:pPr indent="0" marL="0">
-              <a:buNone/>
-            </a:pPr>
-            <a:r>
-              <a:rPr lang="en-US" sz="1100" dirty="0">
+          <a:bodyPr wrap="square" lIns="0" tIns="0" rIns="0" bIns="0" rtlCol="0" anchor="t"/>
+          <a:lstStyle/>
+          <a:p>
+            <a:pPr indent="0" marL="0">
+              <a:buNone/>
+            </a:pPr>
+            <a:r>
+              <a:rPr lang="en-US" sz="1400" dirty="0">
                 <a:solidFill>
                   <a:srgbClr val="3E6B4C"/>
                 </a:solidFill>
@@ -9041,7 +8981,7 @@
               </a:rPr>
               <a:t>ca. 1400–1460 · 勃艮第 chanson 大師 · rondeau De plus en plus</a:t>
             </a:r>
-            <a:endParaRPr lang="en-US" sz="1100" dirty="0"/>
+            <a:endParaRPr lang="en-US" sz="1400" dirty="0"/>
           </a:p>
         </p:txBody>
       </p:sp>
@@ -9095,7 +9035,7 @@
                   <a:srgbClr val="000000"/>
                 </a:solidFill>
               </a:rPr>
-              <a:t>👑</a:t>
+              <a:t>■</a:t>
             </a:r>
             <a:endParaRPr lang="en-US" sz="2000" dirty="0"/>
           </a:p>
@@ -9158,14 +9098,14 @@
           <a:ln/>
         </p:spPr>
         <p:txBody>
-          <a:bodyPr wrap="square" lIns="0" tIns="0" rIns="0" bIns="0" rtlCol="0" anchor="ctr"/>
-          <a:lstStyle/>
-          <a:p>
-            <a:pPr indent="0" marL="0">
-              <a:buNone/>
-            </a:pPr>
-            <a:r>
-              <a:rPr lang="en-US" sz="1100" dirty="0">
+          <a:bodyPr wrap="square" lIns="0" tIns="0" rIns="0" bIns="0" rtlCol="0" anchor="t"/>
+          <a:lstStyle/>
+          <a:p>
+            <a:pPr indent="0" marL="0">
+              <a:buNone/>
+            </a:pPr>
+            <a:r>
+              <a:rPr lang="en-US" sz="1400" dirty="0">
                 <a:solidFill>
                   <a:srgbClr val="3E6B4C"/>
                 </a:solidFill>
@@ -9175,7 +9115,7 @@
               </a:rPr>
               <a:t>ca. 1397–1474 · 集大成者 · Se la face ay pale · Nuper rosarum flores</a:t>
             </a:r>
-            <a:endParaRPr lang="en-US" sz="1100" dirty="0"/>
+            <a:endParaRPr lang="en-US" sz="1400" dirty="0"/>
           </a:p>
         </p:txBody>
       </p:sp>
@@ -9229,7 +9169,7 @@
                   <a:srgbClr val="000000"/>
                 </a:solidFill>
               </a:rPr>
-              <a:t>⛪</a:t>
+              <a:t>■</a:t>
             </a:r>
             <a:endParaRPr lang="en-US" sz="2000" dirty="0"/>
           </a:p>
@@ -9292,14 +9232,14 @@
           <a:ln/>
         </p:spPr>
         <p:txBody>
-          <a:bodyPr wrap="square" lIns="0" tIns="0" rIns="0" bIns="0" rtlCol="0" anchor="ctr"/>
-          <a:lstStyle/>
-          <a:p>
-            <a:pPr indent="0" marL="0">
-              <a:buNone/>
-            </a:pPr>
-            <a:r>
-              <a:rPr lang="en-US" sz="1100" dirty="0">
+          <a:bodyPr wrap="square" lIns="0" tIns="0" rIns="0" bIns="0" rtlCol="0" anchor="t"/>
+          <a:lstStyle/>
+          <a:p>
+            <a:pPr indent="0" marL="0">
+              <a:buNone/>
+            </a:pPr>
+            <a:r>
+              <a:rPr lang="en-US" sz="1400" dirty="0">
                 <a:solidFill>
                   <a:srgbClr val="3E6B4C"/>
                 </a:solidFill>
@@ -9309,7 +9249,7 @@
               </a:rPr>
               <a:t>Cantus-firmus mass · 四聲部 · L'homme armé 傳統 · 最尊貴的類型</a:t>
             </a:r>
-            <a:endParaRPr lang="en-US" sz="1100" dirty="0"/>
+            <a:endParaRPr lang="en-US" sz="1400" dirty="0"/>
           </a:p>
         </p:txBody>
       </p:sp>
@@ -9449,7 +9389,7 @@
               <a:buNone/>
             </a:pPr>
             <a:r>
-              <a:rPr lang="en-US" sz="1300" dirty="0">
+              <a:rPr lang="en-US" sz="1400" dirty="0">
                 <a:solidFill>
                   <a:srgbClr val="E8D8A8"/>
                 </a:solidFill>
@@ -9459,7 +9399,7 @@
               </a:rPr>
               <a:t>English Music · Sarum Rite · Faburden · Carol</a:t>
             </a:r>
-            <a:endParaRPr lang="en-US" sz="1300" dirty="0"/>
+            <a:endParaRPr lang="en-US" sz="1400" dirty="0"/>
           </a:p>
         </p:txBody>
       </p:sp>
@@ -9492,7 +9432,7 @@
         <p:spPr>
           <a:xfrm>
             <a:off x="274320" y="1188720"/>
-            <a:ext cx="4206240" cy="3611880"/>
+            <a:ext cx="4206240" cy="3794760"/>
           </a:xfrm>
           <a:prstGeom prst="rect">
             <a:avLst/>
@@ -9512,23 +9452,23 @@
         <p:spPr>
           <a:xfrm>
             <a:off x="411480" y="1261872"/>
-            <a:ext cx="3931920" cy="292608"/>
-          </a:xfrm>
-          <a:prstGeom prst="rect">
-            <a:avLst/>
-          </a:prstGeom>
-          <a:noFill/>
-          <a:ln/>
-        </p:spPr>
-        <p:txBody>
-          <a:bodyPr wrap="square" rtlCol="0" anchor="ctr"/>
-          <a:lstStyle/>
-          <a:p>
-            <a:pPr indent="0" marL="0">
-              <a:buNone/>
-            </a:pPr>
-            <a:r>
-              <a:rPr lang="en-US" sz="1200" b="1" dirty="0">
+            <a:ext cx="3931920" cy="365760"/>
+          </a:xfrm>
+          <a:prstGeom prst="rect">
+            <a:avLst/>
+          </a:prstGeom>
+          <a:noFill/>
+          <a:ln/>
+        </p:spPr>
+        <p:txBody>
+          <a:bodyPr wrap="square" lIns="0" tIns="0" rIns="0" bIns="0" rtlCol="0" anchor="ctr"/>
+          <a:lstStyle/>
+          <a:p>
+            <a:pPr indent="0" marL="0">
+              <a:buNone/>
+            </a:pPr>
+            <a:r>
+              <a:rPr lang="en-US" sz="1400" b="1" dirty="0">
                 <a:solidFill>
                   <a:srgbClr val="C8A020"/>
                 </a:solidFill>
@@ -9536,9 +9476,9 @@
                 <a:ea typeface="Georgia" pitchFamily="34" charset="-122"/>
                 <a:cs typeface="Georgia" pitchFamily="34" charset="-120"/>
               </a:rPr>
-              <a:t>🎶 English Sound 英式音響</a:t>
-            </a:r>
-            <a:endParaRPr lang="en-US" sz="1200" dirty="0"/>
+              <a:t>■ English Sound 英式音響</a:t>
+            </a:r>
+            <a:endParaRPr lang="en-US" sz="1400" dirty="0"/>
           </a:p>
         </p:txBody>
       </p:sp>
@@ -9550,27 +9490,27 @@
         </p:nvSpPr>
         <p:spPr>
           <a:xfrm>
-            <a:off x="457200" y="1572768"/>
-            <a:ext cx="3977640" cy="3154680"/>
-          </a:xfrm>
-          <a:prstGeom prst="rect">
-            <a:avLst/>
-          </a:prstGeom>
-          <a:noFill/>
-          <a:ln/>
-        </p:spPr>
-        <p:txBody>
-          <a:bodyPr wrap="square" rtlCol="0" anchor="ctr"/>
+            <a:off x="457200" y="1719072"/>
+            <a:ext cx="3977640" cy="3246120"/>
+          </a:xfrm>
+          <a:prstGeom prst="rect">
+            <a:avLst/>
+          </a:prstGeom>
+          <a:noFill/>
+          <a:ln/>
+        </p:spPr>
+        <p:txBody>
+          <a:bodyPr wrap="square" rtlCol="0" anchor="t"/>
           <a:lstStyle/>
           <a:p>
             <a:pPr indent="0" marL="0">
               <a:spcAft>
-                <a:spcPts val="300"/>
+                <a:spcPts val="100"/>
               </a:spcAft>
               <a:buNone/>
             </a:pPr>
             <a:r>
-              <a:rPr lang="en-US" sz="950" dirty="0">
+              <a:rPr lang="en-US" sz="1400" dirty="0">
                 <a:solidFill>
                   <a:srgbClr val="E8D8A8"/>
                 </a:solidFill>
@@ -9580,17 +9520,17 @@
               </a:rPr>
               <a:t>• 頻繁的和聲三度、六度——常以平行進行</a:t>
             </a:r>
-            <a:endParaRPr lang="en-US" sz="950" dirty="0"/>
+            <a:endParaRPr lang="en-US" sz="1400" dirty="0"/>
           </a:p>
           <a:p>
             <a:pPr indent="0" marL="0">
               <a:spcAft>
-                <a:spcPts val="300"/>
+                <a:spcPts val="100"/>
               </a:spcAft>
               <a:buNone/>
             </a:pPr>
             <a:r>
-              <a:rPr lang="en-US" sz="950" dirty="0">
+              <a:rPr lang="en-US" sz="1400" dirty="0">
                 <a:solidFill>
                   <a:srgbClr val="E8D8A8"/>
                 </a:solidFill>
@@ -9600,17 +9540,17 @@
               </a:rPr>
               <a:t>• 徹底的協和——極少不協和</a:t>
             </a:r>
-            <a:endParaRPr lang="en-US" sz="950" dirty="0"/>
+            <a:endParaRPr lang="en-US" sz="1400" dirty="0"/>
           </a:p>
           <a:p>
             <a:pPr indent="0" marL="0">
               <a:spcAft>
-                <a:spcPts val="300"/>
+                <a:spcPts val="100"/>
               </a:spcAft>
               <a:buNone/>
             </a:pPr>
             <a:r>
-              <a:rPr lang="en-US" sz="950" dirty="0">
+              <a:rPr lang="en-US" sz="1400" dirty="0">
                 <a:solidFill>
                   <a:srgbClr val="E8D8A8"/>
                 </a:solidFill>
@@ -9620,17 +9560,17 @@
               </a:rPr>
               <a:t>• 簡單旋律、規則樂句、音節對音</a:t>
             </a:r>
-            <a:endParaRPr lang="en-US" sz="950" dirty="0"/>
+            <a:endParaRPr lang="en-US" sz="1400" dirty="0"/>
           </a:p>
           <a:p>
             <a:pPr indent="0" marL="0">
               <a:spcAft>
-                <a:spcPts val="300"/>
+                <a:spcPts val="100"/>
               </a:spcAft>
               <a:buNone/>
             </a:pPr>
             <a:r>
-              <a:rPr lang="en-US" sz="950" dirty="0">
+              <a:rPr lang="en-US" sz="1400" dirty="0">
                 <a:solidFill>
                   <a:srgbClr val="E8D8A8"/>
                 </a:solidFill>
@@ -9640,17 +9580,17 @@
               </a:rPr>
               <a:t>• 同節奏（homorhythmic）織度</a:t>
             </a:r>
-            <a:endParaRPr lang="en-US" sz="950" dirty="0"/>
+            <a:endParaRPr lang="en-US" sz="1400" dirty="0"/>
           </a:p>
           <a:p>
             <a:pPr indent="0" marL="0">
               <a:spcAft>
-                <a:spcPts val="300"/>
+                <a:spcPts val="100"/>
               </a:spcAft>
               <a:buNone/>
             </a:pPr>
             <a:r>
-              <a:rPr lang="en-US" sz="950" dirty="0">
+              <a:rPr lang="en-US" sz="1400" dirty="0">
                 <a:solidFill>
                   <a:srgbClr val="E8D8A8"/>
                 </a:solidFill>
@@ -9660,17 +9600,17 @@
               </a:rPr>
               <a:t>• Sarum rite：英格蘭特有的聖歌方言（中世紀至宗教改革）</a:t>
             </a:r>
-            <a:endParaRPr lang="en-US" sz="950" dirty="0"/>
+            <a:endParaRPr lang="en-US" sz="1400" dirty="0"/>
           </a:p>
           <a:p>
             <a:pPr indent="0" marL="0">
               <a:spcAft>
-                <a:spcPts val="300"/>
+                <a:spcPts val="100"/>
               </a:spcAft>
               <a:buNone/>
             </a:pPr>
             <a:r>
-              <a:rPr lang="en-US" sz="950" dirty="0">
+              <a:rPr lang="en-US" sz="1400" dirty="0">
                 <a:solidFill>
                   <a:srgbClr val="E8D8A8"/>
                 </a:solidFill>
@@ -9680,7 +9620,7 @@
               </a:rPr>
               <a:t>• 三聲部織度常以中聲部持 chant、上聲部平行四度、下聲部平行三度</a:t>
             </a:r>
-            <a:endParaRPr lang="en-US" sz="950" dirty="0"/>
+            <a:endParaRPr lang="en-US" sz="1400" dirty="0"/>
           </a:p>
         </p:txBody>
       </p:sp>
@@ -9693,7 +9633,7 @@
         <p:spPr>
           <a:xfrm>
             <a:off x="4663440" y="1188720"/>
-            <a:ext cx="4206240" cy="3611880"/>
+            <a:ext cx="4206240" cy="3794760"/>
           </a:xfrm>
           <a:prstGeom prst="rect">
             <a:avLst/>
@@ -9713,23 +9653,23 @@
         <p:spPr>
           <a:xfrm>
             <a:off x="4800600" y="1261872"/>
-            <a:ext cx="3931920" cy="292608"/>
-          </a:xfrm>
-          <a:prstGeom prst="rect">
-            <a:avLst/>
-          </a:prstGeom>
-          <a:noFill/>
-          <a:ln/>
-        </p:spPr>
-        <p:txBody>
-          <a:bodyPr wrap="square" rtlCol="0" anchor="ctr"/>
-          <a:lstStyle/>
-          <a:p>
-            <a:pPr indent="0" marL="0">
-              <a:buNone/>
-            </a:pPr>
-            <a:r>
-              <a:rPr lang="en-US" sz="1200" b="1" dirty="0">
+            <a:ext cx="3931920" cy="365760"/>
+          </a:xfrm>
+          <a:prstGeom prst="rect">
+            <a:avLst/>
+          </a:prstGeom>
+          <a:noFill/>
+          <a:ln/>
+        </p:spPr>
+        <p:txBody>
+          <a:bodyPr wrap="square" lIns="0" tIns="0" rIns="0" bIns="0" rtlCol="0" anchor="ctr"/>
+          <a:lstStyle/>
+          <a:p>
+            <a:pPr indent="0" marL="0">
+              <a:buNone/>
+            </a:pPr>
+            <a:r>
+              <a:rPr lang="en-US" sz="1400" b="1" dirty="0">
                 <a:solidFill>
                   <a:srgbClr val="C8A020"/>
                 </a:solidFill>
@@ -9737,9 +9677,9 @@
                 <a:ea typeface="Georgia" pitchFamily="34" charset="-122"/>
                 <a:cs typeface="Georgia" pitchFamily="34" charset="-120"/>
               </a:rPr>
-              <a:t>📜 Faburden &amp; Carol</a:t>
-            </a:r>
-            <a:endParaRPr lang="en-US" sz="1200" dirty="0"/>
+              <a:t>■ Faburden &amp; Carol</a:t>
+            </a:r>
+            <a:endParaRPr lang="en-US" sz="1400" dirty="0"/>
           </a:p>
         </p:txBody>
       </p:sp>
@@ -9751,27 +9691,27 @@
         </p:nvSpPr>
         <p:spPr>
           <a:xfrm>
-            <a:off x="4846320" y="1572768"/>
-            <a:ext cx="3977640" cy="3154680"/>
-          </a:xfrm>
-          <a:prstGeom prst="rect">
-            <a:avLst/>
-          </a:prstGeom>
-          <a:noFill/>
-          <a:ln/>
-        </p:spPr>
-        <p:txBody>
-          <a:bodyPr wrap="square" rtlCol="0" anchor="ctr"/>
+            <a:off x="4846320" y="1719072"/>
+            <a:ext cx="3977640" cy="3246120"/>
+          </a:xfrm>
+          <a:prstGeom prst="rect">
+            <a:avLst/>
+          </a:prstGeom>
+          <a:noFill/>
+          <a:ln/>
+        </p:spPr>
+        <p:txBody>
+          <a:bodyPr wrap="square" rtlCol="0" anchor="t"/>
           <a:lstStyle/>
           <a:p>
             <a:pPr indent="0" marL="0">
               <a:spcAft>
-                <a:spcPts val="200"/>
+                <a:spcPts val="100"/>
               </a:spcAft>
               <a:buNone/>
             </a:pPr>
             <a:r>
-              <a:rPr lang="en-US" sz="900" dirty="0">
+              <a:rPr lang="en-US" sz="1400" dirty="0">
                 <a:solidFill>
                   <a:srgbClr val="E8D8A8"/>
                 </a:solidFill>
@@ -9781,17 +9721,17 @@
               </a:rPr>
               <a:t>Faburden（ca. 1430 首次見諸文獻）</a:t>
             </a:r>
-            <a:endParaRPr lang="en-US" sz="900" dirty="0"/>
+            <a:endParaRPr lang="en-US" sz="1400" dirty="0"/>
           </a:p>
           <a:p>
             <a:pPr indent="0" marL="0">
               <a:spcAft>
-                <a:spcPts val="200"/>
+                <a:spcPts val="100"/>
               </a:spcAft>
               <a:buNone/>
             </a:pPr>
             <a:r>
-              <a:rPr lang="en-US" sz="900" dirty="0">
+              <a:rPr lang="en-US" sz="1400" dirty="0">
                 <a:solidFill>
                   <a:srgbClr val="E8D8A8"/>
                 </a:solidFill>
@@ -9801,17 +9741,17 @@
               </a:rPr>
               <a:t>  • 即興複音技法——中聲部唱 chant、上方四度、下方三度</a:t>
             </a:r>
-            <a:endParaRPr lang="en-US" sz="900" dirty="0"/>
+            <a:endParaRPr lang="en-US" sz="1400" dirty="0"/>
           </a:p>
           <a:p>
             <a:pPr indent="0" marL="0">
               <a:spcAft>
-                <a:spcPts val="200"/>
+                <a:spcPts val="100"/>
               </a:spcAft>
               <a:buNone/>
             </a:pPr>
             <a:r>
-              <a:rPr lang="en-US" sz="900" dirty="0">
+              <a:rPr lang="en-US" sz="1400" dirty="0">
                 <a:solidFill>
                   <a:srgbClr val="E8D8A8"/>
                 </a:solidFill>
@@ -9821,17 +9761,17 @@
               </a:rPr>
               <a:t>  • 規則化系統——不識譜的修士也能唱出正確複音</a:t>
             </a:r>
-            <a:endParaRPr lang="en-US" sz="900" dirty="0"/>
+            <a:endParaRPr lang="en-US" sz="1400" dirty="0"/>
           </a:p>
           <a:p>
             <a:pPr indent="0" marL="0">
               <a:spcAft>
-                <a:spcPts val="200"/>
+                <a:spcPts val="100"/>
               </a:spcAft>
               <a:buNone/>
             </a:pPr>
             <a:r>
-              <a:rPr lang="en-US" sz="900" dirty="0">
+              <a:rPr lang="en-US" sz="1400" dirty="0">
                 <a:solidFill>
                   <a:srgbClr val="E8D8A8"/>
                 </a:solidFill>
@@ -9841,26 +9781,26 @@
               </a:rPr>
               <a:t>  • 結果是連續不斷的 6/3 和弦（三和六度）</a:t>
             </a:r>
-            <a:endParaRPr lang="en-US" sz="900" dirty="0"/>
+            <a:endParaRPr lang="en-US" sz="1400" dirty="0"/>
           </a:p>
           <a:p>
             <a:pPr indent="0" marL="0">
               <a:spcAft>
-                <a:spcPts val="200"/>
+                <a:spcPts val="100"/>
               </a:spcAft>
               <a:buNone/>
             </a:pPr>
-            <a:endParaRPr lang="en-US" sz="900" dirty="0"/>
+            <a:endParaRPr lang="en-US" sz="1400" dirty="0"/>
           </a:p>
           <a:p>
             <a:pPr indent="0" marL="0">
               <a:spcAft>
-                <a:spcPts val="200"/>
+                <a:spcPts val="100"/>
               </a:spcAft>
               <a:buNone/>
             </a:pPr>
             <a:r>
-              <a:rPr lang="en-US" sz="900" dirty="0">
+              <a:rPr lang="en-US" sz="1400" dirty="0">
                 <a:solidFill>
                   <a:srgbClr val="E8D8A8"/>
                 </a:solidFill>
@@ -9870,17 +9810,17 @@
               </a:rPr>
               <a:t>Carol（英格蘭獨有體裁）</a:t>
             </a:r>
-            <a:endParaRPr lang="en-US" sz="900" dirty="0"/>
+            <a:endParaRPr lang="en-US" sz="1400" dirty="0"/>
           </a:p>
           <a:p>
             <a:pPr indent="0" marL="0">
               <a:spcAft>
-                <a:spcPts val="200"/>
+                <a:spcPts val="100"/>
               </a:spcAft>
               <a:buNone/>
             </a:pPr>
             <a:r>
-              <a:rPr lang="en-US" sz="900" dirty="0">
+              <a:rPr lang="en-US" sz="1400" dirty="0">
                 <a:solidFill>
                   <a:srgbClr val="E8D8A8"/>
                 </a:solidFill>
@@ -9890,17 +9830,17 @@
               </a:rPr>
               <a:t>  • 源自中世紀 carole（舞歌）</a:t>
             </a:r>
-            <a:endParaRPr lang="en-US" sz="900" dirty="0"/>
+            <a:endParaRPr lang="en-US" sz="1400" dirty="0"/>
           </a:p>
           <a:p>
             <a:pPr indent="0" marL="0">
               <a:spcAft>
-                <a:spcPts val="200"/>
+                <a:spcPts val="100"/>
               </a:spcAft>
               <a:buNone/>
             </a:pPr>
             <a:r>
-              <a:rPr lang="en-US" sz="900" dirty="0">
+              <a:rPr lang="en-US" sz="1400" dirty="0">
                 <a:solidFill>
                   <a:srgbClr val="E8D8A8"/>
                 </a:solidFill>
@@ -9910,17 +9850,17 @@
               </a:rPr>
               <a:t>  • 兩到三聲部 · 英文／拉丁文或混合</a:t>
             </a:r>
-            <a:endParaRPr lang="en-US" sz="900" dirty="0"/>
+            <a:endParaRPr lang="en-US" sz="1400" dirty="0"/>
           </a:p>
           <a:p>
             <a:pPr indent="0" marL="0">
               <a:spcAft>
-                <a:spcPts val="200"/>
+                <a:spcPts val="100"/>
               </a:spcAft>
               <a:buNone/>
             </a:pPr>
             <a:r>
-              <a:rPr lang="en-US" sz="900" dirty="0">
+              <a:rPr lang="en-US" sz="1400" dirty="0">
                 <a:solidFill>
                   <a:srgbClr val="E8D8A8"/>
                 </a:solidFill>
@@ -9930,17 +9870,17 @@
               </a:rPr>
               <a:t>  • 結構：stanzas（詩節）+ burden（副歌）</a:t>
             </a:r>
-            <a:endParaRPr lang="en-US" sz="900" dirty="0"/>
+            <a:endParaRPr lang="en-US" sz="1400" dirty="0"/>
           </a:p>
           <a:p>
             <a:pPr indent="0" marL="0">
               <a:spcAft>
-                <a:spcPts val="200"/>
+                <a:spcPts val="100"/>
               </a:spcAft>
               <a:buNone/>
             </a:pPr>
             <a:r>
-              <a:rPr lang="en-US" sz="900" dirty="0">
+              <a:rPr lang="en-US" sz="1400" dirty="0">
                 <a:solidFill>
                   <a:srgbClr val="E8D8A8"/>
                 </a:solidFill>
@@ -9950,17 +9890,17 @@
               </a:rPr>
               <a:t>  • 多為宗教題材：聖誕節、聖母馬利亞</a:t>
             </a:r>
-            <a:endParaRPr lang="en-US" sz="900" dirty="0"/>
+            <a:endParaRPr lang="en-US" sz="1400" dirty="0"/>
           </a:p>
           <a:p>
             <a:pPr indent="0" marL="0">
               <a:spcAft>
-                <a:spcPts val="200"/>
+                <a:spcPts val="100"/>
               </a:spcAft>
               <a:buNone/>
             </a:pPr>
             <a:r>
-              <a:rPr lang="en-US" sz="900" dirty="0">
+              <a:rPr lang="en-US" sz="1400" dirty="0">
                 <a:solidFill>
                   <a:srgbClr val="E8D8A8"/>
                 </a:solidFill>
@@ -9970,7 +9910,7 @@
               </a:rPr>
               <a:t>  • 例：Alleluia: A newë work (NAWM 32)</a:t>
             </a:r>
-            <a:endParaRPr lang="en-US" sz="900" dirty="0"/>
+            <a:endParaRPr lang="en-US" sz="1400" dirty="0"/>
           </a:p>
         </p:txBody>
       </p:sp>
@@ -10110,7 +10050,7 @@
               <a:buNone/>
             </a:pPr>
             <a:r>
-              <a:rPr lang="en-US" sz="1300" dirty="0">
+              <a:rPr lang="en-US" sz="1400" dirty="0">
                 <a:solidFill>
                   <a:srgbClr val="3A4C38"/>
                 </a:solidFill>
@@ -10120,7 +10060,7 @@
               </a:rPr>
               <a:t>ca. 1390–1453 · 15 世紀最傑出的英格蘭作曲家</a:t>
             </a:r>
-            <a:endParaRPr lang="en-US" sz="1300" dirty="0"/>
+            <a:endParaRPr lang="en-US" sz="1400" dirty="0"/>
           </a:p>
         </p:txBody>
       </p:sp>
@@ -10153,7 +10093,7 @@
         <p:spPr>
           <a:xfrm>
             <a:off x="274320" y="1188720"/>
-            <a:ext cx="4206240" cy="3611880"/>
+            <a:ext cx="4206240" cy="3794760"/>
           </a:xfrm>
           <a:prstGeom prst="rect">
             <a:avLst/>
@@ -10172,24 +10112,24 @@
         </p:nvSpPr>
         <p:spPr>
           <a:xfrm>
-            <a:off x="411480" y="1261872"/>
-            <a:ext cx="3931920" cy="292608"/>
-          </a:xfrm>
-          <a:prstGeom prst="rect">
-            <a:avLst/>
-          </a:prstGeom>
-          <a:noFill/>
-          <a:ln/>
-        </p:spPr>
-        <p:txBody>
-          <a:bodyPr wrap="square" rtlCol="0" anchor="ctr"/>
-          <a:lstStyle/>
-          <a:p>
-            <a:pPr indent="0" marL="0">
-              <a:buNone/>
-            </a:pPr>
-            <a:r>
-              <a:rPr lang="en-US" sz="1200" b="1" dirty="0">
+            <a:off x="411480" y="1280160"/>
+            <a:ext cx="3931920" cy="365760"/>
+          </a:xfrm>
+          <a:prstGeom prst="rect">
+            <a:avLst/>
+          </a:prstGeom>
+          <a:noFill/>
+          <a:ln/>
+        </p:spPr>
+        <p:txBody>
+          <a:bodyPr wrap="square" lIns="0" tIns="0" rIns="0" bIns="0" rtlCol="0" anchor="ctr"/>
+          <a:lstStyle/>
+          <a:p>
+            <a:pPr indent="0" marL="0">
+              <a:buNone/>
+            </a:pPr>
+            <a:r>
+              <a:rPr lang="en-US" sz="1400" b="1" dirty="0">
                 <a:solidFill>
                   <a:srgbClr val="7A2830"/>
                 </a:solidFill>
@@ -10197,9 +10137,9 @@
                 <a:ea typeface="Georgia" pitchFamily="34" charset="-122"/>
                 <a:cs typeface="Georgia" pitchFamily="34" charset="-120"/>
               </a:rPr>
-              <a:t>📖 生平 Biography</a:t>
-            </a:r>
-            <a:endParaRPr lang="en-US" sz="1200" dirty="0"/>
+              <a:t>■ 生平 Biography</a:t>
+            </a:r>
+            <a:endParaRPr lang="en-US" sz="1400" dirty="0"/>
           </a:p>
         </p:txBody>
       </p:sp>
@@ -10211,27 +10151,27 @@
         </p:nvSpPr>
         <p:spPr>
           <a:xfrm>
-            <a:off x="457200" y="1572768"/>
-            <a:ext cx="3977640" cy="3154680"/>
-          </a:xfrm>
-          <a:prstGeom prst="rect">
-            <a:avLst/>
-          </a:prstGeom>
-          <a:noFill/>
-          <a:ln/>
-        </p:spPr>
-        <p:txBody>
-          <a:bodyPr wrap="square" rtlCol="0" anchor="ctr"/>
+            <a:off x="457200" y="1719072"/>
+            <a:ext cx="3977640" cy="3108960"/>
+          </a:xfrm>
+          <a:prstGeom prst="rect">
+            <a:avLst/>
+          </a:prstGeom>
+          <a:noFill/>
+          <a:ln/>
+        </p:spPr>
+        <p:txBody>
+          <a:bodyPr wrap="square" rtlCol="0" anchor="t"/>
           <a:lstStyle/>
           <a:p>
             <a:pPr indent="0" marL="0">
               <a:spcAft>
-                <a:spcPts val="300"/>
+                <a:spcPts val="100"/>
               </a:spcAft>
               <a:buNone/>
             </a:pPr>
             <a:r>
-              <a:rPr lang="en-US" sz="900" dirty="0">
+              <a:rPr lang="en-US" sz="1400" dirty="0">
                 <a:solidFill>
                   <a:srgbClr val="1B2B1F"/>
                 </a:solidFill>
@@ -10241,17 +10181,17 @@
               </a:rPr>
               <a:t>• 同時為數學家、天文學家——回應中世紀四藝（quadrivium）傳統</a:t>
             </a:r>
-            <a:endParaRPr lang="en-US" sz="900" dirty="0"/>
+            <a:endParaRPr lang="en-US" sz="1400" dirty="0"/>
           </a:p>
           <a:p>
             <a:pPr indent="0" marL="0">
               <a:spcAft>
-                <a:spcPts val="300"/>
+                <a:spcPts val="100"/>
               </a:spcAft>
               <a:buNone/>
             </a:pPr>
             <a:r>
-              <a:rPr lang="en-US" sz="900" dirty="0">
+              <a:rPr lang="en-US" sz="1400" dirty="0">
                 <a:solidFill>
                   <a:srgbClr val="1B2B1F"/>
                 </a:solidFill>
@@ -10261,17 +10201,17 @@
               </a:rPr>
               <a:t>• 非神職人員——服侍多位貴族贊助人</a:t>
             </a:r>
-            <a:endParaRPr lang="en-US" sz="900" dirty="0"/>
+            <a:endParaRPr lang="en-US" sz="1400" dirty="0"/>
           </a:p>
           <a:p>
             <a:pPr indent="0" marL="0">
               <a:spcAft>
-                <a:spcPts val="300"/>
+                <a:spcPts val="100"/>
               </a:spcAft>
               <a:buNone/>
             </a:pPr>
             <a:r>
-              <a:rPr lang="en-US" sz="900" dirty="0">
+              <a:rPr lang="en-US" sz="1400" dirty="0">
                 <a:solidFill>
                   <a:srgbClr val="1B2B1F"/>
                 </a:solidFill>
@@ -10281,17 +10221,17 @@
               </a:rPr>
               <a:t>• ca. 1422–1437 服侍 John, Duke of Bedford（攝政法國）</a:t>
             </a:r>
-            <a:endParaRPr lang="en-US" sz="900" dirty="0"/>
+            <a:endParaRPr lang="en-US" sz="1400" dirty="0"/>
           </a:p>
           <a:p>
             <a:pPr indent="0" marL="0">
               <a:spcAft>
-                <a:spcPts val="300"/>
+                <a:spcPts val="100"/>
               </a:spcAft>
               <a:buNone/>
             </a:pPr>
             <a:r>
-              <a:rPr lang="en-US" sz="900" dirty="0">
+              <a:rPr lang="en-US" sz="1400" dirty="0">
                 <a:solidFill>
                   <a:srgbClr val="1B2B1F"/>
                 </a:solidFill>
@@ -10301,17 +10241,17 @@
               </a:rPr>
               <a:t>• 之後服侍 Queen Joan、Humphrey Duke of Gloucester</a:t>
             </a:r>
-            <a:endParaRPr lang="en-US" sz="900" dirty="0"/>
+            <a:endParaRPr lang="en-US" sz="1400" dirty="0"/>
           </a:p>
           <a:p>
             <a:pPr indent="0" marL="0">
               <a:spcAft>
-                <a:spcPts val="300"/>
+                <a:spcPts val="100"/>
               </a:spcAft>
               <a:buNone/>
             </a:pPr>
             <a:r>
-              <a:rPr lang="en-US" sz="900" dirty="0">
+              <a:rPr lang="en-US" sz="1400" dirty="0">
                 <a:solidFill>
                   <a:srgbClr val="1B2B1F"/>
                 </a:solidFill>
@@ -10321,17 +10261,17 @@
               </a:rPr>
               <a:t>• 1437 繼承 Bedford 在法國的部分土地——可能長年居於法國</a:t>
             </a:r>
-            <a:endParaRPr lang="en-US" sz="900" dirty="0"/>
+            <a:endParaRPr lang="en-US" sz="1400" dirty="0"/>
           </a:p>
           <a:p>
             <a:pPr indent="0" marL="0">
               <a:spcAft>
-                <a:spcPts val="300"/>
+                <a:spcPts val="100"/>
               </a:spcAft>
               <a:buNone/>
             </a:pPr>
             <a:r>
-              <a:rPr lang="en-US" sz="900" dirty="0">
+              <a:rPr lang="en-US" sz="1400" dirty="0">
                 <a:solidFill>
                   <a:srgbClr val="1B2B1F"/>
                 </a:solidFill>
@@ -10341,7 +10281,7 @@
               </a:rPr>
               <a:t>• 作品大部分保存在歐陸手稿中——證明其國際影響力</a:t>
             </a:r>
-            <a:endParaRPr lang="en-US" sz="900" dirty="0"/>
+            <a:endParaRPr lang="en-US" sz="1400" dirty="0"/>
           </a:p>
         </p:txBody>
       </p:sp>
@@ -10354,7 +10294,7 @@
         <p:spPr>
           <a:xfrm>
             <a:off x="4663440" y="1188720"/>
-            <a:ext cx="4206240" cy="3611880"/>
+            <a:ext cx="4206240" cy="3794760"/>
           </a:xfrm>
           <a:prstGeom prst="rect">
             <a:avLst/>
@@ -10373,24 +10313,24 @@
         </p:nvSpPr>
         <p:spPr>
           <a:xfrm>
-            <a:off x="4800600" y="1261872"/>
-            <a:ext cx="3931920" cy="292608"/>
-          </a:xfrm>
-          <a:prstGeom prst="rect">
-            <a:avLst/>
-          </a:prstGeom>
-          <a:noFill/>
-          <a:ln/>
-        </p:spPr>
-        <p:txBody>
-          <a:bodyPr wrap="square" rtlCol="0" anchor="ctr"/>
-          <a:lstStyle/>
-          <a:p>
-            <a:pPr indent="0" marL="0">
-              <a:buNone/>
-            </a:pPr>
-            <a:r>
-              <a:rPr lang="en-US" sz="1200" b="1" dirty="0">
+            <a:off x="4800600" y="1280160"/>
+            <a:ext cx="3931920" cy="365760"/>
+          </a:xfrm>
+          <a:prstGeom prst="rect">
+            <a:avLst/>
+          </a:prstGeom>
+          <a:noFill/>
+          <a:ln/>
+        </p:spPr>
+        <p:txBody>
+          <a:bodyPr wrap="square" lIns="0" tIns="0" rIns="0" bIns="0" rtlCol="0" anchor="ctr"/>
+          <a:lstStyle/>
+          <a:p>
+            <a:pPr indent="0" marL="0">
+              <a:buNone/>
+            </a:pPr>
+            <a:r>
+              <a:rPr lang="en-US" sz="1400" b="1" dirty="0">
                 <a:solidFill>
                   <a:srgbClr val="7A2830"/>
                 </a:solidFill>
@@ -10398,9 +10338,9 @@
                 <a:ea typeface="Georgia" pitchFamily="34" charset="-122"/>
                 <a:cs typeface="Georgia" pitchFamily="34" charset="-120"/>
               </a:rPr>
-              <a:t>🎼 主要作品 Major Works</a:t>
-            </a:r>
-            <a:endParaRPr lang="en-US" sz="1200" dirty="0"/>
+              <a:t>■ 主要作品 Major Works</a:t>
+            </a:r>
+            <a:endParaRPr lang="en-US" sz="1400" dirty="0"/>
           </a:p>
         </p:txBody>
       </p:sp>
@@ -10412,27 +10352,27 @@
         </p:nvSpPr>
         <p:spPr>
           <a:xfrm>
-            <a:off x="4846320" y="1572768"/>
-            <a:ext cx="3977640" cy="3154680"/>
-          </a:xfrm>
-          <a:prstGeom prst="rect">
-            <a:avLst/>
-          </a:prstGeom>
-          <a:noFill/>
-          <a:ln/>
-        </p:spPr>
-        <p:txBody>
-          <a:bodyPr wrap="square" rtlCol="0" anchor="ctr"/>
+            <a:off x="4846320" y="1719072"/>
+            <a:ext cx="3977640" cy="3108960"/>
+          </a:xfrm>
+          <a:prstGeom prst="rect">
+            <a:avLst/>
+          </a:prstGeom>
+          <a:noFill/>
+          <a:ln/>
+        </p:spPr>
+        <p:txBody>
+          <a:bodyPr wrap="square" rtlCol="0" anchor="t"/>
           <a:lstStyle/>
           <a:p>
             <a:pPr indent="0" marL="0">
               <a:spcAft>
-                <a:spcPts val="200"/>
+                <a:spcPts val="100"/>
               </a:spcAft>
               <a:buNone/>
             </a:pPr>
             <a:r>
-              <a:rPr lang="en-US" sz="850" dirty="0">
+              <a:rPr lang="en-US" sz="1400" dirty="0">
                 <a:solidFill>
                   <a:srgbClr val="1B2B1F"/>
                 </a:solidFill>
@@ -10440,28 +10380,39 @@
                 <a:ea typeface="Calibri" pitchFamily="34" charset="-122"/>
                 <a:cs typeface="Calibri" pitchFamily="34" charset="-120"/>
               </a:rPr>
-              <a:t>總計約 60 部作品——涵蓋當時所有複音類型：</a:t>
-            </a:r>
-            <a:endParaRPr lang="en-US" sz="850" dirty="0"/>
+              <a:t>涵蓋當時所有複音類型（約 60 部）：</a:t>
+            </a:r>
+            <a:endParaRPr lang="en-US" sz="1400" dirty="0"/>
           </a:p>
           <a:p>
             <a:pPr indent="0" marL="0">
               <a:spcAft>
-                <a:spcPts val="200"/>
+                <a:spcPts val="100"/>
               </a:spcAft>
               <a:buNone/>
             </a:pPr>
-            <a:endParaRPr lang="en-US" sz="850" dirty="0"/>
+            <a:r>
+              <a:rPr lang="en-US" sz="1400" dirty="0">
+                <a:solidFill>
+                  <a:srgbClr val="1B2B1F"/>
+                </a:solidFill>
+                <a:latin typeface="Calibri" pitchFamily="34" charset="0"/>
+                <a:ea typeface="Calibri" pitchFamily="34" charset="-122"/>
+                <a:cs typeface="Calibri" pitchFamily="34" charset="-120"/>
+              </a:rPr>
+              <a:t>• 3 部 polyphonic mass cycles</a:t>
+            </a:r>
+            <a:endParaRPr lang="en-US" sz="1400" dirty="0"/>
           </a:p>
           <a:p>
             <a:pPr indent="0" marL="0">
               <a:spcAft>
-                <a:spcPts val="200"/>
+                <a:spcPts val="100"/>
               </a:spcAft>
               <a:buNone/>
             </a:pPr>
             <a:r>
-              <a:rPr lang="en-US" sz="850" dirty="0">
+              <a:rPr lang="en-US" sz="1400" dirty="0">
                 <a:solidFill>
                   <a:srgbClr val="1B2B1F"/>
                 </a:solidFill>
@@ -10469,19 +10420,19 @@
                 <a:ea typeface="Calibri" pitchFamily="34" charset="-122"/>
                 <a:cs typeface="Calibri" pitchFamily="34" charset="-120"/>
               </a:rPr>
-              <a:t>• 多達 3 部 polyphonic mass cycles</a:t>
-            </a:r>
-            <a:endParaRPr lang="en-US" sz="850" dirty="0"/>
+              <a:t>• 2 組 Gloria-Credo 配對</a:t>
+            </a:r>
+            <a:endParaRPr lang="en-US" sz="1400" dirty="0"/>
           </a:p>
           <a:p>
             <a:pPr indent="0" marL="0">
               <a:spcAft>
-                <a:spcPts val="200"/>
+                <a:spcPts val="100"/>
               </a:spcAft>
               <a:buNone/>
             </a:pPr>
             <a:r>
-              <a:rPr lang="en-US" sz="850" dirty="0">
+              <a:rPr lang="en-US" sz="1400" dirty="0">
                 <a:solidFill>
                   <a:srgbClr val="1B2B1F"/>
                 </a:solidFill>
@@ -10489,19 +10440,19 @@
                 <a:ea typeface="Calibri" pitchFamily="34" charset="-122"/>
                 <a:cs typeface="Calibri" pitchFamily="34" charset="-120"/>
               </a:rPr>
-              <a:t>• 2 組 Gloria-Credo 配對</a:t>
-            </a:r>
-            <a:endParaRPr lang="en-US" sz="850" dirty="0"/>
+              <a:t>• 15 部其他 Mass Ordinary 樂章</a:t>
+            </a:r>
+            <a:endParaRPr lang="en-US" sz="1400" dirty="0"/>
           </a:p>
           <a:p>
             <a:pPr indent="0" marL="0">
               <a:spcAft>
-                <a:spcPts val="200"/>
+                <a:spcPts val="100"/>
               </a:spcAft>
               <a:buNone/>
             </a:pPr>
             <a:r>
-              <a:rPr lang="en-US" sz="850" dirty="0">
+              <a:rPr lang="en-US" sz="1400" dirty="0">
                 <a:solidFill>
                   <a:srgbClr val="1B2B1F"/>
                 </a:solidFill>
@@ -10509,19 +10460,19 @@
                 <a:ea typeface="Calibri" pitchFamily="34" charset="-122"/>
                 <a:cs typeface="Calibri" pitchFamily="34" charset="-120"/>
               </a:rPr>
-              <a:t>• 15 部其他 Mass Ordinary 樂章</a:t>
-            </a:r>
-            <a:endParaRPr lang="en-US" sz="850" dirty="0"/>
+              <a:t>• 12 部 isorhythmic motets</a:t>
+            </a:r>
+            <a:endParaRPr lang="en-US" sz="1400" dirty="0"/>
           </a:p>
           <a:p>
             <a:pPr indent="0" marL="0">
               <a:spcAft>
-                <a:spcPts val="200"/>
+                <a:spcPts val="100"/>
               </a:spcAft>
               <a:buNone/>
             </a:pPr>
             <a:r>
-              <a:rPr lang="en-US" sz="850" dirty="0">
+              <a:rPr lang="en-US" sz="1400" dirty="0">
                 <a:solidFill>
                   <a:srgbClr val="1B2B1F"/>
                 </a:solidFill>
@@ -10529,19 +10480,19 @@
                 <a:ea typeface="Calibri" pitchFamily="34" charset="-122"/>
                 <a:cs typeface="Calibri" pitchFamily="34" charset="-120"/>
               </a:rPr>
-              <a:t>• 12 部 isorhythmic motets</a:t>
-            </a:r>
-            <a:endParaRPr lang="en-US" sz="850" dirty="0"/>
+              <a:t>• 6 部 plainchant settings</a:t>
+            </a:r>
+            <a:endParaRPr lang="en-US" sz="1400" dirty="0"/>
           </a:p>
           <a:p>
             <a:pPr indent="0" marL="0">
               <a:spcAft>
-                <a:spcPts val="200"/>
+                <a:spcPts val="100"/>
               </a:spcAft>
               <a:buNone/>
             </a:pPr>
             <a:r>
-              <a:rPr lang="en-US" sz="850" dirty="0">
+              <a:rPr lang="en-US" sz="1400" dirty="0">
                 <a:solidFill>
                   <a:srgbClr val="1B2B1F"/>
                 </a:solidFill>
@@ -10549,19 +10500,28 @@
                 <a:ea typeface="Calibri" pitchFamily="34" charset="-122"/>
                 <a:cs typeface="Calibri" pitchFamily="34" charset="-120"/>
               </a:rPr>
-              <a:t>• 6 部 plainchant settings</a:t>
-            </a:r>
-            <a:endParaRPr lang="en-US" sz="850" dirty="0"/>
+              <a:t>• 20 部其他拉丁聖樂 · 5 首世俗歌曲</a:t>
+            </a:r>
+            <a:endParaRPr lang="en-US" sz="1400" dirty="0"/>
           </a:p>
           <a:p>
             <a:pPr indent="0" marL="0">
               <a:spcAft>
-                <a:spcPts val="200"/>
+                <a:spcPts val="100"/>
               </a:spcAft>
               <a:buNone/>
             </a:pPr>
-            <a:r>
-              <a:rPr lang="en-US" sz="850" dirty="0">
+            <a:endParaRPr lang="en-US" sz="1400" dirty="0"/>
+          </a:p>
+          <a:p>
+            <a:pPr indent="0" marL="0">
+              <a:spcAft>
+                <a:spcPts val="100"/>
+              </a:spcAft>
+              <a:buNone/>
+            </a:pPr>
+            <a:r>
+              <a:rPr lang="en-US" sz="1400" dirty="0">
                 <a:solidFill>
                   <a:srgbClr val="1B2B1F"/>
                 </a:solidFill>
@@ -10569,19 +10529,19 @@
                 <a:ea typeface="Calibri" pitchFamily="34" charset="-122"/>
                 <a:cs typeface="Calibri" pitchFamily="34" charset="-120"/>
               </a:rPr>
-              <a:t>• 20 部其他拉丁聖樂</a:t>
-            </a:r>
-            <a:endParaRPr lang="en-US" sz="850" dirty="0"/>
+              <a:t>代表作：</a:t>
+            </a:r>
+            <a:endParaRPr lang="en-US" sz="1400" dirty="0"/>
           </a:p>
           <a:p>
             <a:pPr indent="0" marL="0">
               <a:spcAft>
-                <a:spcPts val="200"/>
+                <a:spcPts val="100"/>
               </a:spcAft>
               <a:buNone/>
             </a:pPr>
             <a:r>
-              <a:rPr lang="en-US" sz="850" dirty="0">
+              <a:rPr lang="en-US" sz="1400" dirty="0">
                 <a:solidFill>
                   <a:srgbClr val="1B2B1F"/>
                 </a:solidFill>
@@ -10589,28 +10549,39 @@
                 <a:ea typeface="Calibri" pitchFamily="34" charset="-122"/>
                 <a:cs typeface="Calibri" pitchFamily="34" charset="-120"/>
               </a:rPr>
-              <a:t>• 5 首世俗歌曲</a:t>
-            </a:r>
-            <a:endParaRPr lang="en-US" sz="850" dirty="0"/>
+              <a:t>• Quam pulchra es (NAWM 33)</a:t>
+            </a:r>
+            <a:endParaRPr lang="en-US" sz="1400" dirty="0"/>
           </a:p>
           <a:p>
             <a:pPr indent="0" marL="0">
               <a:spcAft>
-                <a:spcPts val="200"/>
+                <a:spcPts val="100"/>
               </a:spcAft>
               <a:buNone/>
             </a:pPr>
-            <a:endParaRPr lang="en-US" sz="850" dirty="0"/>
+            <a:r>
+              <a:rPr lang="en-US" sz="1400" dirty="0">
+                <a:solidFill>
+                  <a:srgbClr val="1B2B1F"/>
+                </a:solidFill>
+                <a:latin typeface="Calibri" pitchFamily="34" charset="0"/>
+                <a:ea typeface="Calibri" pitchFamily="34" charset="-122"/>
+                <a:cs typeface="Calibri" pitchFamily="34" charset="-120"/>
+              </a:rPr>
+              <a:t>  自由創作、文字清晰、自然節奏</a:t>
+            </a:r>
+            <a:endParaRPr lang="en-US" sz="1400" dirty="0"/>
           </a:p>
           <a:p>
             <a:pPr indent="0" marL="0">
               <a:spcAft>
-                <a:spcPts val="200"/>
+                <a:spcPts val="100"/>
               </a:spcAft>
               <a:buNone/>
             </a:pPr>
             <a:r>
-              <a:rPr lang="en-US" sz="850" dirty="0">
+              <a:rPr lang="en-US" sz="1400" dirty="0">
                 <a:solidFill>
                   <a:srgbClr val="1B2B1F"/>
                 </a:solidFill>
@@ -10618,89 +10589,9 @@
                 <a:ea typeface="Calibri" pitchFamily="34" charset="-122"/>
                 <a:cs typeface="Calibri" pitchFamily="34" charset="-120"/>
               </a:rPr>
-              <a:t>代表作：</a:t>
-            </a:r>
-            <a:endParaRPr lang="en-US" sz="850" dirty="0"/>
-          </a:p>
-          <a:p>
-            <a:pPr indent="0" marL="0">
-              <a:spcAft>
-                <a:spcPts val="200"/>
-              </a:spcAft>
-              <a:buNone/>
-            </a:pPr>
-            <a:r>
-              <a:rPr lang="en-US" sz="850" dirty="0">
-                <a:solidFill>
-                  <a:srgbClr val="1B2B1F"/>
-                </a:solidFill>
-                <a:latin typeface="Calibri" pitchFamily="34" charset="0"/>
-                <a:ea typeface="Calibri" pitchFamily="34" charset="-122"/>
-                <a:cs typeface="Calibri" pitchFamily="34" charset="-120"/>
-              </a:rPr>
-              <a:t>• Quam pulchra es (NAWM 33)</a:t>
-            </a:r>
-            <a:endParaRPr lang="en-US" sz="850" dirty="0"/>
-          </a:p>
-          <a:p>
-            <a:pPr indent="0" marL="0">
-              <a:spcAft>
-                <a:spcPts val="200"/>
-              </a:spcAft>
-              <a:buNone/>
-            </a:pPr>
-            <a:r>
-              <a:rPr lang="en-US" sz="850" dirty="0">
-                <a:solidFill>
-                  <a:srgbClr val="1B2B1F"/>
-                </a:solidFill>
-                <a:latin typeface="Calibri" pitchFamily="34" charset="0"/>
-                <a:ea typeface="Calibri" pitchFamily="34" charset="-122"/>
-                <a:cs typeface="Calibri" pitchFamily="34" charset="-120"/>
-              </a:rPr>
-              <a:t>  自由創作、文字宣告清晰、自然節奏</a:t>
-            </a:r>
-            <a:endParaRPr lang="en-US" sz="850" dirty="0"/>
-          </a:p>
-          <a:p>
-            <a:pPr indent="0" marL="0">
-              <a:spcAft>
-                <a:spcPts val="200"/>
-              </a:spcAft>
-              <a:buNone/>
-            </a:pPr>
-            <a:r>
-              <a:rPr lang="en-US" sz="850" dirty="0">
-                <a:solidFill>
-                  <a:srgbClr val="1B2B1F"/>
-                </a:solidFill>
-                <a:latin typeface="Calibri" pitchFamily="34" charset="0"/>
-                <a:ea typeface="Calibri" pitchFamily="34" charset="-122"/>
-                <a:cs typeface="Calibri" pitchFamily="34" charset="-120"/>
-              </a:rPr>
-              <a:t>• Regina caeli laetare</a:t>
-            </a:r>
-            <a:endParaRPr lang="en-US" sz="850" dirty="0"/>
-          </a:p>
-          <a:p>
-            <a:pPr indent="0" marL="0">
-              <a:spcAft>
-                <a:spcPts val="200"/>
-              </a:spcAft>
-              <a:buNone/>
-            </a:pPr>
-            <a:r>
-              <a:rPr lang="en-US" sz="850" dirty="0">
-                <a:solidFill>
-                  <a:srgbClr val="1B2B1F"/>
-                </a:solidFill>
-                <a:latin typeface="Calibri" pitchFamily="34" charset="0"/>
-                <a:ea typeface="Calibri" pitchFamily="34" charset="-122"/>
-                <a:cs typeface="Calibri" pitchFamily="34" charset="-120"/>
-              </a:rPr>
-              <a:t>  cantus 中使用 paraphrase——chant 旋律華麗化</a:t>
-            </a:r>
-            <a:endParaRPr lang="en-US" sz="850" dirty="0"/>
+              <a:t>• Regina caeli laetare — cantus paraphrase</a:t>
+            </a:r>
+            <a:endParaRPr lang="en-US" sz="1400" dirty="0"/>
           </a:p>
         </p:txBody>
       </p:sp>
@@ -10840,7 +10731,7 @@
               <a:buNone/>
             </a:pPr>
             <a:r>
-              <a:rPr lang="en-US" sz="1300" dirty="0">
+              <a:rPr lang="en-US" sz="1400" dirty="0">
                 <a:solidFill>
                   <a:srgbClr val="E8D8A8"/>
                 </a:solidFill>
@@ -10850,7 +10741,7 @@
               </a:rPr>
               <a:t>Martin Le Franc · Le champion des dames (1440–42)</a:t>
             </a:r>
-            <a:endParaRPr lang="en-US" sz="1300" dirty="0"/>
+            <a:endParaRPr lang="en-US" sz="1400" dirty="0"/>
           </a:p>
         </p:txBody>
       </p:sp>
@@ -10903,23 +10794,23 @@
         <p:spPr>
           <a:xfrm>
             <a:off x="411480" y="1261872"/>
-            <a:ext cx="8321040" cy="292608"/>
-          </a:xfrm>
-          <a:prstGeom prst="rect">
-            <a:avLst/>
-          </a:prstGeom>
-          <a:noFill/>
-          <a:ln/>
-        </p:spPr>
-        <p:txBody>
-          <a:bodyPr wrap="square" rtlCol="0" anchor="ctr"/>
-          <a:lstStyle/>
-          <a:p>
-            <a:pPr indent="0" marL="0">
-              <a:buNone/>
-            </a:pPr>
-            <a:r>
-              <a:rPr lang="en-US" sz="1200" b="1" dirty="0">
+            <a:ext cx="8321040" cy="365760"/>
+          </a:xfrm>
+          <a:prstGeom prst="rect">
+            <a:avLst/>
+          </a:prstGeom>
+          <a:noFill/>
+          <a:ln/>
+        </p:spPr>
+        <p:txBody>
+          <a:bodyPr wrap="square" lIns="0" tIns="0" rIns="0" bIns="0" rtlCol="0" anchor="ctr"/>
+          <a:lstStyle/>
+          <a:p>
+            <a:pPr indent="0" marL="0">
+              <a:buNone/>
+            </a:pPr>
+            <a:r>
+              <a:rPr lang="en-US" sz="1400" b="1" dirty="0">
                 <a:solidFill>
                   <a:srgbClr val="C8A020"/>
                 </a:solidFill>
@@ -10927,9 +10818,9 @@
                 <a:ea typeface="Georgia" pitchFamily="34" charset="-122"/>
                 <a:cs typeface="Georgia" pitchFamily="34" charset="-120"/>
               </a:rPr>
-              <a:t>📜 Le Franc 原詩意譯（1440–42）</a:t>
-            </a:r>
-            <a:endParaRPr lang="en-US" sz="1200" dirty="0"/>
+              <a:t>■ Le Franc 原詩意譯（1440–42）</a:t>
+            </a:r>
+            <a:endParaRPr lang="en-US" sz="1400" dirty="0"/>
           </a:p>
         </p:txBody>
       </p:sp>
@@ -10958,7 +10849,7 @@
               <a:buNone/>
             </a:pPr>
             <a:r>
-              <a:rPr lang="en-US" sz="1100" i="1" dirty="0">
+              <a:rPr lang="en-US" sz="1400" i="1" dirty="0">
                 <a:solidFill>
                   <a:srgbClr val="E8D8A8"/>
                 </a:solidFill>
@@ -10968,14 +10859,14 @@
               </a:rPr>
               <a:t>「Du Fay 與 Binchois 有一種新的實踐方式——在高音與低音中</a:t>
             </a:r>
-            <a:endParaRPr lang="en-US" sz="1100" dirty="0"/>
+            <a:endParaRPr lang="en-US" sz="1400" dirty="0"/>
           </a:p>
           <a:p>
             <a:pPr algn="ctr" indent="0" marL="0">
               <a:buNone/>
             </a:pPr>
             <a:r>
-              <a:rPr lang="en-US" sz="1100" i="1" dirty="0">
+              <a:rPr lang="en-US" sz="1400" i="1" dirty="0">
                 <a:solidFill>
                   <a:srgbClr val="E8D8A8"/>
                 </a:solidFill>
@@ -10985,14 +10876,14 @@
               </a:rPr>
               <a:t>創造活潑的協和。他們採取了英格蘭人的風韻（contenance angloise），</a:t>
             </a:r>
-            <a:endParaRPr lang="en-US" sz="1100" dirty="0"/>
+            <a:endParaRPr lang="en-US" sz="1400" dirty="0"/>
           </a:p>
           <a:p>
             <a:pPr algn="ctr" indent="0" marL="0">
               <a:buNone/>
             </a:pPr>
             <a:r>
-              <a:rPr lang="en-US" sz="1100" i="1" dirty="0">
+              <a:rPr lang="en-US" sz="1400" i="1" dirty="0">
                 <a:solidFill>
                   <a:srgbClr val="E8D8A8"/>
                 </a:solidFill>
@@ -11002,7 +10893,7 @@
               </a:rPr>
               <a:t>並追隨 Dunstable——這賦予他們的音樂奇妙的愉悅感。」</a:t>
             </a:r>
-            <a:endParaRPr lang="en-US" sz="1100" dirty="0"/>
+            <a:endParaRPr lang="en-US" sz="1400" dirty="0"/>
           </a:p>
         </p:txBody>
       </p:sp>
@@ -11034,24 +10925,24 @@
         </p:nvSpPr>
         <p:spPr>
           <a:xfrm>
-            <a:off x="411480" y="2907792"/>
-            <a:ext cx="8321040" cy="292608"/>
-          </a:xfrm>
-          <a:prstGeom prst="rect">
-            <a:avLst/>
-          </a:prstGeom>
-          <a:noFill/>
-          <a:ln/>
-        </p:spPr>
-        <p:txBody>
-          <a:bodyPr wrap="square" rtlCol="0" anchor="ctr"/>
-          <a:lstStyle/>
-          <a:p>
-            <a:pPr indent="0" marL="0">
-              <a:buNone/>
-            </a:pPr>
-            <a:r>
-              <a:rPr lang="en-US" sz="1200" b="1" dirty="0">
+            <a:off x="411480" y="2926080"/>
+            <a:ext cx="8321040" cy="365760"/>
+          </a:xfrm>
+          <a:prstGeom prst="rect">
+            <a:avLst/>
+          </a:prstGeom>
+          <a:noFill/>
+          <a:ln/>
+        </p:spPr>
+        <p:txBody>
+          <a:bodyPr wrap="square" lIns="0" tIns="0" rIns="0" bIns="0" rtlCol="0" anchor="ctr"/>
+          <a:lstStyle/>
+          <a:p>
+            <a:pPr indent="0" marL="0">
+              <a:buNone/>
+            </a:pPr>
+            <a:r>
+              <a:rPr lang="en-US" sz="1400" b="1" dirty="0">
                 <a:solidFill>
                   <a:srgbClr val="C8A020"/>
                 </a:solidFill>
@@ -11059,9 +10950,9 @@
                 <a:ea typeface="Georgia" pitchFamily="34" charset="-122"/>
                 <a:cs typeface="Georgia" pitchFamily="34" charset="-120"/>
               </a:rPr>
-              <a:t>🎵 英式風韻的音樂特徵 Musical Features</a:t>
-            </a:r>
-            <a:endParaRPr lang="en-US" sz="1200" dirty="0"/>
+              <a:t>■ 英式風韻的音樂特徵 Musical Features</a:t>
+            </a:r>
+            <a:endParaRPr lang="en-US" sz="1400" dirty="0"/>
           </a:p>
         </p:txBody>
       </p:sp>
@@ -11073,27 +10964,27 @@
         </p:nvSpPr>
         <p:spPr>
           <a:xfrm>
-            <a:off x="457200" y="3218688"/>
-            <a:ext cx="8229600" cy="1554480"/>
-          </a:xfrm>
-          <a:prstGeom prst="rect">
-            <a:avLst/>
-          </a:prstGeom>
-          <a:noFill/>
-          <a:ln/>
-        </p:spPr>
-        <p:txBody>
-          <a:bodyPr wrap="square" rtlCol="0" anchor="ctr"/>
+            <a:off x="457200" y="3364992"/>
+            <a:ext cx="8229600" cy="1417320"/>
+          </a:xfrm>
+          <a:prstGeom prst="rect">
+            <a:avLst/>
+          </a:prstGeom>
+          <a:noFill/>
+          <a:ln/>
+        </p:spPr>
+        <p:txBody>
+          <a:bodyPr wrap="square" rtlCol="0" anchor="t"/>
           <a:lstStyle/>
           <a:p>
             <a:pPr indent="0" marL="0">
               <a:spcAft>
-                <a:spcPts val="200"/>
+                <a:spcPts val="100"/>
               </a:spcAft>
               <a:buNone/>
             </a:pPr>
             <a:r>
-              <a:rPr lang="en-US" sz="900" dirty="0">
+              <a:rPr lang="en-US" sz="1400" dirty="0">
                 <a:solidFill>
                   <a:srgbClr val="E8D8A8"/>
                 </a:solidFill>
@@ -11103,17 +10994,17 @@
               </a:rPr>
               <a:t>• 頻繁使用和聲三度與六度——常以平行進行呈現</a:t>
             </a:r>
-            <a:endParaRPr lang="en-US" sz="900" dirty="0"/>
+            <a:endParaRPr lang="en-US" sz="1400" dirty="0"/>
           </a:p>
           <a:p>
             <a:pPr indent="0" marL="0">
               <a:spcAft>
-                <a:spcPts val="200"/>
+                <a:spcPts val="100"/>
               </a:spcAft>
               <a:buNone/>
             </a:pPr>
             <a:r>
-              <a:rPr lang="en-US" sz="900" dirty="0">
+              <a:rPr lang="en-US" sz="1400" dirty="0">
                 <a:solidFill>
                   <a:srgbClr val="E8D8A8"/>
                 </a:solidFill>
@@ -11121,19 +11012,19 @@
                 <a:ea typeface="Calibri" pitchFamily="34" charset="-122"/>
                 <a:cs typeface="Calibri" pitchFamily="34" charset="-120"/>
               </a:rPr>
-              <a:t>• 徹底的協和——極少不協和（僅允許嚴格控制的經過音與留音）</a:t>
-            </a:r>
-            <a:endParaRPr lang="en-US" sz="900" dirty="0"/>
+              <a:t>• 徹底的協和——極少不協和（僅允許經過音與留音）</a:t>
+            </a:r>
+            <a:endParaRPr lang="en-US" sz="1400" dirty="0"/>
           </a:p>
           <a:p>
             <a:pPr indent="0" marL="0">
               <a:spcAft>
-                <a:spcPts val="200"/>
+                <a:spcPts val="100"/>
               </a:spcAft>
               <a:buNone/>
             </a:pPr>
             <a:r>
-              <a:rPr lang="en-US" sz="900" dirty="0">
+              <a:rPr lang="en-US" sz="1400" dirty="0">
                 <a:solidFill>
                   <a:srgbClr val="E8D8A8"/>
                 </a:solidFill>
@@ -11143,17 +11034,17 @@
               </a:rPr>
               <a:t>• 避免平行五度與八度（中世紀複音常見）</a:t>
             </a:r>
-            <a:endParaRPr lang="en-US" sz="900" dirty="0"/>
+            <a:endParaRPr lang="en-US" sz="1400" dirty="0"/>
           </a:p>
           <a:p>
             <a:pPr indent="0" marL="0">
               <a:spcAft>
-                <a:spcPts val="200"/>
+                <a:spcPts val="100"/>
               </a:spcAft>
               <a:buNone/>
             </a:pPr>
             <a:r>
-              <a:rPr lang="en-US" sz="900" dirty="0">
+              <a:rPr lang="en-US" sz="1400" dirty="0">
                 <a:solidFill>
                   <a:srgbClr val="E8D8A8"/>
                 </a:solidFill>
@@ -11161,19 +11052,19 @@
                 <a:ea typeface="Calibri" pitchFamily="34" charset="-122"/>
                 <a:cs typeface="Calibri" pitchFamily="34" charset="-120"/>
               </a:rPr>
-              <a:t>• 同節奏織度（homorhythmic）——所有聲部節奏相似</a:t>
-            </a:r>
-            <a:endParaRPr lang="en-US" sz="900" dirty="0"/>
+              <a:t>• 同節奏織度（homorhythmic）——各聲部節奏相似</a:t>
+            </a:r>
+            <a:endParaRPr lang="en-US" sz="1400" dirty="0"/>
           </a:p>
           <a:p>
             <a:pPr indent="0" marL="0">
               <a:spcAft>
-                <a:spcPts val="200"/>
+                <a:spcPts val="100"/>
               </a:spcAft>
               <a:buNone/>
             </a:pPr>
             <a:r>
-              <a:rPr lang="en-US" sz="900" dirty="0">
+              <a:rPr lang="en-US" sz="1400" dirty="0">
                 <a:solidFill>
                   <a:srgbClr val="E8D8A8"/>
                 </a:solidFill>
@@ -11181,19 +11072,19 @@
                 <a:ea typeface="Calibri" pitchFamily="34" charset="-122"/>
                 <a:cs typeface="Calibri" pitchFamily="34" charset="-120"/>
               </a:rPr>
-              <a:t>• 簡單、優美、可歌的旋律線條</a:t>
-            </a:r>
-            <a:endParaRPr lang="en-US" sz="900" dirty="0"/>
+              <a:t>• 簡單、優美、可歌的旋律線條 · 清晰音節宣告</a:t>
+            </a:r>
+            <a:endParaRPr lang="en-US" sz="1400" dirty="0"/>
           </a:p>
           <a:p>
             <a:pPr indent="0" marL="0">
               <a:spcAft>
-                <a:spcPts val="200"/>
+                <a:spcPts val="100"/>
               </a:spcAft>
               <a:buNone/>
             </a:pPr>
             <a:r>
-              <a:rPr lang="en-US" sz="900" dirty="0">
+              <a:rPr lang="en-US" sz="1400" dirty="0">
                 <a:solidFill>
                   <a:srgbClr val="E8D8A8"/>
                 </a:solidFill>
@@ -11201,49 +11092,9 @@
                 <a:ea typeface="Calibri" pitchFamily="34" charset="-122"/>
                 <a:cs typeface="Calibri" pitchFamily="34" charset="-120"/>
               </a:rPr>
-              <a:t>• 清晰的音節宣告 · 規則樂句結構</a:t>
-            </a:r>
-            <a:endParaRPr lang="en-US" sz="900" dirty="0"/>
-          </a:p>
-          <a:p>
-            <a:pPr indent="0" marL="0">
-              <a:spcAft>
-                <a:spcPts val="200"/>
-              </a:spcAft>
-              <a:buNone/>
-            </a:pPr>
-            <a:r>
-              <a:rPr lang="en-US" sz="900" dirty="0">
-                <a:solidFill>
-                  <a:srgbClr val="E8D8A8"/>
-                </a:solidFill>
-                <a:latin typeface="Calibri" pitchFamily="34" charset="0"/>
-                <a:ea typeface="Calibri" pitchFamily="34" charset="-122"/>
-                <a:cs typeface="Calibri" pitchFamily="34" charset="-120"/>
-              </a:rPr>
-              <a:t>• 這些特徵融入 Binchois、Du Fay 的作品中——成為 15 世紀國際風格的核心</a:t>
-            </a:r>
-            <a:endParaRPr lang="en-US" sz="900" dirty="0"/>
-          </a:p>
-          <a:p>
-            <a:pPr indent="0" marL="0">
-              <a:spcAft>
-                <a:spcPts val="200"/>
-              </a:spcAft>
-              <a:buNone/>
-            </a:pPr>
-            <a:r>
-              <a:rPr lang="en-US" sz="900" dirty="0">
-                <a:solidFill>
-                  <a:srgbClr val="E8D8A8"/>
-                </a:solidFill>
-                <a:latin typeface="Calibri" pitchFamily="34" charset="0"/>
-                <a:ea typeface="Calibri" pitchFamily="34" charset="-122"/>
-                <a:cs typeface="Calibri" pitchFamily="34" charset="-120"/>
-              </a:rPr>
-              <a:t>  These traits became the foundation of the mid-15th century international style</a:t>
-            </a:r>
-            <a:endParaRPr lang="en-US" sz="900" dirty="0"/>
+              <a:t>• 成為 15 世紀國際風格的核心 — foundation of mid-15c international style</a:t>
+            </a:r>
+            <a:endParaRPr lang="en-US" sz="1400" dirty="0"/>
           </a:p>
         </p:txBody>
       </p:sp>
@@ -11383,7 +11234,7 @@
               <a:buNone/>
             </a:pPr>
             <a:r>
-              <a:rPr lang="en-US" sz="1300" dirty="0">
+              <a:rPr lang="en-US" sz="1400" dirty="0">
                 <a:solidFill>
                   <a:srgbClr val="3A4C38"/>
                 </a:solidFill>
@@ -11393,7 +11244,7 @@
               </a:rPr>
               <a:t>Europe's Foremost Center of Music · ca. 1400–1477</a:t>
             </a:r>
-            <a:endParaRPr lang="en-US" sz="1300" dirty="0"/>
+            <a:endParaRPr lang="en-US" sz="1400" dirty="0"/>
           </a:p>
         </p:txBody>
       </p:sp>
@@ -11426,7 +11277,7 @@
         <p:spPr>
           <a:xfrm>
             <a:off x="274320" y="1188720"/>
-            <a:ext cx="4206240" cy="3611880"/>
+            <a:ext cx="4206240" cy="3794760"/>
           </a:xfrm>
           <a:prstGeom prst="rect">
             <a:avLst/>
@@ -11446,23 +11297,23 @@
         <p:spPr>
           <a:xfrm>
             <a:off x="411480" y="1261872"/>
-            <a:ext cx="3931920" cy="292608"/>
-          </a:xfrm>
-          <a:prstGeom prst="rect">
-            <a:avLst/>
-          </a:prstGeom>
-          <a:noFill/>
-          <a:ln/>
-        </p:spPr>
-        <p:txBody>
-          <a:bodyPr wrap="square" rtlCol="0" anchor="ctr"/>
-          <a:lstStyle/>
-          <a:p>
-            <a:pPr indent="0" marL="0">
-              <a:buNone/>
-            </a:pPr>
-            <a:r>
-              <a:rPr lang="en-US" sz="1200" b="1" dirty="0">
+            <a:ext cx="3931920" cy="365760"/>
+          </a:xfrm>
+          <a:prstGeom prst="rect">
+            <a:avLst/>
+          </a:prstGeom>
+          <a:noFill/>
+          <a:ln/>
+        </p:spPr>
+        <p:txBody>
+          <a:bodyPr wrap="square" lIns="0" tIns="0" rIns="0" bIns="0" rtlCol="0" anchor="ctr"/>
+          <a:lstStyle/>
+          <a:p>
+            <a:pPr indent="0" marL="0">
+              <a:buNone/>
+            </a:pPr>
+            <a:r>
+              <a:rPr lang="en-US" sz="1400" b="1" dirty="0">
                 <a:solidFill>
                   <a:srgbClr val="2E5A3A"/>
                 </a:solidFill>
@@ -11470,9 +11321,9 @@
                 <a:ea typeface="Georgia" pitchFamily="34" charset="-122"/>
                 <a:cs typeface="Georgia" pitchFamily="34" charset="-120"/>
               </a:rPr>
-              <a:t>🗺 The Duchy 公國領地</a:t>
-            </a:r>
-            <a:endParaRPr lang="en-US" sz="1200" dirty="0"/>
+              <a:t>■ The Duchy 公國領地</a:t>
+            </a:r>
+            <a:endParaRPr lang="en-US" sz="1400" dirty="0"/>
           </a:p>
         </p:txBody>
       </p:sp>
@@ -11484,27 +11335,27 @@
         </p:nvSpPr>
         <p:spPr>
           <a:xfrm>
-            <a:off x="457200" y="1572768"/>
-            <a:ext cx="3977640" cy="3154680"/>
-          </a:xfrm>
-          <a:prstGeom prst="rect">
-            <a:avLst/>
-          </a:prstGeom>
-          <a:noFill/>
-          <a:ln/>
-        </p:spPr>
-        <p:txBody>
-          <a:bodyPr wrap="square" rtlCol="0" anchor="ctr"/>
+            <a:off x="457200" y="1719072"/>
+            <a:ext cx="3977640" cy="3246120"/>
+          </a:xfrm>
+          <a:prstGeom prst="rect">
+            <a:avLst/>
+          </a:prstGeom>
+          <a:noFill/>
+          <a:ln/>
+        </p:spPr>
+        <p:txBody>
+          <a:bodyPr wrap="square" rtlCol="0" anchor="t"/>
           <a:lstStyle/>
           <a:p>
             <a:pPr indent="0" marL="0">
               <a:spcAft>
-                <a:spcPts val="200"/>
+                <a:spcPts val="100"/>
               </a:spcAft>
               <a:buNone/>
             </a:pPr>
             <a:r>
-              <a:rPr lang="en-US" sz="850" dirty="0">
+              <a:rPr lang="en-US" sz="1400" dirty="0">
                 <a:solidFill>
                   <a:srgbClr val="1B2B1F"/>
                 </a:solidFill>
@@ -11512,19 +11363,19 @@
                 <a:ea typeface="Calibri" pitchFamily="34" charset="-122"/>
                 <a:cs typeface="Calibri" pitchFamily="34" charset="-120"/>
               </a:rPr>
-              <a:t>• 名義上為法王的封臣，實際幾乎與法王平起平坐</a:t>
-            </a:r>
-            <a:endParaRPr lang="en-US" sz="850" dirty="0"/>
+              <a:t>• 名義上為法王封臣，實際幾與法王平起平坐</a:t>
+            </a:r>
+            <a:endParaRPr lang="en-US" sz="1400" dirty="0"/>
           </a:p>
           <a:p>
             <a:pPr indent="0" marL="0">
               <a:spcAft>
-                <a:spcPts val="200"/>
+                <a:spcPts val="100"/>
               </a:spcAft>
               <a:buNone/>
             </a:pPr>
             <a:r>
-              <a:rPr lang="en-US" sz="850" dirty="0">
+              <a:rPr lang="en-US" sz="1400" dirty="0">
                 <a:solidFill>
                   <a:srgbClr val="1B2B1F"/>
                 </a:solidFill>
@@ -11532,19 +11383,19 @@
                 <a:ea typeface="Calibri" pitchFamily="34" charset="-122"/>
                 <a:cs typeface="Calibri" pitchFamily="34" charset="-120"/>
               </a:rPr>
-              <a:t>• 原始封地：Burgundy（東法國）</a:t>
-            </a:r>
-            <a:endParaRPr lang="en-US" sz="850" dirty="0"/>
+              <a:t>• 封地：Burgundy、荷蘭、比利時、東北法國、盧森堡、洛林</a:t>
+            </a:r>
+            <a:endParaRPr lang="en-US" sz="1400" dirty="0"/>
           </a:p>
           <a:p>
             <a:pPr indent="0" marL="0">
               <a:spcAft>
-                <a:spcPts val="200"/>
+                <a:spcPts val="100"/>
               </a:spcAft>
               <a:buNone/>
             </a:pPr>
             <a:r>
-              <a:rPr lang="en-US" sz="850" dirty="0">
+              <a:rPr lang="en-US" sz="1400" dirty="0">
                 <a:solidFill>
                   <a:srgbClr val="1B2B1F"/>
                 </a:solidFill>
@@ -11552,19 +11403,19 @@
                 <a:ea typeface="Calibri" pitchFamily="34" charset="-122"/>
                 <a:cs typeface="Calibri" pitchFamily="34" charset="-120"/>
               </a:rPr>
-              <a:t>• 擴張至：荷蘭、比利時、東北法國、盧森堡、洛林</a:t>
-            </a:r>
-            <a:endParaRPr lang="en-US" sz="850" dirty="0"/>
+              <a:t>• 重心城市：Lille、Bruges、Ghent、Brussels</a:t>
+            </a:r>
+            <a:endParaRPr lang="en-US" sz="1400" dirty="0"/>
           </a:p>
           <a:p>
             <a:pPr indent="0" marL="0">
               <a:spcAft>
-                <a:spcPts val="200"/>
+                <a:spcPts val="100"/>
               </a:spcAft>
               <a:buNone/>
             </a:pPr>
             <a:r>
-              <a:rPr lang="en-US" sz="850" dirty="0">
+              <a:rPr lang="en-US" sz="1400" dirty="0">
                 <a:solidFill>
                   <a:srgbClr val="1B2B1F"/>
                 </a:solidFill>
@@ -11572,19 +11423,19 @@
                 <a:ea typeface="Calibri" pitchFamily="34" charset="-122"/>
                 <a:cs typeface="Calibri" pitchFamily="34" charset="-120"/>
               </a:rPr>
-              <a:t>• 首都名義上是 Dijon，但 15 世紀中期重心在 Lille、Bruges、Ghent、Brussels</a:t>
-            </a:r>
-            <a:endParaRPr lang="en-US" sz="850" dirty="0"/>
+              <a:t>• 1419–35 與英格蘭結盟對抗法王</a:t>
+            </a:r>
+            <a:endParaRPr lang="en-US" sz="1400" dirty="0"/>
           </a:p>
           <a:p>
             <a:pPr indent="0" marL="0">
               <a:spcAft>
-                <a:spcPts val="200"/>
+                <a:spcPts val="100"/>
               </a:spcAft>
               <a:buNone/>
             </a:pPr>
             <a:r>
-              <a:rPr lang="en-US" sz="850" dirty="0">
+              <a:rPr lang="en-US" sz="1400" dirty="0">
                 <a:solidFill>
                   <a:srgbClr val="1B2B1F"/>
                 </a:solidFill>
@@ -11592,19 +11443,28 @@
                 <a:ea typeface="Calibri" pitchFamily="34" charset="-122"/>
                 <a:cs typeface="Calibri" pitchFamily="34" charset="-120"/>
               </a:rPr>
-              <a:t>• 1419–35 與英格蘭結盟對抗法王</a:t>
-            </a:r>
-            <a:endParaRPr lang="en-US" sz="850" dirty="0"/>
+              <a:t>• 1477 Charles the Bold 戰死 → 法國吸收勃艮第</a:t>
+            </a:r>
+            <a:endParaRPr lang="en-US" sz="1400" dirty="0"/>
           </a:p>
           <a:p>
             <a:pPr indent="0" marL="0">
               <a:spcAft>
-                <a:spcPts val="200"/>
+                <a:spcPts val="100"/>
               </a:spcAft>
               <a:buNone/>
             </a:pPr>
-            <a:r>
-              <a:rPr lang="en-US" sz="850" dirty="0">
+            <a:endParaRPr lang="en-US" sz="1400" dirty="0"/>
+          </a:p>
+          <a:p>
+            <a:pPr indent="0" marL="0">
+              <a:spcAft>
+                <a:spcPts val="100"/>
+              </a:spcAft>
+              <a:buNone/>
+            </a:pPr>
+            <a:r>
+              <a:rPr lang="en-US" sz="1400" dirty="0">
                 <a:solidFill>
                   <a:srgbClr val="1B2B1F"/>
                 </a:solidFill>
@@ -11612,28 +11472,39 @@
                 <a:ea typeface="Calibri" pitchFamily="34" charset="-122"/>
                 <a:cs typeface="Calibri" pitchFamily="34" charset="-120"/>
               </a:rPr>
-              <a:t>• 1477 Charles the Bold 戰死——法國吸收勃艮第公國，低地諸省由其女 Mary 繼承</a:t>
-            </a:r>
-            <a:endParaRPr lang="en-US" sz="850" dirty="0"/>
+              <a:t>四位主要公爵：</a:t>
+            </a:r>
+            <a:endParaRPr lang="en-US" sz="1400" dirty="0"/>
           </a:p>
           <a:p>
             <a:pPr indent="0" marL="0">
               <a:spcAft>
-                <a:spcPts val="200"/>
+                <a:spcPts val="100"/>
               </a:spcAft>
               <a:buNone/>
             </a:pPr>
-            <a:endParaRPr lang="en-US" sz="850" dirty="0"/>
+            <a:r>
+              <a:rPr lang="en-US" sz="1400" dirty="0">
+                <a:solidFill>
+                  <a:srgbClr val="1B2B1F"/>
+                </a:solidFill>
+                <a:latin typeface="Calibri" pitchFamily="34" charset="0"/>
+                <a:ea typeface="Calibri" pitchFamily="34" charset="-122"/>
+                <a:cs typeface="Calibri" pitchFamily="34" charset="-120"/>
+              </a:rPr>
+              <a:t>• Philip the Bold (1363–1404) 建立禮拜堂</a:t>
+            </a:r>
+            <a:endParaRPr lang="en-US" sz="1400" dirty="0"/>
           </a:p>
           <a:p>
             <a:pPr indent="0" marL="0">
               <a:spcAft>
-                <a:spcPts val="200"/>
+                <a:spcPts val="100"/>
               </a:spcAft>
               <a:buNone/>
             </a:pPr>
             <a:r>
-              <a:rPr lang="en-US" sz="850" dirty="0">
+              <a:rPr lang="en-US" sz="1400" dirty="0">
                 <a:solidFill>
                   <a:srgbClr val="1B2B1F"/>
                 </a:solidFill>
@@ -11641,19 +11512,19 @@
                 <a:ea typeface="Calibri" pitchFamily="34" charset="-122"/>
                 <a:cs typeface="Calibri" pitchFamily="34" charset="-120"/>
               </a:rPr>
-              <a:t>四位主要公爵：</a:t>
-            </a:r>
-            <a:endParaRPr lang="en-US" sz="850" dirty="0"/>
+              <a:t>• John the Fearless (1404–19)</a:t>
+            </a:r>
+            <a:endParaRPr lang="en-US" sz="1400" dirty="0"/>
           </a:p>
           <a:p>
             <a:pPr indent="0" marL="0">
               <a:spcAft>
-                <a:spcPts val="200"/>
+                <a:spcPts val="100"/>
               </a:spcAft>
               <a:buNone/>
             </a:pPr>
             <a:r>
-              <a:rPr lang="en-US" sz="850" dirty="0">
+              <a:rPr lang="en-US" sz="1400" dirty="0">
                 <a:solidFill>
                   <a:srgbClr val="1B2B1F"/>
                 </a:solidFill>
@@ -11661,19 +11532,19 @@
                 <a:ea typeface="Calibri" pitchFamily="34" charset="-122"/>
                 <a:cs typeface="Calibri" pitchFamily="34" charset="-120"/>
               </a:rPr>
-              <a:t>• Philip the Bold（r. 1363–1404）建立禮拜堂</a:t>
-            </a:r>
-            <a:endParaRPr lang="en-US" sz="850" dirty="0"/>
+              <a:t>• Philip the Good (1419–67) 全盛期</a:t>
+            </a:r>
+            <a:endParaRPr lang="en-US" sz="1400" dirty="0"/>
           </a:p>
           <a:p>
             <a:pPr indent="0" marL="0">
               <a:spcAft>
-                <a:spcPts val="200"/>
+                <a:spcPts val="100"/>
               </a:spcAft>
               <a:buNone/>
             </a:pPr>
             <a:r>
-              <a:rPr lang="en-US" sz="850" dirty="0">
+              <a:rPr lang="en-US" sz="1400" dirty="0">
                 <a:solidFill>
                   <a:srgbClr val="1B2B1F"/>
                 </a:solidFill>
@@ -11681,49 +11552,9 @@
                 <a:ea typeface="Calibri" pitchFamily="34" charset="-122"/>
                 <a:cs typeface="Calibri" pitchFamily="34" charset="-120"/>
               </a:rPr>
-              <a:t>• John the Fearless（r. 1404–19）</a:t>
-            </a:r>
-            <a:endParaRPr lang="en-US" sz="850" dirty="0"/>
-          </a:p>
-          <a:p>
-            <a:pPr indent="0" marL="0">
-              <a:spcAft>
-                <a:spcPts val="200"/>
-              </a:spcAft>
-              <a:buNone/>
-            </a:pPr>
-            <a:r>
-              <a:rPr lang="en-US" sz="850" dirty="0">
-                <a:solidFill>
-                  <a:srgbClr val="1B2B1F"/>
-                </a:solidFill>
-                <a:latin typeface="Calibri" pitchFamily="34" charset="0"/>
-                <a:ea typeface="Calibri" pitchFamily="34" charset="-122"/>
-                <a:cs typeface="Calibri" pitchFamily="34" charset="-120"/>
-              </a:rPr>
-              <a:t>• Philip the Good（r. 1419–67）全盛期</a:t>
-            </a:r>
-            <a:endParaRPr lang="en-US" sz="850" dirty="0"/>
-          </a:p>
-          <a:p>
-            <a:pPr indent="0" marL="0">
-              <a:spcAft>
-                <a:spcPts val="200"/>
-              </a:spcAft>
-              <a:buNone/>
-            </a:pPr>
-            <a:r>
-              <a:rPr lang="en-US" sz="850" dirty="0">
-                <a:solidFill>
-                  <a:srgbClr val="1B2B1F"/>
-                </a:solidFill>
-                <a:latin typeface="Calibri" pitchFamily="34" charset="0"/>
-                <a:ea typeface="Calibri" pitchFamily="34" charset="-122"/>
-                <a:cs typeface="Calibri" pitchFamily="34" charset="-120"/>
-              </a:rPr>
-              <a:t>• Charles the Bold（r. 1467–77）業餘音樂家兼作曲家</a:t>
-            </a:r>
-            <a:endParaRPr lang="en-US" sz="850" dirty="0"/>
+              <a:t>• Charles the Bold (1467–77) 業餘作曲家</a:t>
+            </a:r>
+            <a:endParaRPr lang="en-US" sz="1400" dirty="0"/>
           </a:p>
         </p:txBody>
       </p:sp>
@@ -11736,7 +11567,7 @@
         <p:spPr>
           <a:xfrm>
             <a:off x="4663440" y="1188720"/>
-            <a:ext cx="4206240" cy="3611880"/>
+            <a:ext cx="4206240" cy="3794760"/>
           </a:xfrm>
           <a:prstGeom prst="rect">
             <a:avLst/>
@@ -11756,23 +11587,23 @@
         <p:spPr>
           <a:xfrm>
             <a:off x="4800600" y="1261872"/>
-            <a:ext cx="3931920" cy="292608"/>
-          </a:xfrm>
-          <a:prstGeom prst="rect">
-            <a:avLst/>
-          </a:prstGeom>
-          <a:noFill/>
-          <a:ln/>
-        </p:spPr>
-        <p:txBody>
-          <a:bodyPr wrap="square" rtlCol="0" anchor="ctr"/>
-          <a:lstStyle/>
-          <a:p>
-            <a:pPr indent="0" marL="0">
-              <a:buNone/>
-            </a:pPr>
-            <a:r>
-              <a:rPr lang="en-US" sz="1200" b="1" dirty="0">
+            <a:ext cx="3931920" cy="365760"/>
+          </a:xfrm>
+          <a:prstGeom prst="rect">
+            <a:avLst/>
+          </a:prstGeom>
+          <a:noFill/>
+          <a:ln/>
+        </p:spPr>
+        <p:txBody>
+          <a:bodyPr wrap="square" lIns="0" tIns="0" rIns="0" bIns="0" rtlCol="0" anchor="ctr"/>
+          <a:lstStyle/>
+          <a:p>
+            <a:pPr indent="0" marL="0">
+              <a:buNone/>
+            </a:pPr>
+            <a:r>
+              <a:rPr lang="en-US" sz="1400" b="1" dirty="0">
                 <a:solidFill>
                   <a:srgbClr val="2E5A3A"/>
                 </a:solidFill>
@@ -11780,9 +11611,9 @@
                 <a:ea typeface="Georgia" pitchFamily="34" charset="-122"/>
                 <a:cs typeface="Georgia" pitchFamily="34" charset="-120"/>
               </a:rPr>
-              <a:t>⛪ The Chapel 禮拜堂樂團</a:t>
-            </a:r>
-            <a:endParaRPr lang="en-US" sz="1200" dirty="0"/>
+              <a:t>■ The Chapel 禮拜堂樂團</a:t>
+            </a:r>
+            <a:endParaRPr lang="en-US" sz="1400" dirty="0"/>
           </a:p>
         </p:txBody>
       </p:sp>
@@ -11794,27 +11625,27 @@
         </p:nvSpPr>
         <p:spPr>
           <a:xfrm>
-            <a:off x="4846320" y="1572768"/>
-            <a:ext cx="3977640" cy="3154680"/>
-          </a:xfrm>
-          <a:prstGeom prst="rect">
-            <a:avLst/>
-          </a:prstGeom>
-          <a:noFill/>
-          <a:ln/>
-        </p:spPr>
-        <p:txBody>
-          <a:bodyPr wrap="square" rtlCol="0" anchor="ctr"/>
+            <a:off x="4846320" y="1719072"/>
+            <a:ext cx="3977640" cy="3246120"/>
+          </a:xfrm>
+          <a:prstGeom prst="rect">
+            <a:avLst/>
+          </a:prstGeom>
+          <a:noFill/>
+          <a:ln/>
+        </p:spPr>
+        <p:txBody>
+          <a:bodyPr wrap="square" rtlCol="0" anchor="t"/>
           <a:lstStyle/>
           <a:p>
             <a:pPr indent="0" marL="0">
               <a:spcAft>
-                <a:spcPts val="200"/>
+                <a:spcPts val="100"/>
               </a:spcAft>
               <a:buNone/>
             </a:pPr>
             <a:r>
-              <a:rPr lang="en-US" sz="850" dirty="0">
+              <a:rPr lang="en-US" sz="1400" dirty="0">
                 <a:solidFill>
                   <a:srgbClr val="1B2B1F"/>
                 </a:solidFill>
@@ -11824,17 +11655,17 @@
               </a:rPr>
               <a:t>• 1384 Philip the Bold 建立</a:t>
             </a:r>
-            <a:endParaRPr lang="en-US" sz="850" dirty="0"/>
+            <a:endParaRPr lang="en-US" sz="1400" dirty="0"/>
           </a:p>
           <a:p>
             <a:pPr indent="0" marL="0">
               <a:spcAft>
-                <a:spcPts val="200"/>
+                <a:spcPts val="100"/>
               </a:spcAft>
               <a:buNone/>
             </a:pPr>
             <a:r>
-              <a:rPr lang="en-US" sz="850" dirty="0">
+              <a:rPr lang="en-US" sz="1400" dirty="0">
                 <a:solidFill>
                   <a:srgbClr val="1B2B1F"/>
                 </a:solidFill>
@@ -11842,19 +11673,19 @@
                 <a:ea typeface="Calibri" pitchFamily="34" charset="-122"/>
                 <a:cs typeface="Calibri" pitchFamily="34" charset="-120"/>
               </a:rPr>
-              <a:t>• 1445 Philip the Good 時期達 23 位歌手——歐洲僅次於英王</a:t>
-            </a:r>
-            <a:endParaRPr lang="en-US" sz="850" dirty="0"/>
+              <a:t>• 1445 達 23 位歌手——歐洲僅次於英王</a:t>
+            </a:r>
+            <a:endParaRPr lang="en-US" sz="1400" dirty="0"/>
           </a:p>
           <a:p>
             <a:pPr indent="0" marL="0">
               <a:spcAft>
-                <a:spcPts val="200"/>
+                <a:spcPts val="100"/>
               </a:spcAft>
               <a:buNone/>
             </a:pPr>
             <a:r>
-              <a:rPr lang="en-US" sz="850" dirty="0">
+              <a:rPr lang="en-US" sz="1400" dirty="0">
                 <a:solidFill>
                   <a:srgbClr val="1B2B1F"/>
                 </a:solidFill>
@@ -11864,17 +11695,17 @@
               </a:rPr>
               <a:t>• 音樂家主要來自法蘭德斯與低地諸省</a:t>
             </a:r>
-            <a:endParaRPr lang="en-US" sz="850" dirty="0"/>
+            <a:endParaRPr lang="en-US" sz="1400" dirty="0"/>
           </a:p>
           <a:p>
             <a:pPr indent="0" marL="0">
               <a:spcAft>
-                <a:spcPts val="200"/>
+                <a:spcPts val="100"/>
               </a:spcAft>
               <a:buNone/>
             </a:pPr>
             <a:r>
-              <a:rPr lang="en-US" sz="850" dirty="0">
+              <a:rPr lang="en-US" sz="1400" dirty="0">
                 <a:solidFill>
                   <a:srgbClr val="1B2B1F"/>
                 </a:solidFill>
@@ -11882,28 +11713,28 @@
                 <a:ea typeface="Calibri" pitchFamily="34" charset="-122"/>
                 <a:cs typeface="Calibri" pitchFamily="34" charset="-120"/>
               </a:rPr>
-              <a:t>• Philip the Good 另維持一支樂手隊——小號、鼓、vielle、琵琶、豎琴、風琴、風笛、shawm——來自法、義、德、葡</a:t>
-            </a:r>
-            <a:endParaRPr lang="en-US" sz="850" dirty="0"/>
+              <a:t>• 另維持樂手隊：trumpet、drums、vielle、lute、harp、organ</a:t>
+            </a:r>
+            <a:endParaRPr lang="en-US" sz="1400" dirty="0"/>
           </a:p>
           <a:p>
             <a:pPr indent="0" marL="0">
               <a:spcAft>
-                <a:spcPts val="200"/>
+                <a:spcPts val="100"/>
               </a:spcAft>
               <a:buNone/>
             </a:pPr>
-            <a:endParaRPr lang="en-US" sz="850" dirty="0"/>
+            <a:endParaRPr lang="en-US" sz="1400" dirty="0"/>
           </a:p>
           <a:p>
             <a:pPr indent="0" marL="0">
               <a:spcAft>
-                <a:spcPts val="200"/>
+                <a:spcPts val="100"/>
               </a:spcAft>
               <a:buNone/>
             </a:pPr>
             <a:r>
-              <a:rPr lang="en-US" sz="850" dirty="0">
+              <a:rPr lang="en-US" sz="1400" dirty="0">
                 <a:solidFill>
                   <a:srgbClr val="1B2B1F"/>
                 </a:solidFill>
@@ -11911,19 +11742,19 @@
                 <a:ea typeface="Calibri" pitchFamily="34" charset="-122"/>
                 <a:cs typeface="Calibri" pitchFamily="34" charset="-120"/>
               </a:rPr>
-              <a:t>四種主要作品類型：</a:t>
-            </a:r>
-            <a:endParaRPr lang="en-US" sz="850" dirty="0"/>
+              <a:t>四種主要作品類型</a:t>
+            </a:r>
+            <a:endParaRPr lang="en-US" sz="1400" dirty="0"/>
           </a:p>
           <a:p>
             <a:pPr indent="0" marL="0">
               <a:spcAft>
-                <a:spcPts val="200"/>
+                <a:spcPts val="100"/>
               </a:spcAft>
               <a:buNone/>
             </a:pPr>
             <a:r>
-              <a:rPr lang="en-US" sz="850" dirty="0">
+              <a:rPr lang="en-US" sz="1400" dirty="0">
                 <a:solidFill>
                   <a:srgbClr val="1B2B1F"/>
                 </a:solidFill>
@@ -11931,19 +11762,28 @@
                 <a:ea typeface="Calibri" pitchFamily="34" charset="-122"/>
                 <a:cs typeface="Calibri" pitchFamily="34" charset="-120"/>
               </a:rPr>
-              <a:t>• Chansons（法文世俗歌曲）</a:t>
-            </a:r>
-            <a:endParaRPr lang="en-US" sz="850" dirty="0"/>
+              <a:t>• Chansons · Motets · Magnificats · Mass Ordinary</a:t>
+            </a:r>
+            <a:endParaRPr lang="en-US" sz="1400" dirty="0"/>
           </a:p>
           <a:p>
             <a:pPr indent="0" marL="0">
               <a:spcAft>
-                <a:spcPts val="200"/>
+                <a:spcPts val="100"/>
               </a:spcAft>
               <a:buNone/>
             </a:pPr>
-            <a:r>
-              <a:rPr lang="en-US" sz="850" dirty="0">
+            <a:endParaRPr lang="en-US" sz="1400" dirty="0"/>
+          </a:p>
+          <a:p>
+            <a:pPr indent="0" marL="0">
+              <a:spcAft>
+                <a:spcPts val="100"/>
+              </a:spcAft>
+              <a:buNone/>
+            </a:pPr>
+            <a:r>
+              <a:rPr lang="en-US" sz="1400" dirty="0">
                 <a:solidFill>
                   <a:srgbClr val="1B2B1F"/>
                 </a:solidFill>
@@ -11951,19 +11791,19 @@
                 <a:ea typeface="Calibri" pitchFamily="34" charset="-122"/>
                 <a:cs typeface="Calibri" pitchFamily="34" charset="-120"/>
               </a:rPr>
-              <a:t>• Motets（經文歌）</a:t>
-            </a:r>
-            <a:endParaRPr lang="en-US" sz="850" dirty="0"/>
+              <a:t>• 多數為三聲部，音域略廣於 14 世紀</a:t>
+            </a:r>
+            <a:endParaRPr lang="en-US" sz="1400" dirty="0"/>
           </a:p>
           <a:p>
             <a:pPr indent="0" marL="0">
               <a:spcAft>
-                <a:spcPts val="200"/>
+                <a:spcPts val="100"/>
               </a:spcAft>
               <a:buNone/>
             </a:pPr>
             <a:r>
-              <a:rPr lang="en-US" sz="850" dirty="0">
+              <a:rPr lang="en-US" sz="1400" dirty="0">
                 <a:solidFill>
                   <a:srgbClr val="1B2B1F"/>
                 </a:solidFill>
@@ -11971,78 +11811,9 @@
                 <a:ea typeface="Calibri" pitchFamily="34" charset="-122"/>
                 <a:cs typeface="Calibri" pitchFamily="34" charset="-120"/>
               </a:rPr>
-              <a:t>• Magnificats（頌歌）</a:t>
-            </a:r>
-            <a:endParaRPr lang="en-US" sz="850" dirty="0"/>
-          </a:p>
-          <a:p>
-            <a:pPr indent="0" marL="0">
-              <a:spcAft>
-                <a:spcPts val="200"/>
-              </a:spcAft>
-              <a:buNone/>
-            </a:pPr>
-            <a:r>
-              <a:rPr lang="en-US" sz="850" dirty="0">
-                <a:solidFill>
-                  <a:srgbClr val="1B2B1F"/>
-                </a:solidFill>
-                <a:latin typeface="Calibri" pitchFamily="34" charset="0"/>
-                <a:ea typeface="Calibri" pitchFamily="34" charset="-122"/>
-                <a:cs typeface="Calibri" pitchFamily="34" charset="-120"/>
-              </a:rPr>
-              <a:t>• Mass Ordinary settings（彌撒樂章）</a:t>
-            </a:r>
-            <a:endParaRPr lang="en-US" sz="850" dirty="0"/>
-          </a:p>
-          <a:p>
-            <a:pPr indent="0" marL="0">
-              <a:spcAft>
-                <a:spcPts val="200"/>
-              </a:spcAft>
-              <a:buNone/>
-            </a:pPr>
-            <a:endParaRPr lang="en-US" sz="850" dirty="0"/>
-          </a:p>
-          <a:p>
-            <a:pPr indent="0" marL="0">
-              <a:spcAft>
-                <a:spcPts val="200"/>
-              </a:spcAft>
-              <a:buNone/>
-            </a:pPr>
-            <a:r>
-              <a:rPr lang="en-US" sz="850" dirty="0">
-                <a:solidFill>
-                  <a:srgbClr val="1B2B1F"/>
-                </a:solidFill>
-                <a:latin typeface="Calibri" pitchFamily="34" charset="0"/>
-                <a:ea typeface="Calibri" pitchFamily="34" charset="-122"/>
-                <a:cs typeface="Calibri" pitchFamily="34" charset="-120"/>
-              </a:rPr>
-              <a:t>多數作品為三聲部——類似 14 世紀法國 chanson，但各聲部音域略廣</a:t>
-            </a:r>
-            <a:endParaRPr lang="en-US" sz="850" dirty="0"/>
-          </a:p>
-          <a:p>
-            <a:pPr indent="0" marL="0">
-              <a:spcAft>
-                <a:spcPts val="200"/>
-              </a:spcAft>
-              <a:buNone/>
-            </a:pPr>
-            <a:r>
-              <a:rPr lang="en-US" sz="850" dirty="0">
-                <a:solidFill>
-                  <a:srgbClr val="1B2B1F"/>
-                </a:solidFill>
-                <a:latin typeface="Calibri" pitchFamily="34" charset="0"/>
-                <a:ea typeface="Calibri" pitchFamily="34" charset="-122"/>
-                <a:cs typeface="Calibri" pitchFamily="34" charset="-120"/>
-              </a:rPr>
-              <a:t>主旋律在 cantus · 對位支援在 tenor · 和聲填充在 contratenor</a:t>
-            </a:r>
-            <a:endParaRPr lang="en-US" sz="850" dirty="0"/>
+              <a:t>• cantus 主旋律 · tenor 對位 · contratenor 填和聲</a:t>
+            </a:r>
+            <a:endParaRPr lang="en-US" sz="1400" dirty="0"/>
           </a:p>
         </p:txBody>
       </p:sp>
@@ -12182,7 +11953,7 @@
               <a:buNone/>
             </a:pPr>
             <a:r>
-              <a:rPr lang="en-US" sz="1300" dirty="0">
+              <a:rPr lang="en-US" sz="1400" dirty="0">
                 <a:solidFill>
                   <a:srgbClr val="E8D8A8"/>
                 </a:solidFill>
@@ -12192,7 +11963,7 @@
               </a:rPr>
               <a:t>ca. 1400–1460 · 勃艮第宮廷 chanson 大師</a:t>
             </a:r>
-            <a:endParaRPr lang="en-US" sz="1300" dirty="0"/>
+            <a:endParaRPr lang="en-US" sz="1400" dirty="0"/>
           </a:p>
         </p:txBody>
       </p:sp>
@@ -12225,7 +11996,7 @@
         <p:spPr>
           <a:xfrm>
             <a:off x="274320" y="1188720"/>
-            <a:ext cx="4206240" cy="3611880"/>
+            <a:ext cx="4206240" cy="3794760"/>
           </a:xfrm>
           <a:prstGeom prst="rect">
             <a:avLst/>
@@ -12245,23 +12016,23 @@
         <p:spPr>
           <a:xfrm>
             <a:off x="411480" y="1261872"/>
-            <a:ext cx="3931920" cy="292608"/>
-          </a:xfrm>
-          <a:prstGeom prst="rect">
-            <a:avLst/>
-          </a:prstGeom>
-          <a:noFill/>
-          <a:ln/>
-        </p:spPr>
-        <p:txBody>
-          <a:bodyPr wrap="square" rtlCol="0" anchor="ctr"/>
-          <a:lstStyle/>
-          <a:p>
-            <a:pPr indent="0" marL="0">
-              <a:buNone/>
-            </a:pPr>
-            <a:r>
-              <a:rPr lang="en-US" sz="1200" b="1" dirty="0">
+            <a:ext cx="3931920" cy="365760"/>
+          </a:xfrm>
+          <a:prstGeom prst="rect">
+            <a:avLst/>
+          </a:prstGeom>
+          <a:noFill/>
+          <a:ln/>
+        </p:spPr>
+        <p:txBody>
+          <a:bodyPr wrap="square" lIns="0" tIns="0" rIns="0" bIns="0" rtlCol="0" anchor="ctr"/>
+          <a:lstStyle/>
+          <a:p>
+            <a:pPr indent="0" marL="0">
+              <a:buNone/>
+            </a:pPr>
+            <a:r>
+              <a:rPr lang="en-US" sz="1400" b="1" dirty="0">
                 <a:solidFill>
                   <a:srgbClr val="C8A020"/>
                 </a:solidFill>
@@ -12269,9 +12040,9 @@
                 <a:ea typeface="Georgia" pitchFamily="34" charset="-122"/>
                 <a:cs typeface="Georgia" pitchFamily="34" charset="-120"/>
               </a:rPr>
-              <a:t>📖 生平 Biography</a:t>
-            </a:r>
-            <a:endParaRPr lang="en-US" sz="1200" dirty="0"/>
+              <a:t>■ 生平 Biography</a:t>
+            </a:r>
+            <a:endParaRPr lang="en-US" sz="1400" dirty="0"/>
           </a:p>
         </p:txBody>
       </p:sp>
@@ -12283,27 +12054,27 @@
         </p:nvSpPr>
         <p:spPr>
           <a:xfrm>
-            <a:off x="457200" y="1572768"/>
-            <a:ext cx="3977640" cy="3154680"/>
-          </a:xfrm>
-          <a:prstGeom prst="rect">
-            <a:avLst/>
-          </a:prstGeom>
-          <a:noFill/>
-          <a:ln/>
-        </p:spPr>
-        <p:txBody>
-          <a:bodyPr wrap="square" rtlCol="0" anchor="ctr"/>
+            <a:off x="457200" y="1719072"/>
+            <a:ext cx="3977640" cy="3246120"/>
+          </a:xfrm>
+          <a:prstGeom prst="rect">
+            <a:avLst/>
+          </a:prstGeom>
+          <a:noFill/>
+          <a:ln/>
+        </p:spPr>
+        <p:txBody>
+          <a:bodyPr wrap="square" rtlCol="0" anchor="t"/>
           <a:lstStyle/>
           <a:p>
             <a:pPr indent="0" marL="0">
               <a:spcAft>
-                <a:spcPts val="200"/>
+                <a:spcPts val="100"/>
               </a:spcAft>
               <a:buNone/>
             </a:pPr>
             <a:r>
-              <a:rPr lang="en-US" sz="850" dirty="0">
+              <a:rPr lang="en-US" sz="1400" dirty="0">
                 <a:solidFill>
                   <a:srgbClr val="E8D8A8"/>
                 </a:solidFill>
@@ -12311,19 +12082,19 @@
                 <a:ea typeface="Calibri" pitchFamily="34" charset="-122"/>
                 <a:cs typeface="Calibri" pitchFamily="34" charset="-120"/>
               </a:rPr>
-              <a:t>• 生於 Mons——受訓為唱詩班男童與風琴手</a:t>
-            </a:r>
-            <a:endParaRPr lang="en-US" sz="850" dirty="0"/>
+              <a:t>• 生於 Mons — 受訓為唱詩班男童</a:t>
+            </a:r>
+            <a:endParaRPr lang="en-US" sz="1400" dirty="0"/>
           </a:p>
           <a:p>
             <a:pPr indent="0" marL="0">
               <a:spcAft>
-                <a:spcPts val="200"/>
+                <a:spcPts val="100"/>
               </a:spcAft>
               <a:buNone/>
             </a:pPr>
             <a:r>
-              <a:rPr lang="en-US" sz="850" dirty="0">
+              <a:rPr lang="en-US" sz="1400" dirty="0">
                 <a:solidFill>
                   <a:srgbClr val="E8D8A8"/>
                 </a:solidFill>
@@ -12331,19 +12102,19 @@
                 <a:ea typeface="Calibri" pitchFamily="34" charset="-122"/>
                 <a:cs typeface="Calibri" pitchFamily="34" charset="-120"/>
               </a:rPr>
-              <a:t>• 1423 遷居 Lille</a:t>
-            </a:r>
-            <a:endParaRPr lang="en-US" sz="850" dirty="0"/>
+              <a:t>• 曾服侍英王軍隊 William Pole</a:t>
+            </a:r>
+            <a:endParaRPr lang="en-US" sz="1400" dirty="0"/>
           </a:p>
           <a:p>
             <a:pPr indent="0" marL="0">
               <a:spcAft>
-                <a:spcPts val="200"/>
+                <a:spcPts val="100"/>
               </a:spcAft>
               <a:buNone/>
             </a:pPr>
             <a:r>
-              <a:rPr lang="en-US" sz="850" dirty="0">
+              <a:rPr lang="en-US" sz="1400" dirty="0">
                 <a:solidFill>
                   <a:srgbClr val="E8D8A8"/>
                 </a:solidFill>
@@ -12351,19 +12122,19 @@
                 <a:ea typeface="Calibri" pitchFamily="34" charset="-122"/>
                 <a:cs typeface="Calibri" pitchFamily="34" charset="-120"/>
               </a:rPr>
-              <a:t>• 曾在英王軍隊佔領法國時服侍 William Pole, earl of Suffolk——直接接觸英格蘭音樂</a:t>
-            </a:r>
-            <a:endParaRPr lang="en-US" sz="850" dirty="0"/>
+              <a:t>   → 直接接觸英格蘭音樂</a:t>
+            </a:r>
+            <a:endParaRPr lang="en-US" sz="1400" dirty="0"/>
           </a:p>
           <a:p>
             <a:pPr indent="0" marL="0">
               <a:spcAft>
-                <a:spcPts val="200"/>
+                <a:spcPts val="100"/>
               </a:spcAft>
               <a:buNone/>
             </a:pPr>
             <a:r>
-              <a:rPr lang="en-US" sz="850" dirty="0">
+              <a:rPr lang="en-US" sz="1400" dirty="0">
                 <a:solidFill>
                   <a:srgbClr val="E8D8A8"/>
                 </a:solidFill>
@@ -12371,19 +12142,19 @@
                 <a:ea typeface="Calibri" pitchFamily="34" charset="-122"/>
                 <a:cs typeface="Calibri" pitchFamily="34" charset="-120"/>
               </a:rPr>
-              <a:t>• 1427 加入 Philip the Good 的禮拜堂</a:t>
-            </a:r>
-            <a:endParaRPr lang="en-US" sz="850" dirty="0"/>
+              <a:t>• 1427 加入 Philip the Good 禮拜堂</a:t>
+            </a:r>
+            <a:endParaRPr lang="en-US" sz="1400" dirty="0"/>
           </a:p>
           <a:p>
             <a:pPr indent="0" marL="0">
               <a:spcAft>
-                <a:spcPts val="200"/>
+                <a:spcPts val="100"/>
               </a:spcAft>
               <a:buNone/>
             </a:pPr>
             <a:r>
-              <a:rPr lang="en-US" sz="850" dirty="0">
+              <a:rPr lang="en-US" sz="1400" dirty="0">
                 <a:solidFill>
                   <a:srgbClr val="E8D8A8"/>
                 </a:solidFill>
@@ -12391,19 +12162,19 @@
                 <a:ea typeface="Calibri" pitchFamily="34" charset="-122"/>
                 <a:cs typeface="Calibri" pitchFamily="34" charset="-120"/>
               </a:rPr>
-              <a:t>• 在勃艮第宮廷服侍三十餘年，1453 以豐厚年金退休</a:t>
-            </a:r>
-            <a:endParaRPr lang="en-US" sz="850" dirty="0"/>
+              <a:t>  服侍三十餘年</a:t>
+            </a:r>
+            <a:endParaRPr lang="en-US" sz="1400" dirty="0"/>
           </a:p>
           <a:p>
             <a:pPr indent="0" marL="0">
               <a:spcAft>
-                <a:spcPts val="200"/>
+                <a:spcPts val="100"/>
               </a:spcAft>
               <a:buNone/>
             </a:pPr>
             <a:r>
-              <a:rPr lang="en-US" sz="850" dirty="0">
+              <a:rPr lang="en-US" sz="1400" dirty="0">
                 <a:solidFill>
                   <a:srgbClr val="E8D8A8"/>
                 </a:solidFill>
@@ -12411,19 +12182,19 @@
                 <a:ea typeface="Calibri" pitchFamily="34" charset="-122"/>
                 <a:cs typeface="Calibri" pitchFamily="34" charset="-120"/>
               </a:rPr>
-              <a:t>• 主要工作為演出——作曲為次要</a:t>
-            </a:r>
-            <a:endParaRPr lang="en-US" sz="850" dirty="0"/>
+              <a:t>• 1453 以豐厚年金退休</a:t>
+            </a:r>
+            <a:endParaRPr lang="en-US" sz="1400" dirty="0"/>
           </a:p>
           <a:p>
             <a:pPr indent="0" marL="0">
               <a:spcAft>
-                <a:spcPts val="200"/>
+                <a:spcPts val="100"/>
               </a:spcAft>
               <a:buNone/>
             </a:pPr>
             <a:r>
-              <a:rPr lang="en-US" sz="850" dirty="0">
+              <a:rPr lang="en-US" sz="1400" dirty="0">
                 <a:solidFill>
                   <a:srgbClr val="E8D8A8"/>
                 </a:solidFill>
@@ -12431,28 +12202,28 @@
                 <a:ea typeface="Calibri" pitchFamily="34" charset="-122"/>
                 <a:cs typeface="Calibri" pitchFamily="34" charset="-120"/>
               </a:rPr>
-              <a:t>• 與 Dunstable、Du Fay 並列 15 世紀三大作曲家</a:t>
-            </a:r>
-            <a:endParaRPr lang="en-US" sz="850" dirty="0"/>
+              <a:t>• 與 Dunstable、Du Fay 並列三大</a:t>
+            </a:r>
+            <a:endParaRPr lang="en-US" sz="1400" dirty="0"/>
           </a:p>
           <a:p>
             <a:pPr indent="0" marL="0">
               <a:spcAft>
-                <a:spcPts val="200"/>
+                <a:spcPts val="100"/>
               </a:spcAft>
               <a:buNone/>
             </a:pPr>
-            <a:endParaRPr lang="en-US" sz="850" dirty="0"/>
+            <a:endParaRPr lang="en-US" sz="1400" dirty="0"/>
           </a:p>
           <a:p>
             <a:pPr indent="0" marL="0">
               <a:spcAft>
-                <a:spcPts val="200"/>
+                <a:spcPts val="100"/>
               </a:spcAft>
               <a:buNone/>
             </a:pPr>
             <a:r>
-              <a:rPr lang="en-US" sz="850" dirty="0">
+              <a:rPr lang="en-US" sz="1400" dirty="0">
                 <a:solidFill>
                   <a:srgbClr val="E8D8A8"/>
                 </a:solidFill>
@@ -12462,17 +12233,17 @@
               </a:rPr>
               <a:t>主要作品：</a:t>
             </a:r>
-            <a:endParaRPr lang="en-US" sz="850" dirty="0"/>
+            <a:endParaRPr lang="en-US" sz="1400" dirty="0"/>
           </a:p>
           <a:p>
             <a:pPr indent="0" marL="0">
               <a:spcAft>
-                <a:spcPts val="200"/>
+                <a:spcPts val="100"/>
               </a:spcAft>
               <a:buNone/>
             </a:pPr>
             <a:r>
-              <a:rPr lang="en-US" sz="850" dirty="0">
+              <a:rPr lang="en-US" sz="1400" dirty="0">
                 <a:solidFill>
                   <a:srgbClr val="E8D8A8"/>
                 </a:solidFill>
@@ -12480,19 +12251,19 @@
                 <a:ea typeface="Calibri" pitchFamily="34" charset="-122"/>
                 <a:cs typeface="Calibri" pitchFamily="34" charset="-120"/>
               </a:rPr>
-              <a:t>• 28 部彌撒樂章（部分為 Gloria-Credo 或 Sanctus-Agnus 配對）</a:t>
-            </a:r>
-            <a:endParaRPr lang="en-US" sz="850" dirty="0"/>
+              <a:t>• 28 彌撒樂章 · 6 Magnificats</a:t>
+            </a:r>
+            <a:endParaRPr lang="en-US" sz="1400" dirty="0"/>
           </a:p>
           <a:p>
             <a:pPr indent="0" marL="0">
               <a:spcAft>
-                <a:spcPts val="200"/>
+                <a:spcPts val="100"/>
               </a:spcAft>
               <a:buNone/>
             </a:pPr>
             <a:r>
-              <a:rPr lang="en-US" sz="850" dirty="0">
+              <a:rPr lang="en-US" sz="1400" dirty="0">
                 <a:solidFill>
                   <a:srgbClr val="E8D8A8"/>
                 </a:solidFill>
@@ -12500,69 +12271,9 @@
                 <a:ea typeface="Calibri" pitchFamily="34" charset="-122"/>
                 <a:cs typeface="Calibri" pitchFamily="34" charset="-120"/>
               </a:rPr>
-              <a:t>• 6 部 Magnificats</a:t>
-            </a:r>
-            <a:endParaRPr lang="en-US" sz="850" dirty="0"/>
-          </a:p>
-          <a:p>
-            <a:pPr indent="0" marL="0">
-              <a:spcAft>
-                <a:spcPts val="200"/>
-              </a:spcAft>
-              <a:buNone/>
-            </a:pPr>
-            <a:r>
-              <a:rPr lang="en-US" sz="850" dirty="0">
-                <a:solidFill>
-                  <a:srgbClr val="E8D8A8"/>
-                </a:solidFill>
-                <a:latin typeface="Calibri" pitchFamily="34" charset="0"/>
-                <a:ea typeface="Calibri" pitchFamily="34" charset="-122"/>
-                <a:cs typeface="Calibri" pitchFamily="34" charset="-120"/>
-              </a:rPr>
-              <a:t>• 29 部 motets</a:t>
-            </a:r>
-            <a:endParaRPr lang="en-US" sz="850" dirty="0"/>
-          </a:p>
-          <a:p>
-            <a:pPr indent="0" marL="0">
-              <a:spcAft>
-                <a:spcPts val="200"/>
-              </a:spcAft>
-              <a:buNone/>
-            </a:pPr>
-            <a:r>
-              <a:rPr lang="en-US" sz="850" dirty="0">
-                <a:solidFill>
-                  <a:srgbClr val="E8D8A8"/>
-                </a:solidFill>
-                <a:latin typeface="Calibri" pitchFamily="34" charset="0"/>
-                <a:ea typeface="Calibri" pitchFamily="34" charset="-122"/>
-                <a:cs typeface="Calibri" pitchFamily="34" charset="-120"/>
-              </a:rPr>
-              <a:t>• 51 首 rondeaux</a:t>
-            </a:r>
-            <a:endParaRPr lang="en-US" sz="850" dirty="0"/>
-          </a:p>
-          <a:p>
-            <a:pPr indent="0" marL="0">
-              <a:spcAft>
-                <a:spcPts val="200"/>
-              </a:spcAft>
-              <a:buNone/>
-            </a:pPr>
-            <a:r>
-              <a:rPr lang="en-US" sz="850" dirty="0">
-                <a:solidFill>
-                  <a:srgbClr val="E8D8A8"/>
-                </a:solidFill>
-                <a:latin typeface="Calibri" pitchFamily="34" charset="0"/>
-                <a:ea typeface="Calibri" pitchFamily="34" charset="-122"/>
-                <a:cs typeface="Calibri" pitchFamily="34" charset="-120"/>
-              </a:rPr>
-              <a:t>• 7 首 ballades</a:t>
-            </a:r>
-            <a:endParaRPr lang="en-US" sz="850" dirty="0"/>
+              <a:t>• 29 motets · 51 rondeaux · 7 ballades</a:t>
+            </a:r>
+            <a:endParaRPr lang="en-US" sz="1400" dirty="0"/>
           </a:p>
         </p:txBody>
       </p:sp>
@@ -12575,7 +12286,7 @@
         <p:spPr>
           <a:xfrm>
             <a:off x="4663440" y="1188720"/>
-            <a:ext cx="4206240" cy="3611880"/>
+            <a:ext cx="4206240" cy="3794760"/>
           </a:xfrm>
           <a:prstGeom prst="rect">
             <a:avLst/>
@@ -12595,23 +12306,23 @@
         <p:spPr>
           <a:xfrm>
             <a:off x="4800600" y="1261872"/>
-            <a:ext cx="3931920" cy="292608"/>
-          </a:xfrm>
-          <a:prstGeom prst="rect">
-            <a:avLst/>
-          </a:prstGeom>
-          <a:noFill/>
-          <a:ln/>
-        </p:spPr>
-        <p:txBody>
-          <a:bodyPr wrap="square" rtlCol="0" anchor="ctr"/>
-          <a:lstStyle/>
-          <a:p>
-            <a:pPr indent="0" marL="0">
-              <a:buNone/>
-            </a:pPr>
-            <a:r>
-              <a:rPr lang="en-US" sz="1200" b="1" dirty="0">
+            <a:ext cx="3931920" cy="365760"/>
+          </a:xfrm>
+          <a:prstGeom prst="rect">
+            <a:avLst/>
+          </a:prstGeom>
+          <a:noFill/>
+          <a:ln/>
+        </p:spPr>
+        <p:txBody>
+          <a:bodyPr wrap="square" lIns="0" tIns="0" rIns="0" bIns="0" rtlCol="0" anchor="ctr"/>
+          <a:lstStyle/>
+          <a:p>
+            <a:pPr indent="0" marL="0">
+              <a:buNone/>
+            </a:pPr>
+            <a:r>
+              <a:rPr lang="en-US" sz="1400" b="1" dirty="0">
                 <a:solidFill>
                   <a:srgbClr val="C8A020"/>
                 </a:solidFill>
@@ -12619,9 +12330,9 @@
                 <a:ea typeface="Georgia" pitchFamily="34" charset="-122"/>
                 <a:cs typeface="Georgia" pitchFamily="34" charset="-120"/>
               </a:rPr>
-              <a:t>🎵 De plus en plus (NAWM 34, ca. 1425)</a:t>
-            </a:r>
-            <a:endParaRPr lang="en-US" sz="1200" dirty="0"/>
+              <a:t>■ De plus en plus (NAWM 34, ca. 1425)</a:t>
+            </a:r>
+            <a:endParaRPr lang="en-US" sz="1400" dirty="0"/>
           </a:p>
         </p:txBody>
       </p:sp>
@@ -12633,27 +12344,27 @@
         </p:nvSpPr>
         <p:spPr>
           <a:xfrm>
-            <a:off x="4846320" y="1572768"/>
-            <a:ext cx="3977640" cy="3154680"/>
-          </a:xfrm>
-          <a:prstGeom prst="rect">
-            <a:avLst/>
-          </a:prstGeom>
-          <a:noFill/>
-          <a:ln/>
-        </p:spPr>
-        <p:txBody>
-          <a:bodyPr wrap="square" rtlCol="0" anchor="ctr"/>
+            <a:off x="4846320" y="1719072"/>
+            <a:ext cx="3977640" cy="3246120"/>
+          </a:xfrm>
+          <a:prstGeom prst="rect">
+            <a:avLst/>
+          </a:prstGeom>
+          <a:noFill/>
+          <a:ln/>
+        </p:spPr>
+        <p:txBody>
+          <a:bodyPr wrap="square" rtlCol="0" anchor="t"/>
           <a:lstStyle/>
           <a:p>
             <a:pPr indent="0" marL="0">
               <a:spcAft>
-                <a:spcPts val="200"/>
+                <a:spcPts val="100"/>
               </a:spcAft>
               <a:buNone/>
             </a:pPr>
             <a:r>
-              <a:rPr lang="en-US" sz="850" dirty="0">
+              <a:rPr lang="en-US" sz="1400" dirty="0">
                 <a:solidFill>
                   <a:srgbClr val="E8D8A8"/>
                 </a:solidFill>
@@ -12661,28 +12372,48 @@
                 <a:ea typeface="Calibri" pitchFamily="34" charset="-122"/>
                 <a:cs typeface="Calibri" pitchFamily="34" charset="-120"/>
               </a:rPr>
-              <a:t>形式：rondeau（ABaAabAB）——15 世紀最常見的 chanson 形式</a:t>
-            </a:r>
-            <a:endParaRPr lang="en-US" sz="850" dirty="0"/>
+              <a:t>形式：rondeau (ABaAabAB)</a:t>
+            </a:r>
+            <a:endParaRPr lang="en-US" sz="1400" dirty="0"/>
           </a:p>
           <a:p>
             <a:pPr indent="0" marL="0">
               <a:spcAft>
-                <a:spcPts val="200"/>
+                <a:spcPts val="100"/>
               </a:spcAft>
               <a:buNone/>
             </a:pPr>
-            <a:endParaRPr lang="en-US" sz="850" dirty="0"/>
+            <a:r>
+              <a:rPr lang="en-US" sz="1400" dirty="0">
+                <a:solidFill>
+                  <a:srgbClr val="E8D8A8"/>
+                </a:solidFill>
+                <a:latin typeface="Calibri" pitchFamily="34" charset="0"/>
+                <a:ea typeface="Calibri" pitchFamily="34" charset="-122"/>
+                <a:cs typeface="Calibri" pitchFamily="34" charset="-120"/>
+              </a:rPr>
+              <a:t>15 世紀最常見的 chanson 形式</a:t>
+            </a:r>
+            <a:endParaRPr lang="en-US" sz="1400" dirty="0"/>
           </a:p>
           <a:p>
             <a:pPr indent="0" marL="0">
               <a:spcAft>
-                <a:spcPts val="200"/>
+                <a:spcPts val="100"/>
               </a:spcAft>
               <a:buNone/>
             </a:pPr>
-            <a:r>
-              <a:rPr lang="en-US" sz="850" dirty="0">
+            <a:endParaRPr lang="en-US" sz="1400" dirty="0"/>
+          </a:p>
+          <a:p>
+            <a:pPr indent="0" marL="0">
+              <a:spcAft>
+                <a:spcPts val="100"/>
+              </a:spcAft>
+              <a:buNone/>
+            </a:pPr>
+            <a:r>
+              <a:rPr lang="en-US" sz="1400" dirty="0">
                 <a:solidFill>
                   <a:srgbClr val="E8D8A8"/>
                 </a:solidFill>
@@ -12690,19 +12421,19 @@
                 <a:ea typeface="Calibri" pitchFamily="34" charset="-122"/>
                 <a:cs typeface="Calibri" pitchFamily="34" charset="-120"/>
               </a:rPr>
-              <a:t>風格混合：</a:t>
-            </a:r>
-            <a:endParaRPr lang="en-US" sz="850" dirty="0"/>
+              <a:t>風格混合</a:t>
+            </a:r>
+            <a:endParaRPr lang="en-US" sz="1400" dirty="0"/>
           </a:p>
           <a:p>
             <a:pPr indent="0" marL="0">
               <a:spcAft>
-                <a:spcPts val="200"/>
+                <a:spcPts val="100"/>
               </a:spcAft>
               <a:buNone/>
             </a:pPr>
             <a:r>
-              <a:rPr lang="en-US" sz="850" dirty="0">
+              <a:rPr lang="en-US" sz="1400" dirty="0">
                 <a:solidFill>
                   <a:srgbClr val="E8D8A8"/>
                 </a:solidFill>
@@ -12712,17 +12443,17 @@
               </a:rPr>
               <a:t>• 6/8 拍 · hemiola 交叉節奏</a:t>
             </a:r>
-            <a:endParaRPr lang="en-US" sz="850" dirty="0"/>
+            <a:endParaRPr lang="en-US" sz="1400" dirty="0"/>
           </a:p>
           <a:p>
             <a:pPr indent="0" marL="0">
               <a:spcAft>
-                <a:spcPts val="200"/>
+                <a:spcPts val="100"/>
               </a:spcAft>
               <a:buNone/>
             </a:pPr>
             <a:r>
-              <a:rPr lang="en-US" sz="850" dirty="0">
+              <a:rPr lang="en-US" sz="1400" dirty="0">
                 <a:solidFill>
                   <a:srgbClr val="E8D8A8"/>
                 </a:solidFill>
@@ -12730,19 +12461,19 @@
                 <a:ea typeface="Calibri" pitchFamily="34" charset="-122"/>
                 <a:cs typeface="Calibri" pitchFamily="34" charset="-120"/>
               </a:rPr>
-              <a:t>• cantus 宣告清晰——以音節對音為主</a:t>
-            </a:r>
-            <a:endParaRPr lang="en-US" sz="850" dirty="0"/>
+              <a:t>• cantus 宣告清晰 · 音節對音為主</a:t>
+            </a:r>
+            <a:endParaRPr lang="en-US" sz="1400" dirty="0"/>
           </a:p>
           <a:p>
             <a:pPr indent="0" marL="0">
               <a:spcAft>
-                <a:spcPts val="200"/>
+                <a:spcPts val="100"/>
               </a:spcAft>
               <a:buNone/>
             </a:pPr>
             <a:r>
-              <a:rPr lang="en-US" sz="850" dirty="0">
+              <a:rPr lang="en-US" sz="1400" dirty="0">
                 <a:solidFill>
                   <a:srgbClr val="E8D8A8"/>
                 </a:solidFill>
@@ -12750,19 +12481,19 @@
                 <a:ea typeface="Calibri" pitchFamily="34" charset="-122"/>
                 <a:cs typeface="Calibri" pitchFamily="34" charset="-120"/>
               </a:rPr>
-              <a:t>• 主旋律由級進與跳進交織——outline 上行三和弦後級進下行</a:t>
-            </a:r>
-            <a:endParaRPr lang="en-US" sz="850" dirty="0"/>
+              <a:t>• 主旋律上行三和弦後級進下行</a:t>
+            </a:r>
+            <a:endParaRPr lang="en-US" sz="1400" dirty="0"/>
           </a:p>
           <a:p>
             <a:pPr indent="0" marL="0">
               <a:spcAft>
-                <a:spcPts val="200"/>
+                <a:spcPts val="100"/>
               </a:spcAft>
               <a:buNone/>
             </a:pPr>
             <a:r>
-              <a:rPr lang="en-US" sz="850" dirty="0">
+              <a:rPr lang="en-US" sz="1400" dirty="0">
                 <a:solidFill>
                   <a:srgbClr val="E8D8A8"/>
                 </a:solidFill>
@@ -12770,19 +12501,19 @@
                 <a:ea typeface="Calibri" pitchFamily="34" charset="-122"/>
                 <a:cs typeface="Calibri" pitchFamily="34" charset="-120"/>
               </a:rPr>
-              <a:t>• tenor 節奏較慢但旋律同樣優美</a:t>
-            </a:r>
-            <a:endParaRPr lang="en-US" sz="850" dirty="0"/>
+              <a:t>• tenor 節奏較慢 · 旋律優美</a:t>
+            </a:r>
+            <a:endParaRPr lang="en-US" sz="1400" dirty="0"/>
           </a:p>
           <a:p>
             <a:pPr indent="0" marL="0">
               <a:spcAft>
-                <a:spcPts val="200"/>
+                <a:spcPts val="100"/>
               </a:spcAft>
               <a:buNone/>
             </a:pPr>
             <a:r>
-              <a:rPr lang="en-US" sz="850" dirty="0">
+              <a:rPr lang="en-US" sz="1400" dirty="0">
                 <a:solidFill>
                   <a:srgbClr val="E8D8A8"/>
                 </a:solidFill>
@@ -12790,19 +12521,19 @@
                 <a:ea typeface="Calibri" pitchFamily="34" charset="-122"/>
                 <a:cs typeface="Calibri" pitchFamily="34" charset="-120"/>
               </a:rPr>
-              <a:t>• contratenor 填補和聲——忽上忽下於 tenor</a:t>
-            </a:r>
-            <a:endParaRPr lang="en-US" sz="850" dirty="0"/>
+              <a:t>• contratenor 填補和聲</a:t>
+            </a:r>
+            <a:endParaRPr lang="en-US" sz="1400" dirty="0"/>
           </a:p>
           <a:p>
             <a:pPr indent="0" marL="0">
               <a:spcAft>
-                <a:spcPts val="200"/>
+                <a:spcPts val="100"/>
               </a:spcAft>
               <a:buNone/>
             </a:pPr>
             <a:r>
-              <a:rPr lang="en-US" sz="850" dirty="0">
+              <a:rPr lang="en-US" sz="1400" dirty="0">
                 <a:solidFill>
                   <a:srgbClr val="E8D8A8"/>
                 </a:solidFill>
@@ -12812,26 +12543,26 @@
               </a:rPr>
               <a:t>• 大量三度與六度——幾乎完全協和</a:t>
             </a:r>
-            <a:endParaRPr lang="en-US" sz="850" dirty="0"/>
+            <a:endParaRPr lang="en-US" sz="1400" dirty="0"/>
           </a:p>
           <a:p>
             <a:pPr indent="0" marL="0">
               <a:spcAft>
-                <a:spcPts val="200"/>
+                <a:spcPts val="100"/>
               </a:spcAft>
               <a:buNone/>
             </a:pPr>
-            <a:endParaRPr lang="en-US" sz="850" dirty="0"/>
+            <a:endParaRPr lang="en-US" sz="1400" dirty="0"/>
           </a:p>
           <a:p>
             <a:pPr indent="0" marL="0">
               <a:spcAft>
-                <a:spcPts val="200"/>
+                <a:spcPts val="100"/>
               </a:spcAft>
               <a:buNone/>
             </a:pPr>
             <a:r>
-              <a:rPr lang="en-US" sz="850" dirty="0">
+              <a:rPr lang="en-US" sz="1400" dirty="0">
                 <a:solidFill>
                   <a:srgbClr val="E8D8A8"/>
                 </a:solidFill>
@@ -12839,19 +12570,19 @@
                 <a:ea typeface="Calibri" pitchFamily="34" charset="-122"/>
                 <a:cs typeface="Calibri" pitchFamily="34" charset="-120"/>
               </a:rPr>
-              <a:t>終止式：</a:t>
-            </a:r>
-            <a:endParaRPr lang="en-US" sz="850" dirty="0"/>
+              <a:t>終止式</a:t>
+            </a:r>
+            <a:endParaRPr lang="en-US" sz="1400" dirty="0"/>
           </a:p>
           <a:p>
             <a:pPr indent="0" marL="0">
               <a:spcAft>
-                <a:spcPts val="200"/>
+                <a:spcPts val="100"/>
               </a:spcAft>
               <a:buNone/>
             </a:pPr>
             <a:r>
-              <a:rPr lang="en-US" sz="850" dirty="0">
+              <a:rPr lang="en-US" sz="1400" dirty="0">
                 <a:solidFill>
                   <a:srgbClr val="E8D8A8"/>
                 </a:solidFill>
@@ -12859,19 +12590,19 @@
                 <a:ea typeface="Calibri" pitchFamily="34" charset="-122"/>
                 <a:cs typeface="Calibri" pitchFamily="34" charset="-120"/>
               </a:rPr>
-              <a:t>• 傳統的 major 6th → octave</a:t>
-            </a:r>
-            <a:endParaRPr lang="en-US" sz="850" dirty="0"/>
+              <a:t>• 傳統 major 6th → octave</a:t>
+            </a:r>
+            <a:endParaRPr lang="en-US" sz="1400" dirty="0"/>
           </a:p>
           <a:p>
             <a:pPr indent="0" marL="0">
               <a:spcAft>
-                <a:spcPts val="200"/>
+                <a:spcPts val="100"/>
               </a:spcAft>
               <a:buNone/>
             </a:pPr>
             <a:r>
-              <a:rPr lang="en-US" sz="850" dirty="0">
+              <a:rPr lang="en-US" sz="1400" dirty="0">
                 <a:solidFill>
                   <a:srgbClr val="E8D8A8"/>
                 </a:solidFill>
@@ -12879,9 +12610,9 @@
                 <a:ea typeface="Calibri" pitchFamily="34" charset="-122"/>
                 <a:cs typeface="Calibri" pitchFamily="34" charset="-120"/>
               </a:rPr>
-              <a:t>• 新式：contratenor 在倒數第二音下方五度，然後躍升一個八度到倒數音上方五度——現代耳朵聽來像屬到主的進行</a:t>
-            </a:r>
-            <a:endParaRPr lang="en-US" sz="850" dirty="0"/>
+              <a:t>• 新式 contratenor 八度躍升→像屬→主</a:t>
+            </a:r>
+            <a:endParaRPr lang="en-US" sz="1400" dirty="0"/>
           </a:p>
         </p:txBody>
       </p:sp>
@@ -13021,7 +12752,7 @@
               <a:buNone/>
             </a:pPr>
             <a:r>
-              <a:rPr lang="en-US" sz="1300" dirty="0">
+              <a:rPr lang="en-US" sz="1400" dirty="0">
                 <a:solidFill>
                   <a:srgbClr val="3A4C38"/>
                 </a:solidFill>
@@ -13031,7 +12762,7 @@
               </a:rPr>
               <a:t>ca. 1397–1474 · 國際風格的集大成者 · 時代最富盛名的作曲家</a:t>
             </a:r>
-            <a:endParaRPr lang="en-US" sz="1300" dirty="0"/>
+            <a:endParaRPr lang="en-US" sz="1400" dirty="0"/>
           </a:p>
         </p:txBody>
       </p:sp>
@@ -13083,24 +12814,24 @@
         </p:nvSpPr>
         <p:spPr>
           <a:xfrm>
-            <a:off x="411480" y="1261872"/>
-            <a:ext cx="8321040" cy="292608"/>
-          </a:xfrm>
-          <a:prstGeom prst="rect">
-            <a:avLst/>
-          </a:prstGeom>
-          <a:noFill/>
-          <a:ln/>
-        </p:spPr>
-        <p:txBody>
-          <a:bodyPr wrap="square" rtlCol="0" anchor="ctr"/>
-          <a:lstStyle/>
-          <a:p>
-            <a:pPr indent="0" marL="0">
-              <a:buNone/>
-            </a:pPr>
-            <a:r>
-              <a:rPr lang="en-US" sz="1200" b="1" dirty="0">
+            <a:off x="411480" y="1280160"/>
+            <a:ext cx="8321040" cy="365760"/>
+          </a:xfrm>
+          <a:prstGeom prst="rect">
+            <a:avLst/>
+          </a:prstGeom>
+          <a:noFill/>
+          <a:ln/>
+        </p:spPr>
+        <p:txBody>
+          <a:bodyPr wrap="square" lIns="0" tIns="0" rIns="0" bIns="0" rtlCol="0" anchor="ctr"/>
+          <a:lstStyle/>
+          <a:p>
+            <a:pPr indent="0" marL="0">
+              <a:buNone/>
+            </a:pPr>
+            <a:r>
+              <a:rPr lang="en-US" sz="1400" b="1" dirty="0">
                 <a:solidFill>
                   <a:srgbClr val="7A2830"/>
                 </a:solidFill>
@@ -13108,9 +12839,9 @@
                 <a:ea typeface="Georgia" pitchFamily="34" charset="-122"/>
                 <a:cs typeface="Georgia" pitchFamily="34" charset="-120"/>
               </a:rPr>
-              <a:t>🗓 生涯軌跡 Career Timeline</a:t>
-            </a:r>
-            <a:endParaRPr lang="en-US" sz="1200" dirty="0"/>
+              <a:t>■ 生涯軌跡 Career Timeline</a:t>
+            </a:r>
+            <a:endParaRPr lang="en-US" sz="1400" dirty="0"/>
           </a:p>
         </p:txBody>
       </p:sp>
@@ -13122,27 +12853,27 @@
         </p:nvSpPr>
         <p:spPr>
           <a:xfrm>
-            <a:off x="457200" y="1572768"/>
-            <a:ext cx="8229600" cy="1737360"/>
-          </a:xfrm>
-          <a:prstGeom prst="rect">
-            <a:avLst/>
-          </a:prstGeom>
-          <a:noFill/>
-          <a:ln/>
-        </p:spPr>
-        <p:txBody>
-          <a:bodyPr wrap="square" rtlCol="0" anchor="ctr"/>
+            <a:off x="457200" y="1691640"/>
+            <a:ext cx="8229600" cy="1645920"/>
+          </a:xfrm>
+          <a:prstGeom prst="rect">
+            <a:avLst/>
+          </a:prstGeom>
+          <a:noFill/>
+          <a:ln/>
+        </p:spPr>
+        <p:txBody>
+          <a:bodyPr wrap="square" rtlCol="0" anchor="t"/>
           <a:lstStyle/>
           <a:p>
             <a:pPr indent="0" marL="0">
               <a:spcAft>
-                <a:spcPts val="200"/>
+                <a:spcPts val="100"/>
               </a:spcAft>
               <a:buNone/>
             </a:pPr>
             <a:r>
-              <a:rPr lang="en-US" sz="900" dirty="0">
+              <a:rPr lang="en-US" sz="1400" dirty="0">
                 <a:solidFill>
                   <a:srgbClr val="1B2B1F"/>
                 </a:solidFill>
@@ -13150,19 +12881,19 @@
                 <a:ea typeface="Calibri" pitchFamily="34" charset="-122"/>
                 <a:cs typeface="Calibri" pitchFamily="34" charset="-120"/>
               </a:rPr>
-              <a:t>• 生於布魯塞爾附近（神父之子，非婚生）· 1409 進入 Cambrai 主教座堂唱詩班</a:t>
-            </a:r>
-            <a:endParaRPr lang="en-US" sz="900" dirty="0"/>
+              <a:t>• 生於布魯塞爾附近 · 1409 進入 Cambrai 唱詩班</a:t>
+            </a:r>
+            <a:endParaRPr lang="en-US" sz="1400" dirty="0"/>
           </a:p>
           <a:p>
             <a:pPr indent="0" marL="0">
               <a:spcAft>
-                <a:spcPts val="200"/>
+                <a:spcPts val="100"/>
               </a:spcAft>
               <a:buNone/>
             </a:pPr>
             <a:r>
-              <a:rPr lang="en-US" sz="900" dirty="0">
+              <a:rPr lang="en-US" sz="1400" dirty="0">
                 <a:solidFill>
                   <a:srgbClr val="1B2B1F"/>
                 </a:solidFill>
@@ -13170,19 +12901,19 @@
                 <a:ea typeface="Calibri" pitchFamily="34" charset="-122"/>
                 <a:cs typeface="Calibri" pitchFamily="34" charset="-120"/>
               </a:rPr>
-              <a:t>• 1414–18 陪同贊助人出席康士坦斯公會議——結束大分裂</a:t>
-            </a:r>
-            <a:endParaRPr lang="en-US" sz="900" dirty="0"/>
+              <a:t>• 1414–18 出席康士坦斯公會議</a:t>
+            </a:r>
+            <a:endParaRPr lang="en-US" sz="1400" dirty="0"/>
           </a:p>
           <a:p>
             <a:pPr indent="0" marL="0">
               <a:spcAft>
-                <a:spcPts val="200"/>
+                <a:spcPts val="100"/>
               </a:spcAft>
               <a:buNone/>
             </a:pPr>
             <a:r>
-              <a:rPr lang="en-US" sz="900" dirty="0">
+              <a:rPr lang="en-US" sz="1400" dirty="0">
                 <a:solidFill>
                   <a:srgbClr val="1B2B1F"/>
                 </a:solidFill>
@@ -13190,19 +12921,19 @@
                 <a:ea typeface="Calibri" pitchFamily="34" charset="-122"/>
                 <a:cs typeface="Calibri" pitchFamily="34" charset="-120"/>
               </a:rPr>
-              <a:t>• 1420 服侍義大利 Rimini 的 Malatesta 家族</a:t>
-            </a:r>
-            <a:endParaRPr lang="en-US" sz="900" dirty="0"/>
+              <a:t>• 1420 服侍 Rimini 的 Malatesta 家族</a:t>
+            </a:r>
+            <a:endParaRPr lang="en-US" sz="1400" dirty="0"/>
           </a:p>
           <a:p>
             <a:pPr indent="0" marL="0">
               <a:spcAft>
-                <a:spcPts val="200"/>
+                <a:spcPts val="100"/>
               </a:spcAft>
               <a:buNone/>
             </a:pPr>
             <a:r>
-              <a:rPr lang="en-US" sz="900" dirty="0">
+              <a:rPr lang="en-US" sz="1400" dirty="0">
                 <a:solidFill>
                   <a:srgbClr val="1B2B1F"/>
                 </a:solidFill>
@@ -13210,19 +12941,19 @@
                 <a:ea typeface="Calibri" pitchFamily="34" charset="-122"/>
                 <a:cs typeface="Calibri" pitchFamily="34" charset="-120"/>
               </a:rPr>
-              <a:t>• 1426–28 服侍 Bologna 的 Aleman 樞機主教——晉鐸為神父</a:t>
-            </a:r>
-            <a:endParaRPr lang="en-US" sz="900" dirty="0"/>
+              <a:t>• 1426–28 服侍 Bologna 樞機主教</a:t>
+            </a:r>
+            <a:endParaRPr lang="en-US" sz="1400" dirty="0"/>
           </a:p>
           <a:p>
             <a:pPr indent="0" marL="0">
               <a:spcAft>
-                <a:spcPts val="200"/>
+                <a:spcPts val="100"/>
               </a:spcAft>
               <a:buNone/>
             </a:pPr>
             <a:r>
-              <a:rPr lang="en-US" sz="900" dirty="0">
+              <a:rPr lang="en-US" sz="1400" dirty="0">
                 <a:solidFill>
                   <a:srgbClr val="1B2B1F"/>
                 </a:solidFill>
@@ -13230,19 +12961,19 @@
                 <a:ea typeface="Calibri" pitchFamily="34" charset="-122"/>
                 <a:cs typeface="Calibri" pitchFamily="34" charset="-120"/>
               </a:rPr>
-              <a:t>• 1428–33 與 1435–37 兩度服務於教宗禮拜堂（羅馬、佛羅倫斯、波隆那）</a:t>
-            </a:r>
-            <a:endParaRPr lang="en-US" sz="900" dirty="0"/>
+              <a:t>• 1428–33、1435–37 兩度服務教宗禮拜堂</a:t>
+            </a:r>
+            <a:endParaRPr lang="en-US" sz="1400" dirty="0"/>
           </a:p>
           <a:p>
             <a:pPr indent="0" marL="0">
               <a:spcAft>
-                <a:spcPts val="200"/>
+                <a:spcPts val="100"/>
               </a:spcAft>
               <a:buNone/>
             </a:pPr>
             <a:r>
-              <a:rPr lang="en-US" sz="900" dirty="0">
+              <a:rPr lang="en-US" sz="1400" dirty="0">
                 <a:solidFill>
                   <a:srgbClr val="1B2B1F"/>
                 </a:solidFill>
@@ -13250,19 +12981,19 @@
                 <a:ea typeface="Calibri" pitchFamily="34" charset="-122"/>
                 <a:cs typeface="Calibri" pitchFamily="34" charset="-120"/>
               </a:rPr>
-              <a:t>• 1433–35 與 1437–39 擔任 Savoy 宮廷首席禮拜堂長（Amadeus VIII）</a:t>
-            </a:r>
-            <a:endParaRPr lang="en-US" sz="900" dirty="0"/>
+              <a:t>• 1433–39 擔任 Savoy 宮廷禮拜堂長</a:t>
+            </a:r>
+            <a:endParaRPr lang="en-US" sz="1400" dirty="0"/>
           </a:p>
           <a:p>
             <a:pPr indent="0" marL="0">
               <a:spcAft>
-                <a:spcPts val="200"/>
+                <a:spcPts val="100"/>
               </a:spcAft>
               <a:buNone/>
             </a:pPr>
             <a:r>
-              <a:rPr lang="en-US" sz="900" dirty="0">
+              <a:rPr lang="en-US" sz="1400" dirty="0">
                 <a:solidFill>
                   <a:srgbClr val="1B2B1F"/>
                 </a:solidFill>
@@ -13270,69 +13001,9 @@
                 <a:ea typeface="Calibri" pitchFamily="34" charset="-122"/>
                 <a:cs typeface="Calibri" pitchFamily="34" charset="-120"/>
               </a:rPr>
-              <a:t>• 1439 教會會議廢黜教宗並選舉 Amadeus——Du Fay 為避免雙贊助人衝突退回 Cambrai</a:t>
-            </a:r>
-            <a:endParaRPr lang="en-US" sz="900" dirty="0"/>
-          </a:p>
-          <a:p>
-            <a:pPr indent="0" marL="0">
-              <a:spcAft>
-                <a:spcPts val="200"/>
-              </a:spcAft>
-              <a:buNone/>
-            </a:pPr>
-            <a:r>
-              <a:rPr lang="en-US" sz="900" dirty="0">
-                <a:solidFill>
-                  <a:srgbClr val="1B2B1F"/>
-                </a:solidFill>
-                <a:latin typeface="Calibri" pitchFamily="34" charset="0"/>
-                <a:ea typeface="Calibri" pitchFamily="34" charset="-122"/>
-                <a:cs typeface="Calibri" pitchFamily="34" charset="-120"/>
-              </a:rPr>
-              <a:t>• 1439–52 在 Cambrai（當時由勃艮第統治）擔任行政職</a:t>
-            </a:r>
-            <a:endParaRPr lang="en-US" sz="900" dirty="0"/>
-          </a:p>
-          <a:p>
-            <a:pPr indent="0" marL="0">
-              <a:spcAft>
-                <a:spcPts val="200"/>
-              </a:spcAft>
-              <a:buNone/>
-            </a:pPr>
-            <a:r>
-              <a:rPr lang="en-US" sz="900" dirty="0">
-                <a:solidFill>
-                  <a:srgbClr val="1B2B1F"/>
-                </a:solidFill>
-                <a:latin typeface="Calibri" pitchFamily="34" charset="0"/>
-                <a:ea typeface="Calibri" pitchFamily="34" charset="-122"/>
-                <a:cs typeface="Calibri" pitchFamily="34" charset="-120"/>
-              </a:rPr>
-              <a:t>• 1452–58 再度赴 Savoy · 晚年終老於 Cambrai——獨居富有</a:t>
-            </a:r>
-            <a:endParaRPr lang="en-US" sz="900" dirty="0"/>
-          </a:p>
-          <a:p>
-            <a:pPr indent="0" marL="0">
-              <a:spcAft>
-                <a:spcPts val="200"/>
-              </a:spcAft>
-              <a:buNone/>
-            </a:pPr>
-            <a:r>
-              <a:rPr lang="en-US" sz="900" dirty="0">
-                <a:solidFill>
-                  <a:srgbClr val="1B2B1F"/>
-                </a:solidFill>
-                <a:latin typeface="Calibri" pitchFamily="34" charset="0"/>
-                <a:ea typeface="Calibri" pitchFamily="34" charset="-122"/>
-                <a:cs typeface="Calibri" pitchFamily="34" charset="-120"/>
-              </a:rPr>
-              <a:t>• 作品保存於約 100 份手稿中——從西班牙到波蘭、義大利到蘇格蘭</a:t>
-            </a:r>
-            <a:endParaRPr lang="en-US" sz="900" dirty="0"/>
+              <a:t>• 晚年終老於 Cambrai — 作品保存於約 100 份手稿</a:t>
+            </a:r>
+            <a:endParaRPr lang="en-US" sz="1400" dirty="0"/>
           </a:p>
         </p:txBody>
       </p:sp>
@@ -13345,7 +13016,7 @@
         <p:spPr>
           <a:xfrm>
             <a:off x="274320" y="3429000"/>
-            <a:ext cx="8595360" cy="1371600"/>
+            <a:ext cx="8595360" cy="1463040"/>
           </a:xfrm>
           <a:prstGeom prst="rect">
             <a:avLst/>
@@ -13365,23 +13036,23 @@
         <p:spPr>
           <a:xfrm>
             <a:off x="411480" y="3502152"/>
-            <a:ext cx="8321040" cy="292608"/>
-          </a:xfrm>
-          <a:prstGeom prst="rect">
-            <a:avLst/>
-          </a:prstGeom>
-          <a:noFill/>
-          <a:ln/>
-        </p:spPr>
-        <p:txBody>
-          <a:bodyPr wrap="square" rtlCol="0" anchor="ctr"/>
-          <a:lstStyle/>
-          <a:p>
-            <a:pPr indent="0" marL="0">
-              <a:buNone/>
-            </a:pPr>
-            <a:r>
-              <a:rPr lang="en-US" sz="1200" b="1" dirty="0">
+            <a:ext cx="8321040" cy="365760"/>
+          </a:xfrm>
+          <a:prstGeom prst="rect">
+            <a:avLst/>
+          </a:prstGeom>
+          <a:noFill/>
+          <a:ln/>
+        </p:spPr>
+        <p:txBody>
+          <a:bodyPr wrap="square" lIns="0" tIns="0" rIns="0" bIns="0" rtlCol="0" anchor="ctr"/>
+          <a:lstStyle/>
+          <a:p>
+            <a:pPr indent="0" marL="0">
+              <a:buNone/>
+            </a:pPr>
+            <a:r>
+              <a:rPr lang="en-US" sz="1400" b="1" dirty="0">
                 <a:solidFill>
                   <a:srgbClr val="7A2830"/>
                 </a:solidFill>
@@ -13389,9 +13060,9 @@
                 <a:ea typeface="Georgia" pitchFamily="34" charset="-122"/>
                 <a:cs typeface="Georgia" pitchFamily="34" charset="-120"/>
               </a:rPr>
-              <a:t>🎼 主要作品 Major Works</a:t>
-            </a:r>
-            <a:endParaRPr lang="en-US" sz="1200" dirty="0"/>
+              <a:t>■ 主要作品 Major Works</a:t>
+            </a:r>
+            <a:endParaRPr lang="en-US" sz="1400" dirty="0"/>
           </a:p>
         </p:txBody>
       </p:sp>
@@ -13403,7 +13074,7 @@
         </p:nvSpPr>
         <p:spPr>
           <a:xfrm>
-            <a:off x="457200" y="3794760"/>
+            <a:off x="457200" y="3913632"/>
             <a:ext cx="8229600" cy="960120"/>
           </a:xfrm>
           <a:prstGeom prst="rect">
@@ -13413,17 +13084,17 @@
           <a:ln/>
         </p:spPr>
         <p:txBody>
-          <a:bodyPr wrap="square" rtlCol="0" anchor="ctr"/>
+          <a:bodyPr wrap="square" rtlCol="0" anchor="t"/>
           <a:lstStyle/>
           <a:p>
             <a:pPr indent="0" marL="0">
               <a:spcAft>
-                <a:spcPts val="200"/>
+                <a:spcPts val="100"/>
               </a:spcAft>
               <a:buNone/>
             </a:pPr>
             <a:r>
-              <a:rPr lang="en-US" sz="850" dirty="0">
+              <a:rPr lang="en-US" sz="1400" dirty="0">
                 <a:solidFill>
                   <a:srgbClr val="1B2B1F"/>
                 </a:solidFill>
@@ -13433,17 +13104,17 @@
               </a:rPr>
               <a:t>• 至少 6 部 masses · 35 部其他彌撒樂章 · 4 部 Magnificats</a:t>
             </a:r>
-            <a:endParaRPr lang="en-US" sz="850" dirty="0"/>
+            <a:endParaRPr lang="en-US" sz="1400" dirty="0"/>
           </a:p>
           <a:p>
             <a:pPr indent="0" marL="0">
               <a:spcAft>
-                <a:spcPts val="200"/>
+                <a:spcPts val="100"/>
               </a:spcAft>
               <a:buNone/>
             </a:pPr>
             <a:r>
-              <a:rPr lang="en-US" sz="850" dirty="0">
+              <a:rPr lang="en-US" sz="1400" dirty="0">
                 <a:solidFill>
                   <a:srgbClr val="1B2B1F"/>
                 </a:solidFill>
@@ -13451,19 +13122,19 @@
                 <a:ea typeface="Calibri" pitchFamily="34" charset="-122"/>
                 <a:cs typeface="Calibri" pitchFamily="34" charset="-120"/>
               </a:rPr>
-              <a:t>• 60 首聖詩與其他聖歌設定 · 24 部 motets（13 首 isorhythmic, 11 首自由創作）· 34 首 plainchant 旋律</a:t>
-            </a:r>
-            <a:endParaRPr lang="en-US" sz="850" dirty="0"/>
+              <a:t>• 60 首聖詩聖歌設定 · 24 部 motets · 34 首 plainchant 旋律</a:t>
+            </a:r>
+            <a:endParaRPr lang="en-US" sz="1400" dirty="0"/>
           </a:p>
           <a:p>
             <a:pPr indent="0" marL="0">
               <a:spcAft>
-                <a:spcPts val="200"/>
+                <a:spcPts val="100"/>
               </a:spcAft>
               <a:buNone/>
             </a:pPr>
             <a:r>
-              <a:rPr lang="en-US" sz="850" dirty="0">
+              <a:rPr lang="en-US" sz="1400" dirty="0">
                 <a:solidFill>
                   <a:srgbClr val="1B2B1F"/>
                 </a:solidFill>
@@ -13473,17 +13144,17 @@
               </a:rPr>
               <a:t>• 60 首 rondeaux · 8 首 ballades · 13 首其他世俗歌曲</a:t>
             </a:r>
-            <a:endParaRPr lang="en-US" sz="850" dirty="0"/>
+            <a:endParaRPr lang="en-US" sz="1400" dirty="0"/>
           </a:p>
           <a:p>
             <a:pPr indent="0" marL="0">
               <a:spcAft>
-                <a:spcPts val="200"/>
+                <a:spcPts val="100"/>
               </a:spcAft>
               <a:buNone/>
             </a:pPr>
             <a:r>
-              <a:rPr lang="en-US" sz="850" dirty="0">
+              <a:rPr lang="en-US" sz="1400" dirty="0">
                 <a:solidFill>
                   <a:srgbClr val="1B2B1F"/>
                 </a:solidFill>
@@ -13491,9 +13162,29 @@
                 <a:ea typeface="Calibri" pitchFamily="34" charset="-122"/>
                 <a:cs typeface="Calibri" pitchFamily="34" charset="-120"/>
               </a:rPr>
-              <a:t>• 代表作：Resvellies vous (NAWM 35)、Christe redemptor omnium (NAWM 36)、Se la face ay pale 與 Missa Se la face ay pale (NAWM 37)、Nuper rosarum flores</a:t>
-            </a:r>
-            <a:endParaRPr lang="en-US" sz="850" dirty="0"/>
+              <a:t>• 代表作：Resvellies vous (NAWM 35)、Christe redemptor (NAWM 36)、</a:t>
+            </a:r>
+            <a:endParaRPr lang="en-US" sz="1400" dirty="0"/>
+          </a:p>
+          <a:p>
+            <a:pPr indent="0" marL="0">
+              <a:spcAft>
+                <a:spcPts val="100"/>
+              </a:spcAft>
+              <a:buNone/>
+            </a:pPr>
+            <a:r>
+              <a:rPr lang="en-US" sz="1400" dirty="0">
+                <a:solidFill>
+                  <a:srgbClr val="1B2B1F"/>
+                </a:solidFill>
+                <a:latin typeface="Calibri" pitchFamily="34" charset="0"/>
+                <a:ea typeface="Calibri" pitchFamily="34" charset="-122"/>
+                <a:cs typeface="Calibri" pitchFamily="34" charset="-120"/>
+              </a:rPr>
+              <a:t>  Missa Se la face ay pale (NAWM 37)、Nuper rosarum flores</a:t>
+            </a:r>
+            <a:endParaRPr lang="en-US" sz="1400" dirty="0"/>
           </a:p>
         </p:txBody>
       </p:sp>
@@ -13633,7 +13324,7 @@
               <a:buNone/>
             </a:pPr>
             <a:r>
-              <a:rPr lang="en-US" sz="1300" dirty="0">
+              <a:rPr lang="en-US" sz="1400" dirty="0">
                 <a:solidFill>
                   <a:srgbClr val="E8D8A8"/>
                 </a:solidFill>
@@ -13643,7 +13334,7 @@
               </a:rPr>
               <a:t>Chansons · Motets · Fauxbourdon · Nuper rosarum flores</a:t>
             </a:r>
-            <a:endParaRPr lang="en-US" sz="1300" dirty="0"/>
+            <a:endParaRPr lang="en-US" sz="1400" dirty="0"/>
           </a:p>
         </p:txBody>
       </p:sp>
@@ -13725,14 +13416,14 @@
           <a:ln/>
         </p:spPr>
         <p:txBody>
-          <a:bodyPr wrap="square" rtlCol="0" anchor="ctr"/>
-          <a:lstStyle/>
-          <a:p>
-            <a:pPr indent="0" marL="0">
-              <a:buNone/>
-            </a:pPr>
-            <a:r>
-              <a:rPr lang="en-US" sz="1100" b="1" dirty="0">
+          <a:bodyPr wrap="square" lIns="0" tIns="0" rIns="0" bIns="0" rtlCol="0" anchor="ctr"/>
+          <a:lstStyle/>
+          <a:p>
+            <a:pPr indent="0" marL="0">
+              <a:buNone/>
+            </a:pPr>
+            <a:r>
+              <a:rPr lang="en-US" sz="1400" b="1" dirty="0">
                 <a:solidFill>
                   <a:srgbClr val="C8A020"/>
                 </a:solidFill>
@@ -13742,7 +13433,7 @@
               </a:rPr>
               <a:t>Resvellies vous (1423, NAWM 35)</a:t>
             </a:r>
-            <a:endParaRPr lang="en-US" sz="1100" dirty="0"/>
+            <a:endParaRPr lang="en-US" sz="1400" dirty="0"/>
           </a:p>
         </p:txBody>
       </p:sp>
@@ -13764,14 +13455,14 @@
           <a:ln/>
         </p:spPr>
         <p:txBody>
-          <a:bodyPr wrap="square" rtlCol="0" anchor="ctr"/>
-          <a:lstStyle/>
-          <a:p>
-            <a:pPr indent="0" marL="0">
-              <a:buNone/>
-            </a:pPr>
-            <a:r>
-              <a:rPr lang="en-US" sz="900" dirty="0">
+          <a:bodyPr wrap="square" rtlCol="0" anchor="t"/>
+          <a:lstStyle/>
+          <a:p>
+            <a:pPr indent="0" marL="0">
+              <a:buNone/>
+            </a:pPr>
+            <a:r>
+              <a:rPr lang="en-US" sz="1400" dirty="0">
                 <a:solidFill>
                   <a:srgbClr val="E8D8A8"/>
                 </a:solidFill>
@@ -13781,7 +13472,7 @@
               </a:rPr>
               <a:t>Ballade 形式 · 寫於 Rimini 婚禮 · 法義元素、少見英格蘭特徵 · Ars Subtilior 式快速音型</a:t>
             </a:r>
-            <a:endParaRPr lang="en-US" sz="900" dirty="0"/>
+            <a:endParaRPr lang="en-US" sz="1400" dirty="0"/>
           </a:p>
         </p:txBody>
       </p:sp>
@@ -13843,14 +13534,14 @@
           <a:ln/>
         </p:spPr>
         <p:txBody>
-          <a:bodyPr wrap="square" rtlCol="0" anchor="ctr"/>
-          <a:lstStyle/>
-          <a:p>
-            <a:pPr indent="0" marL="0">
-              <a:buNone/>
-            </a:pPr>
-            <a:r>
-              <a:rPr lang="en-US" sz="1100" b="1" dirty="0">
+          <a:bodyPr wrap="square" lIns="0" tIns="0" rIns="0" bIns="0" rtlCol="0" anchor="ctr"/>
+          <a:lstStyle/>
+          <a:p>
+            <a:pPr indent="0" marL="0">
+              <a:buNone/>
+            </a:pPr>
+            <a:r>
+              <a:rPr lang="en-US" sz="1400" b="1" dirty="0">
                 <a:solidFill>
                   <a:srgbClr val="C8A020"/>
                 </a:solidFill>
@@ -13860,7 +13551,7 @@
               </a:rPr>
               <a:t>Christe redemptor omnium (NAWM 36)</a:t>
             </a:r>
-            <a:endParaRPr lang="en-US" sz="1100" dirty="0"/>
+            <a:endParaRPr lang="en-US" sz="1400" dirty="0"/>
           </a:p>
         </p:txBody>
       </p:sp>
@@ -13882,14 +13573,14 @@
           <a:ln/>
         </p:spPr>
         <p:txBody>
-          <a:bodyPr wrap="square" rtlCol="0" anchor="ctr"/>
-          <a:lstStyle/>
-          <a:p>
-            <a:pPr indent="0" marL="0">
-              <a:buNone/>
-            </a:pPr>
-            <a:r>
-              <a:rPr lang="en-US" sz="900" dirty="0">
+          <a:bodyPr wrap="square" rtlCol="0" anchor="t"/>
+          <a:lstStyle/>
+          <a:p>
+            <a:pPr indent="0" marL="0">
+              <a:buNone/>
+            </a:pPr>
+            <a:r>
+              <a:rPr lang="en-US" sz="1400" dirty="0">
                 <a:solidFill>
                   <a:srgbClr val="E8D8A8"/>
                 </a:solidFill>
@@ -13899,7 +13590,7 @@
               </a:rPr>
               <a:t>Office hymn · 使用 fauxbourdon · cantus 中 paraphrase chant · 偶數詩節為複音、奇數為齊唱</a:t>
             </a:r>
-            <a:endParaRPr lang="en-US" sz="900" dirty="0"/>
+            <a:endParaRPr lang="en-US" sz="1400" dirty="0"/>
           </a:p>
         </p:txBody>
       </p:sp>
@@ -13961,14 +13652,14 @@
           <a:ln/>
         </p:spPr>
         <p:txBody>
-          <a:bodyPr wrap="square" rtlCol="0" anchor="ctr"/>
-          <a:lstStyle/>
-          <a:p>
-            <a:pPr indent="0" marL="0">
-              <a:buNone/>
-            </a:pPr>
-            <a:r>
-              <a:rPr lang="en-US" sz="1100" b="1" dirty="0">
+          <a:bodyPr wrap="square" lIns="0" tIns="0" rIns="0" bIns="0" rtlCol="0" anchor="ctr"/>
+          <a:lstStyle/>
+          <a:p>
+            <a:pPr indent="0" marL="0">
+              <a:buNone/>
+            </a:pPr>
+            <a:r>
+              <a:rPr lang="en-US" sz="1400" b="1" dirty="0">
                 <a:solidFill>
                   <a:srgbClr val="C8A020"/>
                 </a:solidFill>
@@ -13978,7 +13669,7 @@
               </a:rPr>
               <a:t>Se la face ay pale (ca. 1430s, NAWM 37a)</a:t>
             </a:r>
-            <a:endParaRPr lang="en-US" sz="1100" dirty="0"/>
+            <a:endParaRPr lang="en-US" sz="1400" dirty="0"/>
           </a:p>
         </p:txBody>
       </p:sp>
@@ -14000,14 +13691,14 @@
           <a:ln/>
         </p:spPr>
         <p:txBody>
-          <a:bodyPr wrap="square" rtlCol="0" anchor="ctr"/>
-          <a:lstStyle/>
-          <a:p>
-            <a:pPr indent="0" marL="0">
-              <a:buNone/>
-            </a:pPr>
-            <a:r>
-              <a:rPr lang="en-US" sz="900" dirty="0">
+          <a:bodyPr wrap="square" rtlCol="0" anchor="t"/>
+          <a:lstStyle/>
+          <a:p>
+            <a:pPr indent="0" marL="0">
+              <a:buNone/>
+            </a:pPr>
+            <a:r>
+              <a:rPr lang="en-US" sz="1400" dirty="0">
                 <a:solidFill>
                   <a:srgbClr val="E8D8A8"/>
                 </a:solidFill>
@@ -14017,7 +13708,7 @@
               </a:rPr>
               <a:t>Ballade · 自由創作而非固定形式 · 強烈英格蘭影響——成熟國際風格</a:t>
             </a:r>
-            <a:endParaRPr lang="en-US" sz="900" dirty="0"/>
+            <a:endParaRPr lang="en-US" sz="1400" dirty="0"/>
           </a:p>
         </p:txBody>
       </p:sp>
@@ -14079,14 +13770,14 @@
           <a:ln/>
         </p:spPr>
         <p:txBody>
-          <a:bodyPr wrap="square" rtlCol="0" anchor="ctr"/>
-          <a:lstStyle/>
-          <a:p>
-            <a:pPr indent="0" marL="0">
-              <a:buNone/>
-            </a:pPr>
-            <a:r>
-              <a:rPr lang="en-US" sz="1100" b="1" dirty="0">
+          <a:bodyPr wrap="square" lIns="0" tIns="0" rIns="0" bIns="0" rtlCol="0" anchor="ctr"/>
+          <a:lstStyle/>
+          <a:p>
+            <a:pPr indent="0" marL="0">
+              <a:buNone/>
+            </a:pPr>
+            <a:r>
+              <a:rPr lang="en-US" sz="1400" b="1" dirty="0">
                 <a:solidFill>
                   <a:srgbClr val="C8A020"/>
                 </a:solidFill>
@@ -14096,7 +13787,7 @@
               </a:rPr>
               <a:t>Nuper rosarum flores (1436)</a:t>
             </a:r>
-            <a:endParaRPr lang="en-US" sz="1100" dirty="0"/>
+            <a:endParaRPr lang="en-US" sz="1400" dirty="0"/>
           </a:p>
         </p:txBody>
       </p:sp>
@@ -14118,14 +13809,14 @@
           <a:ln/>
         </p:spPr>
         <p:txBody>
-          <a:bodyPr wrap="square" rtlCol="0" anchor="ctr"/>
-          <a:lstStyle/>
-          <a:p>
-            <a:pPr indent="0" marL="0">
-              <a:buNone/>
-            </a:pPr>
-            <a:r>
-              <a:rPr lang="en-US" sz="900" dirty="0">
+          <a:bodyPr wrap="square" rtlCol="0" anchor="t"/>
+          <a:lstStyle/>
+          <a:p>
+            <a:pPr indent="0" marL="0">
+              <a:buNone/>
+            </a:pPr>
+            <a:r>
+              <a:rPr lang="en-US" sz="1400" dirty="0">
                 <a:solidFill>
                   <a:srgbClr val="E8D8A8"/>
                 </a:solidFill>
@@ -14135,7 +13826,7 @@
               </a:rPr>
               <a:t>Isorhythmic motet · 寫於佛羅倫斯大教堂 Brunelleschi 穹頂落成典禮 · 兩條 isorhythmic tenor 呼應雙層穹頂結構</a:t>
             </a:r>
-            <a:endParaRPr lang="en-US" sz="900" dirty="0"/>
+            <a:endParaRPr lang="en-US" sz="1400" dirty="0"/>
           </a:p>
         </p:txBody>
       </p:sp>
@@ -14197,14 +13888,14 @@
           <a:ln/>
         </p:spPr>
         <p:txBody>
-          <a:bodyPr wrap="square" rtlCol="0" anchor="ctr"/>
-          <a:lstStyle/>
-          <a:p>
-            <a:pPr indent="0" marL="0">
-              <a:buNone/>
-            </a:pPr>
-            <a:r>
-              <a:rPr lang="en-US" sz="1100" b="1" dirty="0">
+          <a:bodyPr wrap="square" lIns="0" tIns="0" rIns="0" bIns="0" rtlCol="0" anchor="ctr"/>
+          <a:lstStyle/>
+          <a:p>
+            <a:pPr indent="0" marL="0">
+              <a:buNone/>
+            </a:pPr>
+            <a:r>
+              <a:rPr lang="en-US" sz="1400" b="1" dirty="0">
                 <a:solidFill>
                   <a:srgbClr val="C8A020"/>
                 </a:solidFill>
@@ -14214,7 +13905,7 @@
               </a:rPr>
               <a:t>Supremum est mortalibus bonum (1433)</a:t>
             </a:r>
-            <a:endParaRPr lang="en-US" sz="1100" dirty="0"/>
+            <a:endParaRPr lang="en-US" sz="1400" dirty="0"/>
           </a:p>
         </p:txBody>
       </p:sp>
@@ -14236,14 +13927,14 @@
           <a:ln/>
         </p:spPr>
         <p:txBody>
-          <a:bodyPr wrap="square" rtlCol="0" anchor="ctr"/>
-          <a:lstStyle/>
-          <a:p>
-            <a:pPr indent="0" marL="0">
-              <a:buNone/>
-            </a:pPr>
-            <a:r>
-              <a:rPr lang="en-US" sz="900" dirty="0">
+          <a:bodyPr wrap="square" rtlCol="0" anchor="t"/>
+          <a:lstStyle/>
+          <a:p>
+            <a:pPr indent="0" marL="0">
+              <a:buNone/>
+            </a:pPr>
+            <a:r>
+              <a:rPr lang="en-US" sz="1400" dirty="0">
                 <a:solidFill>
                   <a:srgbClr val="E8D8A8"/>
                 </a:solidFill>
@@ -14253,7 +13944,7 @@
               </a:rPr>
               <a:t>混合 isorhythm、fauxbourdon、自由對位 · 教宗 Eugene 與神聖羅馬皇帝 Sigismund 會晤</a:t>
             </a:r>
-            <a:endParaRPr lang="en-US" sz="900" dirty="0"/>
+            <a:endParaRPr lang="en-US" sz="1400" dirty="0"/>
           </a:p>
         </p:txBody>
       </p:sp>
@@ -14315,14 +14006,14 @@
           <a:ln/>
         </p:spPr>
         <p:txBody>
-          <a:bodyPr wrap="square" rtlCol="0" anchor="ctr"/>
-          <a:lstStyle/>
-          <a:p>
-            <a:pPr indent="0" marL="0">
-              <a:buNone/>
-            </a:pPr>
-            <a:r>
-              <a:rPr lang="en-US" sz="1100" b="1" dirty="0">
+          <a:bodyPr wrap="square" lIns="0" tIns="0" rIns="0" bIns="0" rtlCol="0" anchor="ctr"/>
+          <a:lstStyle/>
+          <a:p>
+            <a:pPr indent="0" marL="0">
+              <a:buNone/>
+            </a:pPr>
+            <a:r>
+              <a:rPr lang="en-US" sz="1400" b="1" dirty="0">
                 <a:solidFill>
                   <a:srgbClr val="C8A020"/>
                 </a:solidFill>
@@ -14332,7 +14023,7 @@
               </a:rPr>
               <a:t>Missa Se la face ay pale (1450s)</a:t>
             </a:r>
-            <a:endParaRPr lang="en-US" sz="1100" dirty="0"/>
+            <a:endParaRPr lang="en-US" sz="1400" dirty="0"/>
           </a:p>
         </p:txBody>
       </p:sp>
@@ -14354,14 +14045,14 @@
           <a:ln/>
         </p:spPr>
         <p:txBody>
-          <a:bodyPr wrap="square" rtlCol="0" anchor="ctr"/>
-          <a:lstStyle/>
-          <a:p>
-            <a:pPr indent="0" marL="0">
-              <a:buNone/>
-            </a:pPr>
-            <a:r>
-              <a:rPr lang="en-US" sz="900" dirty="0">
+          <a:bodyPr wrap="square" rtlCol="0" anchor="t"/>
+          <a:lstStyle/>
+          <a:p>
+            <a:pPr indent="0" marL="0">
+              <a:buNone/>
+            </a:pPr>
+            <a:r>
+              <a:rPr lang="en-US" sz="1400" dirty="0">
                 <a:solidFill>
                   <a:srgbClr val="E8D8A8"/>
                 </a:solidFill>
@@ -14371,7 +14062,7 @@
               </a:rPr>
               <a:t>Cantus-firmus mass · 首部以世俗歌曲為 cantus firmus 的完整彌撒（見下頁）</a:t>
             </a:r>
-            <a:endParaRPr lang="en-US" sz="900" dirty="0"/>
+            <a:endParaRPr lang="en-US" sz="1400" dirty="0"/>
           </a:p>
         </p:txBody>
       </p:sp>

--- a/Ch08_England_Burgundy.pptx
+++ b/Ch08_England_Burgundy.pptx
@@ -2658,7 +2658,7 @@
                 <a:ea typeface="Calibri" pitchFamily="34" charset="-122"/>
                 <a:cs typeface="Calibri" pitchFamily="34" charset="-120"/>
               </a:rPr>
-              <a:t>• 只寫出兩個聲部：cantus 與 tenor——主要以平行六度進行</a:t>
+              <a:t>• 只寫兩聲部：cantus 與 tenor，主要平行六度進行</a:t>
             </a:r>
             <a:endParaRPr lang="en-US" sz="1400" dirty="0"/>
           </a:p>
@@ -2678,7 +2678,7 @@
                 <a:ea typeface="Calibri" pitchFamily="34" charset="-122"/>
                 <a:cs typeface="Calibri" pitchFamily="34" charset="-120"/>
               </a:rPr>
-              <a:t>• 第三聲部不寫出——由歌手自動唱在 cantus 下方精確的平行四度</a:t>
+              <a:t>• 第三聲部由歌手自動唱 cantus 下方平行四度（不寫出）</a:t>
             </a:r>
             <a:endParaRPr lang="en-US" sz="1400" dirty="0"/>
           </a:p>
@@ -2698,7 +2698,7 @@
                 <a:ea typeface="Calibri" pitchFamily="34" charset="-122"/>
                 <a:cs typeface="Calibri" pitchFamily="34" charset="-120"/>
               </a:rPr>
-              <a:t>• 結果形成連續的 6/3 和弦（類似英格蘭 faburden）</a:t>
+              <a:t>• 連續 6/3 和弦，句末終止於開放五度八度</a:t>
             </a:r>
             <a:endParaRPr lang="en-US" sz="1400" dirty="0"/>
           </a:p>
@@ -2718,10 +2718,91 @@
                 <a:ea typeface="Calibri" pitchFamily="34" charset="-122"/>
                 <a:cs typeface="Calibri" pitchFamily="34" charset="-120"/>
               </a:rPr>
-              <a:t>• 每樂句末終止於開放五度與八度</a:t>
-            </a:r>
-            <a:endParaRPr lang="en-US" sz="1400" dirty="0"/>
-          </a:p>
+              <a:t>• 受英格蘭 faburden 啟發，但技法不同</a:t>
+            </a:r>
+            <a:endParaRPr lang="en-US" sz="1400" dirty="0"/>
+          </a:p>
+        </p:txBody>
+      </p:sp>
+      <p:sp>
+        <p:nvSpPr>
+          <p:cNvPr id="10" name="Shape 8"/>
+          <p:cNvSpPr/>
+          <p:nvPr/>
+        </p:nvSpPr>
+        <p:spPr>
+          <a:xfrm>
+            <a:off x="274320" y="2834640"/>
+            <a:ext cx="4206240" cy="1965960"/>
+          </a:xfrm>
+          <a:prstGeom prst="rect">
+            <a:avLst/>
+          </a:prstGeom>
+          <a:solidFill>
+            <a:srgbClr val="E0EEDA"/>
+          </a:solidFill>
+          <a:ln/>
+        </p:spPr>
+      </p:sp>
+      <p:sp>
+        <p:nvSpPr>
+          <p:cNvPr id="11" name="Text 9"/>
+          <p:cNvSpPr/>
+          <p:nvPr/>
+        </p:nvSpPr>
+        <p:spPr>
+          <a:xfrm>
+            <a:off x="411480" y="2907792"/>
+            <a:ext cx="3931920" cy="365760"/>
+          </a:xfrm>
+          <a:prstGeom prst="rect">
+            <a:avLst/>
+          </a:prstGeom>
+          <a:noFill/>
+          <a:ln/>
+        </p:spPr>
+        <p:txBody>
+          <a:bodyPr wrap="square" lIns="0" tIns="0" rIns="0" bIns="0" rtlCol="0" anchor="ctr"/>
+          <a:lstStyle/>
+          <a:p>
+            <a:pPr indent="0" marL="0">
+              <a:buNone/>
+            </a:pPr>
+            <a:r>
+              <a:rPr lang="en-US" sz="1400" b="1" dirty="0">
+                <a:solidFill>
+                  <a:srgbClr val="2E5A3A"/>
+                </a:solidFill>
+                <a:latin typeface="Georgia" pitchFamily="34" charset="0"/>
+                <a:ea typeface="Georgia" pitchFamily="34" charset="-122"/>
+                <a:cs typeface="Georgia" pitchFamily="34" charset="-120"/>
+              </a:rPr>
+              <a:t>■ 用途 Usage</a:t>
+            </a:r>
+            <a:endParaRPr lang="en-US" sz="1400" dirty="0"/>
+          </a:p>
+        </p:txBody>
+      </p:sp>
+      <p:sp>
+        <p:nvSpPr>
+          <p:cNvPr id="12" name="Text 10"/>
+          <p:cNvSpPr/>
+          <p:nvPr/>
+        </p:nvSpPr>
+        <p:spPr>
+          <a:xfrm>
+            <a:off x="457200" y="3364992"/>
+            <a:ext cx="3977640" cy="1408176"/>
+          </a:xfrm>
+          <a:prstGeom prst="rect">
+            <a:avLst/>
+          </a:prstGeom>
+          <a:noFill/>
+          <a:ln/>
+        </p:spPr>
+        <p:txBody>
+          <a:bodyPr wrap="square" rtlCol="0" anchor="t"/>
+          <a:lstStyle/>
           <a:p>
             <a:pPr indent="0" marL="0">
               <a:spcAft>
@@ -2738,21 +2819,81 @@
                 <a:ea typeface="Calibri" pitchFamily="34" charset="-122"/>
                 <a:cs typeface="Calibri" pitchFamily="34" charset="-120"/>
               </a:rPr>
-              <a:t>• 受英格蘭 faburden 啟發——但技法不同</a:t>
-            </a:r>
-            <a:endParaRPr lang="en-US" sz="1400" dirty="0"/>
-          </a:p>
-        </p:txBody>
-      </p:sp>
-      <p:sp>
-        <p:nvSpPr>
-          <p:cNvPr id="10" name="Shape 8"/>
-          <p:cNvSpPr/>
-          <p:nvPr/>
-        </p:nvSpPr>
-        <p:spPr>
-          <a:xfrm>
-            <a:off x="274320" y="2834640"/>
+              <a:t>• Du Fay 有 24 部作品使用</a:t>
+            </a:r>
+            <a:endParaRPr lang="en-US" sz="1400" dirty="0"/>
+          </a:p>
+          <a:p>
+            <a:pPr indent="0" marL="0">
+              <a:spcAft>
+                <a:spcPts val="100"/>
+              </a:spcAft>
+              <a:buNone/>
+            </a:pPr>
+            <a:r>
+              <a:rPr lang="en-US" sz="1400" dirty="0">
+                <a:solidFill>
+                  <a:srgbClr val="1B2B1F"/>
+                </a:solidFill>
+                <a:latin typeface="Calibri" pitchFamily="34" charset="0"/>
+                <a:ea typeface="Calibri" pitchFamily="34" charset="-122"/>
+                <a:cs typeface="Calibri" pitchFamily="34" charset="-120"/>
+              </a:rPr>
+              <a:t>• 其他作曲家超過 100 部</a:t>
+            </a:r>
+            <a:endParaRPr lang="en-US" sz="1400" dirty="0"/>
+          </a:p>
+          <a:p>
+            <a:pPr indent="0" marL="0">
+              <a:spcAft>
+                <a:spcPts val="100"/>
+              </a:spcAft>
+              <a:buNone/>
+            </a:pPr>
+            <a:r>
+              <a:rPr lang="en-US" sz="1400" dirty="0">
+                <a:solidFill>
+                  <a:srgbClr val="1B2B1F"/>
+                </a:solidFill>
+                <a:latin typeface="Calibri" pitchFamily="34" charset="0"/>
+                <a:ea typeface="Calibri" pitchFamily="34" charset="-122"/>
+                <a:cs typeface="Calibri" pitchFamily="34" charset="-120"/>
+              </a:rPr>
+              <a:t>• 主要用於較簡單的日課聖歌：聖詩、對唱曲、詩篇、頌歌</a:t>
+            </a:r>
+            <a:endParaRPr lang="en-US" sz="1400" dirty="0"/>
+          </a:p>
+          <a:p>
+            <a:pPr indent="0" marL="0">
+              <a:spcAft>
+                <a:spcPts val="100"/>
+              </a:spcAft>
+              <a:buNone/>
+            </a:pPr>
+            <a:r>
+              <a:rPr lang="en-US" sz="1400" dirty="0">
+                <a:solidFill>
+                  <a:srgbClr val="1B2B1F"/>
+                </a:solidFill>
+                <a:latin typeface="Calibri" pitchFamily="34" charset="0"/>
+                <a:ea typeface="Calibri" pitchFamily="34" charset="-122"/>
+                <a:cs typeface="Calibri" pitchFamily="34" charset="-120"/>
+              </a:rPr>
+              <a:t>• cantus 中通常是 chant 的 paraphrase</a:t>
+            </a:r>
+            <a:endParaRPr lang="en-US" sz="1400" dirty="0"/>
+          </a:p>
+        </p:txBody>
+      </p:sp>
+      <p:sp>
+        <p:nvSpPr>
+          <p:cNvPr id="13" name="Shape 11"/>
+          <p:cNvSpPr/>
+          <p:nvPr/>
+        </p:nvSpPr>
+        <p:spPr>
+          <a:xfrm>
+            <a:off x="4663440" y="2834640"/>
             <a:ext cx="4206240" cy="1965960"/>
           </a:xfrm>
           <a:prstGeom prst="rect">
@@ -2766,13 +2907,13 @@
       </p:sp>
       <p:sp>
         <p:nvSpPr>
-          <p:cNvPr id="11" name="Text 9"/>
-          <p:cNvSpPr/>
-          <p:nvPr/>
-        </p:nvSpPr>
-        <p:spPr>
-          <a:xfrm>
-            <a:off x="411480" y="2907792"/>
+          <p:cNvPr id="14" name="Text 12"/>
+          <p:cNvSpPr/>
+          <p:nvPr/>
+        </p:nvSpPr>
+        <p:spPr>
+          <a:xfrm>
+            <a:off x="4800600" y="2907792"/>
             <a:ext cx="3931920" cy="365760"/>
           </a:xfrm>
           <a:prstGeom prst="rect">
@@ -2797,21 +2938,21 @@
                 <a:ea typeface="Georgia" pitchFamily="34" charset="-122"/>
                 <a:cs typeface="Georgia" pitchFamily="34" charset="-120"/>
               </a:rPr>
-              <a:t>■ 用途 Usage</a:t>
-            </a:r>
-            <a:endParaRPr lang="en-US" sz="1400" dirty="0"/>
-          </a:p>
-        </p:txBody>
-      </p:sp>
-      <p:sp>
-        <p:nvSpPr>
-          <p:cNvPr id="12" name="Text 10"/>
-          <p:cNvSpPr/>
-          <p:nvPr/>
-        </p:nvSpPr>
-        <p:spPr>
-          <a:xfrm>
-            <a:off x="457200" y="3364992"/>
+              <a:t>🆚 Faburden vs. Fauxbourdon</a:t>
+            </a:r>
+            <a:endParaRPr lang="en-US" sz="1400" dirty="0"/>
+          </a:p>
+        </p:txBody>
+      </p:sp>
+      <p:sp>
+        <p:nvSpPr>
+          <p:cNvPr id="15" name="Text 13"/>
+          <p:cNvSpPr/>
+          <p:nvPr/>
+        </p:nvSpPr>
+        <p:spPr>
+          <a:xfrm>
+            <a:off x="4846320" y="3364992"/>
             <a:ext cx="3977640" cy="1408176"/>
           </a:xfrm>
           <a:prstGeom prst="rect">
@@ -2839,7 +2980,7 @@
                 <a:ea typeface="Calibri" pitchFamily="34" charset="-122"/>
                 <a:cs typeface="Calibri" pitchFamily="34" charset="-120"/>
               </a:rPr>
-              <a:t>• Du Fay 有 24 部作品使用</a:t>
+              <a:t>Faburden（英格蘭）</a:t>
             </a:r>
             <a:endParaRPr lang="en-US" sz="1400" dirty="0"/>
           </a:p>
@@ -2859,188 +3000,7 @@
                 <a:ea typeface="Calibri" pitchFamily="34" charset="-122"/>
                 <a:cs typeface="Calibri" pitchFamily="34" charset="-120"/>
               </a:rPr>
-              <a:t>• 其他作曲家超過 100 部</a:t>
-            </a:r>
-            <a:endParaRPr lang="en-US" sz="1400" dirty="0"/>
-          </a:p>
-          <a:p>
-            <a:pPr indent="0" marL="0">
-              <a:spcAft>
-                <a:spcPts val="100"/>
-              </a:spcAft>
-              <a:buNone/>
-            </a:pPr>
-            <a:r>
-              <a:rPr lang="en-US" sz="1400" dirty="0">
-                <a:solidFill>
-                  <a:srgbClr val="1B2B1F"/>
-                </a:solidFill>
-                <a:latin typeface="Calibri" pitchFamily="34" charset="0"/>
-                <a:ea typeface="Calibri" pitchFamily="34" charset="-122"/>
-                <a:cs typeface="Calibri" pitchFamily="34" charset="-120"/>
-              </a:rPr>
-              <a:t>• 主要用於較簡單的日課聖歌：聖詩、對唱曲、詩篇、頌歌</a:t>
-            </a:r>
-            <a:endParaRPr lang="en-US" sz="1400" dirty="0"/>
-          </a:p>
-          <a:p>
-            <a:pPr indent="0" marL="0">
-              <a:spcAft>
-                <a:spcPts val="100"/>
-              </a:spcAft>
-              <a:buNone/>
-            </a:pPr>
-            <a:r>
-              <a:rPr lang="en-US" sz="1400" dirty="0">
-                <a:solidFill>
-                  <a:srgbClr val="1B2B1F"/>
-                </a:solidFill>
-                <a:latin typeface="Calibri" pitchFamily="34" charset="0"/>
-                <a:ea typeface="Calibri" pitchFamily="34" charset="-122"/>
-                <a:cs typeface="Calibri" pitchFamily="34" charset="-120"/>
-              </a:rPr>
-              <a:t>• cantus 中通常是 chant 的 paraphrase</a:t>
-            </a:r>
-            <a:endParaRPr lang="en-US" sz="1400" dirty="0"/>
-          </a:p>
-        </p:txBody>
-      </p:sp>
-      <p:sp>
-        <p:nvSpPr>
-          <p:cNvPr id="13" name="Shape 11"/>
-          <p:cNvSpPr/>
-          <p:nvPr/>
-        </p:nvSpPr>
-        <p:spPr>
-          <a:xfrm>
-            <a:off x="4663440" y="2834640"/>
-            <a:ext cx="4206240" cy="1965960"/>
-          </a:xfrm>
-          <a:prstGeom prst="rect">
-            <a:avLst/>
-          </a:prstGeom>
-          <a:solidFill>
-            <a:srgbClr val="E0EEDA"/>
-          </a:solidFill>
-          <a:ln/>
-        </p:spPr>
-      </p:sp>
-      <p:sp>
-        <p:nvSpPr>
-          <p:cNvPr id="14" name="Text 12"/>
-          <p:cNvSpPr/>
-          <p:nvPr/>
-        </p:nvSpPr>
-        <p:spPr>
-          <a:xfrm>
-            <a:off x="4800600" y="2907792"/>
-            <a:ext cx="3931920" cy="365760"/>
-          </a:xfrm>
-          <a:prstGeom prst="rect">
-            <a:avLst/>
-          </a:prstGeom>
-          <a:noFill/>
-          <a:ln/>
-        </p:spPr>
-        <p:txBody>
-          <a:bodyPr wrap="square" lIns="0" tIns="0" rIns="0" bIns="0" rtlCol="0" anchor="ctr"/>
-          <a:lstStyle/>
-          <a:p>
-            <a:pPr indent="0" marL="0">
-              <a:buNone/>
-            </a:pPr>
-            <a:r>
-              <a:rPr lang="en-US" sz="1400" b="1" dirty="0">
-                <a:solidFill>
-                  <a:srgbClr val="2E5A3A"/>
-                </a:solidFill>
-                <a:latin typeface="Georgia" pitchFamily="34" charset="0"/>
-                <a:ea typeface="Georgia" pitchFamily="34" charset="-122"/>
-                <a:cs typeface="Georgia" pitchFamily="34" charset="-120"/>
-              </a:rPr>
-              <a:t>🆚 Faburden vs. Fauxbourdon</a:t>
-            </a:r>
-            <a:endParaRPr lang="en-US" sz="1400" dirty="0"/>
-          </a:p>
-        </p:txBody>
-      </p:sp>
-      <p:sp>
-        <p:nvSpPr>
-          <p:cNvPr id="15" name="Text 13"/>
-          <p:cNvSpPr/>
-          <p:nvPr/>
-        </p:nvSpPr>
-        <p:spPr>
-          <a:xfrm>
-            <a:off x="4846320" y="3364992"/>
-            <a:ext cx="3977640" cy="1408176"/>
-          </a:xfrm>
-          <a:prstGeom prst="rect">
-            <a:avLst/>
-          </a:prstGeom>
-          <a:noFill/>
-          <a:ln/>
-        </p:spPr>
-        <p:txBody>
-          <a:bodyPr wrap="square" rtlCol="0" anchor="t"/>
-          <a:lstStyle/>
-          <a:p>
-            <a:pPr indent="0" marL="0">
-              <a:spcAft>
-                <a:spcPts val="100"/>
-              </a:spcAft>
-              <a:buNone/>
-            </a:pPr>
-            <a:r>
-              <a:rPr lang="en-US" sz="1400" dirty="0">
-                <a:solidFill>
-                  <a:srgbClr val="1B2B1F"/>
-                </a:solidFill>
-                <a:latin typeface="Calibri" pitchFamily="34" charset="0"/>
-                <a:ea typeface="Calibri" pitchFamily="34" charset="-122"/>
-                <a:cs typeface="Calibri" pitchFamily="34" charset="-120"/>
-              </a:rPr>
-              <a:t>Faburden（英格蘭）</a:t>
-            </a:r>
-            <a:endParaRPr lang="en-US" sz="1400" dirty="0"/>
-          </a:p>
-          <a:p>
-            <a:pPr indent="0" marL="0">
-              <a:spcAft>
-                <a:spcPts val="100"/>
-              </a:spcAft>
-              <a:buNone/>
-            </a:pPr>
-            <a:r>
-              <a:rPr lang="en-US" sz="1400" dirty="0">
-                <a:solidFill>
-                  <a:srgbClr val="1B2B1F"/>
-                </a:solidFill>
-                <a:latin typeface="Calibri" pitchFamily="34" charset="0"/>
-                <a:ea typeface="Calibri" pitchFamily="34" charset="-122"/>
-                <a:cs typeface="Calibri" pitchFamily="34" charset="-120"/>
-              </a:rPr>
-              <a:t>• 中聲部 = chant · 上下三四度</a:t>
-            </a:r>
-            <a:endParaRPr lang="en-US" sz="1400" dirty="0"/>
-          </a:p>
-          <a:p>
-            <a:pPr indent="0" marL="0">
-              <a:spcAft>
-                <a:spcPts val="100"/>
-              </a:spcAft>
-              <a:buNone/>
-            </a:pPr>
-            <a:r>
-              <a:rPr lang="en-US" sz="1400" dirty="0">
-                <a:solidFill>
-                  <a:srgbClr val="1B2B1F"/>
-                </a:solidFill>
-                <a:latin typeface="Calibri" pitchFamily="34" charset="0"/>
-                <a:ea typeface="Calibri" pitchFamily="34" charset="-122"/>
-                <a:cs typeface="Calibri" pitchFamily="34" charset="-120"/>
-              </a:rPr>
-              <a:t>• 即興、規則式</a:t>
+              <a:t>• 中聲部 = chant · 即興</a:t>
             </a:r>
             <a:endParaRPr lang="en-US" sz="1400" dirty="0"/>
           </a:p>
@@ -12372,7 +12332,7 @@
                 <a:ea typeface="Calibri" pitchFamily="34" charset="-122"/>
                 <a:cs typeface="Calibri" pitchFamily="34" charset="-120"/>
               </a:rPr>
-              <a:t>形式：rondeau (ABaAabAB)</a:t>
+              <a:t>形式：rondeau (ABaAabAB) · 15 世紀最常見的 chanson</a:t>
             </a:r>
             <a:endParaRPr lang="en-US" sz="1400" dirty="0"/>
           </a:p>
@@ -12383,17 +12343,6 @@
               </a:spcAft>
               <a:buNone/>
             </a:pPr>
-            <a:r>
-              <a:rPr lang="en-US" sz="1400" dirty="0">
-                <a:solidFill>
-                  <a:srgbClr val="E8D8A8"/>
-                </a:solidFill>
-                <a:latin typeface="Calibri" pitchFamily="34" charset="0"/>
-                <a:ea typeface="Calibri" pitchFamily="34" charset="-122"/>
-                <a:cs typeface="Calibri" pitchFamily="34" charset="-120"/>
-              </a:rPr>
-              <a:t>15 世紀最常見的 chanson 形式</a:t>
-            </a:r>
             <a:endParaRPr lang="en-US" sz="1400" dirty="0"/>
           </a:p>
           <a:p>
@@ -12403,6 +12352,17 @@
               </a:spcAft>
               <a:buNone/>
             </a:pPr>
+            <a:r>
+              <a:rPr lang="en-US" sz="1400" dirty="0">
+                <a:solidFill>
+                  <a:srgbClr val="E8D8A8"/>
+                </a:solidFill>
+                <a:latin typeface="Calibri" pitchFamily="34" charset="0"/>
+                <a:ea typeface="Calibri" pitchFamily="34" charset="-122"/>
+                <a:cs typeface="Calibri" pitchFamily="34" charset="-120"/>
+              </a:rPr>
+              <a:t>風格混合</a:t>
+            </a:r>
             <a:endParaRPr lang="en-US" sz="1400" dirty="0"/>
           </a:p>
           <a:p>
@@ -12421,7 +12381,7 @@
                 <a:ea typeface="Calibri" pitchFamily="34" charset="-122"/>
                 <a:cs typeface="Calibri" pitchFamily="34" charset="-120"/>
               </a:rPr>
-              <a:t>風格混合</a:t>
+              <a:t>• 6/8 拍 · hemiola 交叉節奏</a:t>
             </a:r>
             <a:endParaRPr lang="en-US" sz="1400" dirty="0"/>
           </a:p>
@@ -12441,7 +12401,7 @@
                 <a:ea typeface="Calibri" pitchFamily="34" charset="-122"/>
                 <a:cs typeface="Calibri" pitchFamily="34" charset="-120"/>
               </a:rPr>
-              <a:t>• 6/8 拍 · hemiola 交叉節奏</a:t>
+              <a:t>• cantus 清晰宣告，音節對音為主</a:t>
             </a:r>
             <a:endParaRPr lang="en-US" sz="1400" dirty="0"/>
           </a:p>
@@ -12461,7 +12421,7 @@
                 <a:ea typeface="Calibri" pitchFamily="34" charset="-122"/>
                 <a:cs typeface="Calibri" pitchFamily="34" charset="-120"/>
               </a:rPr>
-              <a:t>• cantus 宣告清晰 · 音節對音為主</a:t>
+              <a:t>• 主旋律上行三和弦後級進下行</a:t>
             </a:r>
             <a:endParaRPr lang="en-US" sz="1400" dirty="0"/>
           </a:p>
@@ -12481,7 +12441,7 @@
                 <a:ea typeface="Calibri" pitchFamily="34" charset="-122"/>
                 <a:cs typeface="Calibri" pitchFamily="34" charset="-120"/>
               </a:rPr>
-              <a:t>• 主旋律上行三和弦後級進下行</a:t>
+              <a:t>• tenor 節奏較慢、旋律優美</a:t>
             </a:r>
             <a:endParaRPr lang="en-US" sz="1400" dirty="0"/>
           </a:p>
@@ -12501,7 +12461,7 @@
                 <a:ea typeface="Calibri" pitchFamily="34" charset="-122"/>
                 <a:cs typeface="Calibri" pitchFamily="34" charset="-120"/>
               </a:rPr>
-              <a:t>• tenor 節奏較慢 · 旋律優美</a:t>
+              <a:t>• contratenor 填補和聲</a:t>
             </a:r>
             <a:endParaRPr lang="en-US" sz="1400" dirty="0"/>
           </a:p>
@@ -12521,7 +12481,7 @@
                 <a:ea typeface="Calibri" pitchFamily="34" charset="-122"/>
                 <a:cs typeface="Calibri" pitchFamily="34" charset="-120"/>
               </a:rPr>
-              <a:t>• contratenor 填補和聲</a:t>
+              <a:t>• 大量三度與六度——幾近完全協和</a:t>
             </a:r>
             <a:endParaRPr lang="en-US" sz="1400" dirty="0"/>
           </a:p>
@@ -12532,17 +12492,6 @@
               </a:spcAft>
               <a:buNone/>
             </a:pPr>
-            <a:r>
-              <a:rPr lang="en-US" sz="1400" dirty="0">
-                <a:solidFill>
-                  <a:srgbClr val="E8D8A8"/>
-                </a:solidFill>
-                <a:latin typeface="Calibri" pitchFamily="34" charset="0"/>
-                <a:ea typeface="Calibri" pitchFamily="34" charset="-122"/>
-                <a:cs typeface="Calibri" pitchFamily="34" charset="-120"/>
-              </a:rPr>
-              <a:t>• 大量三度與六度——幾乎完全協和</a:t>
-            </a:r>
             <a:endParaRPr lang="en-US" sz="1400" dirty="0"/>
           </a:p>
           <a:p>
@@ -12552,6 +12501,17 @@
               </a:spcAft>
               <a:buNone/>
             </a:pPr>
+            <a:r>
+              <a:rPr lang="en-US" sz="1400" dirty="0">
+                <a:solidFill>
+                  <a:srgbClr val="E8D8A8"/>
+                </a:solidFill>
+                <a:latin typeface="Calibri" pitchFamily="34" charset="0"/>
+                <a:ea typeface="Calibri" pitchFamily="34" charset="-122"/>
+                <a:cs typeface="Calibri" pitchFamily="34" charset="-120"/>
+              </a:rPr>
+              <a:t>終止式</a:t>
+            </a:r>
             <a:endParaRPr lang="en-US" sz="1400" dirty="0"/>
           </a:p>
           <a:p>
@@ -12570,7 +12530,7 @@
                 <a:ea typeface="Calibri" pitchFamily="34" charset="-122"/>
                 <a:cs typeface="Calibri" pitchFamily="34" charset="-120"/>
               </a:rPr>
-              <a:t>終止式</a:t>
+              <a:t>• 傳統：major 6th → octave</a:t>
             </a:r>
             <a:endParaRPr lang="en-US" sz="1400" dirty="0"/>
           </a:p>
@@ -12590,27 +12550,7 @@
                 <a:ea typeface="Calibri" pitchFamily="34" charset="-122"/>
                 <a:cs typeface="Calibri" pitchFamily="34" charset="-120"/>
               </a:rPr>
-              <a:t>• 傳統 major 6th → octave</a:t>
-            </a:r>
-            <a:endParaRPr lang="en-US" sz="1400" dirty="0"/>
-          </a:p>
-          <a:p>
-            <a:pPr indent="0" marL="0">
-              <a:spcAft>
-                <a:spcPts val="100"/>
-              </a:spcAft>
-              <a:buNone/>
-            </a:pPr>
-            <a:r>
-              <a:rPr lang="en-US" sz="1400" dirty="0">
-                <a:solidFill>
-                  <a:srgbClr val="E8D8A8"/>
-                </a:solidFill>
-                <a:latin typeface="Calibri" pitchFamily="34" charset="0"/>
-                <a:ea typeface="Calibri" pitchFamily="34" charset="-122"/>
-                <a:cs typeface="Calibri" pitchFamily="34" charset="-120"/>
-              </a:rPr>
-              <a:t>• 新式 contratenor 八度躍升→像屬→主</a:t>
+              <a:t>• 新式：contratenor 八度躍升像屬→主</a:t>
             </a:r>
             <a:endParaRPr lang="en-US" sz="1400" dirty="0"/>
           </a:p>
@@ -13122,7 +13062,7 @@
                 <a:ea typeface="Calibri" pitchFamily="34" charset="-122"/>
                 <a:cs typeface="Calibri" pitchFamily="34" charset="-120"/>
               </a:rPr>
-              <a:t>• 60 首聖詩聖歌設定 · 24 部 motets · 34 首 plainchant 旋律</a:t>
+              <a:t>• 60 首聖詩聖歌 · 24 部 motets · 34 首 plainchant</a:t>
             </a:r>
             <a:endParaRPr lang="en-US" sz="1400" dirty="0"/>
           </a:p>
@@ -13142,7 +13082,7 @@
                 <a:ea typeface="Calibri" pitchFamily="34" charset="-122"/>
                 <a:cs typeface="Calibri" pitchFamily="34" charset="-120"/>
               </a:rPr>
-              <a:t>• 60 首 rondeaux · 8 首 ballades · 13 首其他世俗歌曲</a:t>
+              <a:t>• 60 rondeaux · 8 ballades · 13 其他世俗歌曲</a:t>
             </a:r>
             <a:endParaRPr lang="en-US" sz="1400" dirty="0"/>
           </a:p>
@@ -13162,27 +13102,7 @@
                 <a:ea typeface="Calibri" pitchFamily="34" charset="-122"/>
                 <a:cs typeface="Calibri" pitchFamily="34" charset="-120"/>
               </a:rPr>
-              <a:t>• 代表作：Resvellies vous (NAWM 35)、Christe redemptor (NAWM 36)、</a:t>
-            </a:r>
-            <a:endParaRPr lang="en-US" sz="1400" dirty="0"/>
-          </a:p>
-          <a:p>
-            <a:pPr indent="0" marL="0">
-              <a:spcAft>
-                <a:spcPts val="100"/>
-              </a:spcAft>
-              <a:buNone/>
-            </a:pPr>
-            <a:r>
-              <a:rPr lang="en-US" sz="1400" dirty="0">
-                <a:solidFill>
-                  <a:srgbClr val="1B2B1F"/>
-                </a:solidFill>
-                <a:latin typeface="Calibri" pitchFamily="34" charset="0"/>
-                <a:ea typeface="Calibri" pitchFamily="34" charset="-122"/>
-                <a:cs typeface="Calibri" pitchFamily="34" charset="-120"/>
-              </a:rPr>
-              <a:t>  Missa Se la face ay pale (NAWM 37)、Nuper rosarum flores</a:t>
+              <a:t>• 代表作：Resvellies vous (NAWM 35) · Missa Se la face ay pale (NAWM 37) · Nuper rosarum flores</a:t>
             </a:r>
             <a:endParaRPr lang="en-US" sz="1400" dirty="0"/>
           </a:p>
@@ -13824,7 +13744,7 @@
                 <a:ea typeface="Calibri" pitchFamily="34" charset="-122"/>
                 <a:cs typeface="Calibri" pitchFamily="34" charset="-120"/>
               </a:rPr>
-              <a:t>Isorhythmic motet · 寫於佛羅倫斯大教堂 Brunelleschi 穹頂落成典禮 · 兩條 isorhythmic tenor 呼應雙層穹頂結構</a:t>
+              <a:t>Isorhythmic motet · 為佛羅倫斯大教堂穹頂落成典禮 · 兩條 tenor 呼應建築結構</a:t>
             </a:r>
             <a:endParaRPr lang="en-US" sz="1400" dirty="0"/>
           </a:p>
